--- a/deck/AI_Circuit_Architect.pptx
+++ b/deck/AI_Circuit_Architect.pptx
@@ -8,6 +8,12 @@
     <p:sldId id="256" r:id="rId7"/>
     <p:sldId id="257" r:id="rId8"/>
     <p:sldId id="258" r:id="rId9"/>
+    <p:sldId id="259" r:id="rId10"/>
+    <p:sldId id="260" r:id="rId11"/>
+    <p:sldId id="261" r:id="rId12"/>
+    <p:sldId id="262" r:id="rId13"/>
+    <p:sldId id="263" r:id="rId14"/>
+    <p:sldId id="264" r:id="rId15"/>
   </p:sldIdLst>
   <p:sldSz cx="12191695" cy="6858000" type="screen4x3"/>
   <p:notesSz cx="6858000" cy="9144000"/>
@@ -3271,13 +3277,13 @@
               </a:lnSpc>
             </a:pPr>
             <a:r>
-              <a:rPr sz="2100" b="0" i="0">
+              <a:rPr sz="2000" b="0" i="0">
                 <a:solidFill>
                   <a:srgbClr val="8B98A5"/>
                 </a:solidFill>
                 <a:latin typeface="Calibri"/>
               </a:rPr>
-              <a:t>From idea to PCB-ready schematic — a society of agents</a:t>
+              <a:t>From a plain-English idea to a structured KiCad starting point — designed by a society of agents</a:t>
             </a:r>
           </a:p>
         </p:txBody>
@@ -3290,7 +3296,7 @@
         </p:nvSpPr>
         <p:spPr>
           <a:xfrm>
-            <a:off x="4224528" y="5440680"/>
+            <a:off x="4224528" y="5486400"/>
             <a:ext cx="3749039" cy="502920"/>
           </a:xfrm>
           <a:prstGeom prst="roundRect">
@@ -3338,7 +3344,7 @@
         </p:nvSpPr>
         <p:spPr>
           <a:xfrm>
-            <a:off x="4224528" y="5440680"/>
+            <a:off x="4224528" y="5486400"/>
             <a:ext cx="3749039" cy="502920"/>
           </a:xfrm>
           <a:prstGeom prst="rect">
@@ -3465,478 +3471,21 @@
                 </a:solidFill>
                 <a:latin typeface="Calibri"/>
               </a:rPr>
-              <a:t>Two heads beat one — and we measured it</a:t>
-            </a:r>
-          </a:p>
-        </p:txBody>
-      </p:sp>
-      <p:sp>
-        <p:nvSpPr>
-          <p:cNvPr id="4" name="TextBox 3"/>
-          <p:cNvSpPr txBox="1"/>
-          <p:nvPr/>
-        </p:nvSpPr>
-        <p:spPr>
-          <a:xfrm>
-            <a:off x="640080" y="1554480"/>
-            <a:ext cx="5486400" cy="1463040"/>
-          </a:xfrm>
-          <a:prstGeom prst="rect">
-            <a:avLst/>
-          </a:prstGeom>
-          <a:noFill/>
-        </p:spPr>
-        <p:txBody>
-          <a:bodyPr wrap="square" anchor="t" lIns="0" rIns="0" tIns="0" bIns="0">
-            <a:noAutofit/>
-          </a:bodyPr>
-          <a:lstStyle/>
-          <a:p>
-            <a:pPr algn="l">
-              <a:lnSpc>
-                <a:spcPct val="100000"/>
-              </a:lnSpc>
-            </a:pPr>
-            <a:r>
-              <a:rPr sz="9600" b="1" i="0">
-                <a:solidFill>
-                  <a:srgbClr val="4F9CF9"/>
-                </a:solidFill>
-                <a:latin typeface="Calibri"/>
-              </a:rPr>
-              <a:t>+3.2</a:t>
-            </a:r>
-          </a:p>
-        </p:txBody>
-      </p:sp>
-      <p:sp>
-        <p:nvSpPr>
-          <p:cNvPr id="5" name="TextBox 4"/>
-          <p:cNvSpPr txBox="1"/>
-          <p:nvPr/>
-        </p:nvSpPr>
-        <p:spPr>
-          <a:xfrm>
-            <a:off x="713232" y="2971800"/>
-            <a:ext cx="5394960" cy="640080"/>
-          </a:xfrm>
-          <a:prstGeom prst="rect">
-            <a:avLst/>
-          </a:prstGeom>
-          <a:noFill/>
-        </p:spPr>
-        <p:txBody>
-          <a:bodyPr wrap="square" anchor="t" lIns="0" rIns="0" tIns="0" bIns="0">
-            <a:noAutofit/>
-          </a:bodyPr>
-          <a:lstStyle/>
-          <a:p>
-            <a:pPr algn="l">
-              <a:lnSpc>
-                <a:spcPct val="110000"/>
-              </a:lnSpc>
-            </a:pPr>
-            <a:r>
-              <a:rPr sz="1500" b="0" i="0">
-                <a:solidFill>
-                  <a:srgbClr val="8B98A5"/>
-                </a:solidFill>
-                <a:latin typeface="Calibri"/>
-              </a:rPr>
-              <a:t>more design concerns surfaced than a single LLM — on average, across 5 diverse hard designs (live Qwen).</a:t>
-            </a:r>
-          </a:p>
-        </p:txBody>
-      </p:sp>
-      <p:sp>
-        <p:nvSpPr>
-          <p:cNvPr id="6" name="Rounded Rectangle 5"/>
+              <a:t>A schematic is slow to start — and one LLM cuts corners</a:t>
+            </a:r>
+          </a:p>
+        </p:txBody>
+      </p:sp>
+      <p:sp>
+        <p:nvSpPr>
+          <p:cNvPr id="4" name="Rounded Rectangle 3"/>
           <p:cNvSpPr/>
           <p:nvPr/>
         </p:nvSpPr>
         <p:spPr>
           <a:xfrm>
-            <a:off x="731520" y="4069080"/>
-            <a:ext cx="4937760" cy="457200"/>
-          </a:xfrm>
-          <a:prstGeom prst="roundRect">
-            <a:avLst>
-              <a:gd name="adj" fmla="val 50000"/>
-            </a:avLst>
-          </a:prstGeom>
-          <a:solidFill>
-            <a:srgbClr val="222C38"/>
-          </a:solidFill>
-          <a:ln>
-            <a:noFill/>
-          </a:ln>
-          <a:effectLst/>
-        </p:spPr>
-        <p:style>
-          <a:lnRef idx="1">
-            <a:schemeClr val="accent1"/>
-          </a:lnRef>
-          <a:fillRef idx="3">
-            <a:schemeClr val="accent1"/>
-          </a:fillRef>
-          <a:effectRef idx="2">
-            <a:schemeClr val="accent1"/>
-          </a:effectRef>
-          <a:fontRef idx="minor">
-            <a:schemeClr val="lt1"/>
-          </a:fontRef>
-        </p:style>
-        <p:txBody>
-          <a:bodyPr rtlCol="0" anchor="ctr"/>
-          <a:lstStyle/>
-          <a:p>
-            <a:pPr algn="ctr"/>
-          </a:p>
-        </p:txBody>
-      </p:sp>
-      <p:sp>
-        <p:nvSpPr>
-          <p:cNvPr id="7" name="Rounded Rectangle 6"/>
-          <p:cNvSpPr/>
-          <p:nvPr/>
-        </p:nvSpPr>
-        <p:spPr>
-          <a:xfrm>
-            <a:off x="731520" y="4069080"/>
-            <a:ext cx="4773168" cy="457200"/>
-          </a:xfrm>
-          <a:prstGeom prst="roundRect">
-            <a:avLst>
-              <a:gd name="adj" fmla="val 50000"/>
-            </a:avLst>
-          </a:prstGeom>
-          <a:solidFill>
-            <a:srgbClr val="4F9CF9"/>
-          </a:solidFill>
-          <a:ln>
-            <a:noFill/>
-          </a:ln>
-          <a:effectLst/>
-        </p:spPr>
-        <p:style>
-          <a:lnRef idx="1">
-            <a:schemeClr val="accent1"/>
-          </a:lnRef>
-          <a:fillRef idx="3">
-            <a:schemeClr val="accent1"/>
-          </a:fillRef>
-          <a:effectRef idx="2">
-            <a:schemeClr val="accent1"/>
-          </a:effectRef>
-          <a:fontRef idx="minor">
-            <a:schemeClr val="lt1"/>
-          </a:fontRef>
-        </p:style>
-        <p:txBody>
-          <a:bodyPr rtlCol="0" anchor="ctr"/>
-          <a:lstStyle/>
-          <a:p>
-            <a:pPr algn="ctr"/>
-          </a:p>
-        </p:txBody>
-      </p:sp>
-      <p:sp>
-        <p:nvSpPr>
-          <p:cNvPr id="8" name="TextBox 7"/>
-          <p:cNvSpPr txBox="1"/>
-          <p:nvPr/>
-        </p:nvSpPr>
-        <p:spPr>
-          <a:xfrm>
-            <a:off x="731520" y="3758184"/>
-            <a:ext cx="4937760" cy="274320"/>
-          </a:xfrm>
-          <a:prstGeom prst="rect">
-            <a:avLst/>
-          </a:prstGeom>
-          <a:noFill/>
-        </p:spPr>
-        <p:txBody>
-          <a:bodyPr wrap="square" anchor="t" lIns="0" rIns="0" tIns="0" bIns="0">
-            <a:noAutofit/>
-          </a:bodyPr>
-          <a:lstStyle/>
-          <a:p>
-            <a:pPr algn="l">
-              <a:lnSpc>
-                <a:spcPct val="100000"/>
-              </a:lnSpc>
-            </a:pPr>
-            <a:r>
-              <a:rPr sz="1300" b="1" i="0">
-                <a:solidFill>
-                  <a:srgbClr val="E6EDF3"/>
-                </a:solidFill>
-                <a:latin typeface="Calibri"/>
-              </a:rPr>
-              <a:t>Multi-agent team</a:t>
-            </a:r>
-          </a:p>
-        </p:txBody>
-      </p:sp>
-      <p:sp>
-        <p:nvSpPr>
-          <p:cNvPr id="9" name="TextBox 8"/>
-          <p:cNvSpPr txBox="1"/>
-          <p:nvPr/>
-        </p:nvSpPr>
-        <p:spPr>
-          <a:xfrm>
-            <a:off x="5596128" y="4087368"/>
-            <a:ext cx="1280160" cy="365760"/>
-          </a:xfrm>
-          <a:prstGeom prst="rect">
-            <a:avLst/>
-          </a:prstGeom>
-          <a:noFill/>
-        </p:spPr>
-        <p:txBody>
-          <a:bodyPr wrap="square" anchor="ctr" lIns="0" rIns="0" tIns="0" bIns="0">
-            <a:noAutofit/>
-          </a:bodyPr>
-          <a:lstStyle/>
-          <a:p>
-            <a:pPr algn="l">
-              <a:lnSpc>
-                <a:spcPct val="100000"/>
-              </a:lnSpc>
-            </a:pPr>
-            <a:r>
-              <a:rPr sz="1400" b="1" i="0">
-                <a:solidFill>
-                  <a:srgbClr val="4F9CF9"/>
-                </a:solidFill>
-                <a:latin typeface="Calibri"/>
-              </a:rPr>
-              <a:t>11.6 / 12</a:t>
-            </a:r>
-          </a:p>
-        </p:txBody>
-      </p:sp>
-      <p:sp>
-        <p:nvSpPr>
-          <p:cNvPr id="10" name="Rounded Rectangle 9"/>
-          <p:cNvSpPr/>
-          <p:nvPr/>
-        </p:nvSpPr>
-        <p:spPr>
-          <a:xfrm>
-            <a:off x="731520" y="5074920"/>
-            <a:ext cx="4937760" cy="457200"/>
-          </a:xfrm>
-          <a:prstGeom prst="roundRect">
-            <a:avLst>
-              <a:gd name="adj" fmla="val 50000"/>
-            </a:avLst>
-          </a:prstGeom>
-          <a:solidFill>
-            <a:srgbClr val="222C38"/>
-          </a:solidFill>
-          <a:ln>
-            <a:noFill/>
-          </a:ln>
-          <a:effectLst/>
-        </p:spPr>
-        <p:style>
-          <a:lnRef idx="1">
-            <a:schemeClr val="accent1"/>
-          </a:lnRef>
-          <a:fillRef idx="3">
-            <a:schemeClr val="accent1"/>
-          </a:fillRef>
-          <a:effectRef idx="2">
-            <a:schemeClr val="accent1"/>
-          </a:effectRef>
-          <a:fontRef idx="minor">
-            <a:schemeClr val="lt1"/>
-          </a:fontRef>
-        </p:style>
-        <p:txBody>
-          <a:bodyPr rtlCol="0" anchor="ctr"/>
-          <a:lstStyle/>
-          <a:p>
-            <a:pPr algn="ctr"/>
-          </a:p>
-        </p:txBody>
-      </p:sp>
-      <p:sp>
-        <p:nvSpPr>
-          <p:cNvPr id="11" name="Rounded Rectangle 10"/>
-          <p:cNvSpPr/>
-          <p:nvPr/>
-        </p:nvSpPr>
-        <p:spPr>
-          <a:xfrm>
-            <a:off x="731520" y="5074920"/>
-            <a:ext cx="3456432" cy="457200"/>
-          </a:xfrm>
-          <a:prstGeom prst="roundRect">
-            <a:avLst>
-              <a:gd name="adj" fmla="val 50000"/>
-            </a:avLst>
-          </a:prstGeom>
-          <a:solidFill>
-            <a:srgbClr val="8B98A5"/>
-          </a:solidFill>
-          <a:ln>
-            <a:noFill/>
-          </a:ln>
-          <a:effectLst/>
-        </p:spPr>
-        <p:style>
-          <a:lnRef idx="1">
-            <a:schemeClr val="accent1"/>
-          </a:lnRef>
-          <a:fillRef idx="3">
-            <a:schemeClr val="accent1"/>
-          </a:fillRef>
-          <a:effectRef idx="2">
-            <a:schemeClr val="accent1"/>
-          </a:effectRef>
-          <a:fontRef idx="minor">
-            <a:schemeClr val="lt1"/>
-          </a:fontRef>
-        </p:style>
-        <p:txBody>
-          <a:bodyPr rtlCol="0" anchor="ctr"/>
-          <a:lstStyle/>
-          <a:p>
-            <a:pPr algn="ctr"/>
-          </a:p>
-        </p:txBody>
-      </p:sp>
-      <p:sp>
-        <p:nvSpPr>
-          <p:cNvPr id="12" name="TextBox 11"/>
-          <p:cNvSpPr txBox="1"/>
-          <p:nvPr/>
-        </p:nvSpPr>
-        <p:spPr>
-          <a:xfrm>
-            <a:off x="731520" y="4764024"/>
-            <a:ext cx="4937760" cy="274320"/>
-          </a:xfrm>
-          <a:prstGeom prst="rect">
-            <a:avLst/>
-          </a:prstGeom>
-          <a:noFill/>
-        </p:spPr>
-        <p:txBody>
-          <a:bodyPr wrap="square" anchor="t" lIns="0" rIns="0" tIns="0" bIns="0">
-            <a:noAutofit/>
-          </a:bodyPr>
-          <a:lstStyle/>
-          <a:p>
-            <a:pPr algn="l">
-              <a:lnSpc>
-                <a:spcPct val="100000"/>
-              </a:lnSpc>
-            </a:pPr>
-            <a:r>
-              <a:rPr sz="1300" b="1" i="0">
-                <a:solidFill>
-                  <a:srgbClr val="E6EDF3"/>
-                </a:solidFill>
-                <a:latin typeface="Calibri"/>
-              </a:rPr>
-              <a:t>Single agent</a:t>
-            </a:r>
-          </a:p>
-        </p:txBody>
-      </p:sp>
-      <p:sp>
-        <p:nvSpPr>
-          <p:cNvPr id="13" name="TextBox 12"/>
-          <p:cNvSpPr txBox="1"/>
-          <p:nvPr/>
-        </p:nvSpPr>
-        <p:spPr>
-          <a:xfrm>
-            <a:off x="4279392" y="5093208"/>
-            <a:ext cx="1280160" cy="365760"/>
-          </a:xfrm>
-          <a:prstGeom prst="rect">
-            <a:avLst/>
-          </a:prstGeom>
-          <a:noFill/>
-        </p:spPr>
-        <p:txBody>
-          <a:bodyPr wrap="square" anchor="ctr" lIns="0" rIns="0" tIns="0" bIns="0">
-            <a:noAutofit/>
-          </a:bodyPr>
-          <a:lstStyle/>
-          <a:p>
-            <a:pPr algn="l">
-              <a:lnSpc>
-                <a:spcPct val="100000"/>
-              </a:lnSpc>
-            </a:pPr>
-            <a:r>
-              <a:rPr sz="1400" b="1" i="0">
-                <a:solidFill>
-                  <a:srgbClr val="8B98A5"/>
-                </a:solidFill>
-                <a:latin typeface="Calibri"/>
-              </a:rPr>
-              <a:t>8.4 / 12</a:t>
-            </a:r>
-          </a:p>
-        </p:txBody>
-      </p:sp>
-      <p:sp>
-        <p:nvSpPr>
-          <p:cNvPr id="14" name="TextBox 13"/>
-          <p:cNvSpPr txBox="1"/>
-          <p:nvPr/>
-        </p:nvSpPr>
-        <p:spPr>
-          <a:xfrm>
-            <a:off x="731520" y="5806440"/>
-            <a:ext cx="5486400" cy="457200"/>
-          </a:xfrm>
-          <a:prstGeom prst="rect">
-            <a:avLst/>
-          </a:prstGeom>
-          <a:noFill/>
-        </p:spPr>
-        <p:txBody>
-          <a:bodyPr wrap="square" anchor="t" lIns="0" rIns="0" tIns="0" bIns="0">
-            <a:noAutofit/>
-          </a:bodyPr>
-          <a:lstStyle/>
-          <a:p>
-            <a:pPr algn="l">
-              <a:lnSpc>
-                <a:spcPct val="105000"/>
-              </a:lnSpc>
-            </a:pPr>
-            <a:r>
-              <a:rPr sz="1100" b="0" i="1">
-                <a:solidFill>
-                  <a:srgbClr val="8B98A5"/>
-                </a:solidFill>
-                <a:latin typeface="Calibri"/>
-              </a:rPr>
-              <a:t>Coverage = engineering concern surfaced as work, scored by a deterministic 12-point rubric.</a:t>
-            </a:r>
-          </a:p>
-        </p:txBody>
-      </p:sp>
-      <p:sp>
-        <p:nvSpPr>
-          <p:cNvPr id="15" name="Rounded Rectangle 14"/>
-          <p:cNvSpPr/>
-          <p:nvPr/>
-        </p:nvSpPr>
-        <p:spPr>
-          <a:xfrm>
-            <a:off x="6583680" y="1554480"/>
-            <a:ext cx="4983480" cy="4343400"/>
+            <a:off x="640080" y="1600200"/>
+            <a:ext cx="5120640" cy="4160520"/>
           </a:xfrm>
           <a:prstGeom prst="roundRect">
             <a:avLst>
@@ -3977,14 +3526,14 @@
       </p:sp>
       <p:sp>
         <p:nvSpPr>
-          <p:cNvPr id="16" name="TextBox 15"/>
-          <p:cNvSpPr txBox="1"/>
-          <p:nvPr/>
-        </p:nvSpPr>
-        <p:spPr>
-          <a:xfrm>
-            <a:off x="6903720" y="1810512"/>
-            <a:ext cx="4343400" cy="365760"/>
+          <p:cNvPr id="5" name="TextBox 4"/>
+          <p:cNvSpPr txBox="1"/>
+          <p:nvPr/>
+        </p:nvSpPr>
+        <p:spPr>
+          <a:xfrm>
+            <a:off x="1005840" y="1828800"/>
+            <a:ext cx="4389120" cy="457200"/>
           </a:xfrm>
           <a:prstGeom prst="rect">
             <a:avLst/>
@@ -4003,72 +3552,33 @@
               </a:lnSpc>
             </a:pPr>
             <a:r>
-              <a:rPr sz="1400" b="1" i="0">
-                <a:solidFill>
-                  <a:srgbClr val="E6EDF3"/>
-                </a:solidFill>
-                <a:latin typeface="Calibri"/>
-              </a:rPr>
-              <a:t>Per design  ·  coverage delta (multi − single)</a:t>
-            </a:r>
-          </a:p>
-        </p:txBody>
-      </p:sp>
-      <p:sp>
-        <p:nvSpPr>
-          <p:cNvPr id="17" name="TextBox 16"/>
-          <p:cNvSpPr txBox="1"/>
-          <p:nvPr/>
-        </p:nvSpPr>
-        <p:spPr>
-          <a:xfrm>
-            <a:off x="6949440" y="2423160"/>
-            <a:ext cx="3291840" cy="457200"/>
-          </a:xfrm>
-          <a:prstGeom prst="rect">
-            <a:avLst/>
-          </a:prstGeom>
-          <a:noFill/>
-        </p:spPr>
-        <p:txBody>
-          <a:bodyPr wrap="square" anchor="ctr" lIns="0" rIns="0" tIns="0" bIns="0">
-            <a:noAutofit/>
-          </a:bodyPr>
-          <a:lstStyle/>
-          <a:p>
-            <a:pPr algn="l">
-              <a:lnSpc>
-                <a:spcPct val="100000"/>
-              </a:lnSpc>
-            </a:pPr>
-            <a:r>
-              <a:rPr sz="1500" b="0" i="0">
-                <a:solidFill>
-                  <a:srgbClr val="E6EDF3"/>
-                </a:solidFill>
-                <a:latin typeface="Calibri"/>
-              </a:rPr>
-              <a:t>Motor + safety</a:t>
-            </a:r>
-          </a:p>
-        </p:txBody>
-      </p:sp>
-      <p:sp>
-        <p:nvSpPr>
-          <p:cNvPr id="18" name="Oval 17"/>
+              <a:rPr sz="1800" b="1" i="0">
+                <a:solidFill>
+                  <a:srgbClr val="8B98A5"/>
+                </a:solidFill>
+                <a:latin typeface="Calibri"/>
+              </a:rPr>
+              <a:t>The manual way</a:t>
+            </a:r>
+          </a:p>
+        </p:txBody>
+      </p:sp>
+      <p:sp>
+        <p:nvSpPr>
+          <p:cNvPr id="6" name="Oval 5"/>
           <p:cNvSpPr/>
           <p:nvPr/>
         </p:nvSpPr>
         <p:spPr>
           <a:xfrm>
-            <a:off x="10515600" y="2441448"/>
-            <a:ext cx="420624" cy="420624"/>
+            <a:off x="1005840" y="2651760"/>
+            <a:ext cx="146304" cy="146304"/>
           </a:xfrm>
           <a:prstGeom prst="ellipse">
             <a:avLst/>
           </a:prstGeom>
           <a:solidFill>
-            <a:srgbClr val="8B98A5"/>
+            <a:srgbClr val="2D3A48"/>
           </a:solidFill>
           <a:ln>
             <a:noFill/>
@@ -4095,35 +3605,35 @@
           <a:p>
             <a:pPr algn="ctr"/>
             <a:r>
-              <a:rPr sz="1300" b="1">
+              <a:rPr sz="1400" b="1">
                 <a:solidFill>
                   <a:srgbClr val="E6EDF3"/>
                 </a:solidFill>
                 <a:latin typeface="Calibri"/>
               </a:rPr>
-              <a:t>+2</a:t>
-            </a:r>
-          </a:p>
-        </p:txBody>
-      </p:sp>
-      <p:sp>
-        <p:nvSpPr>
-          <p:cNvPr id="19" name="TextBox 18"/>
-          <p:cNvSpPr txBox="1"/>
-          <p:nvPr/>
-        </p:nvSpPr>
-        <p:spPr>
-          <a:xfrm>
-            <a:off x="6949440" y="3063240"/>
-            <a:ext cx="3291840" cy="457200"/>
-          </a:xfrm>
-          <a:prstGeom prst="rect">
-            <a:avLst/>
-          </a:prstGeom>
-          <a:noFill/>
-        </p:spPr>
-        <p:txBody>
-          <a:bodyPr wrap="square" anchor="ctr" lIns="0" rIns="0" tIns="0" bIns="0">
+              <a:t/>
+            </a:r>
+          </a:p>
+        </p:txBody>
+      </p:sp>
+      <p:sp>
+        <p:nvSpPr>
+          <p:cNvPr id="7" name="TextBox 6"/>
+          <p:cNvSpPr txBox="1"/>
+          <p:nvPr/>
+        </p:nvSpPr>
+        <p:spPr>
+          <a:xfrm>
+            <a:off x="1298448" y="2569464"/>
+            <a:ext cx="4187952" cy="365760"/>
+          </a:xfrm>
+          <a:prstGeom prst="rect">
+            <a:avLst/>
+          </a:prstGeom>
+          <a:noFill/>
+        </p:spPr>
+        <p:txBody>
+          <a:bodyPr wrap="square" anchor="t" lIns="0" rIns="0" tIns="0" bIns="0">
             <a:noAutofit/>
           </a:bodyPr>
           <a:lstStyle/>
@@ -4134,33 +3644,72 @@
               </a:lnSpc>
             </a:pPr>
             <a:r>
-              <a:rPr sz="1500" b="0" i="0">
+              <a:rPr sz="1500" b="1" i="0">
                 <a:solidFill>
                   <a:srgbClr val="E6EDF3"/>
                 </a:solidFill>
                 <a:latin typeface="Calibri"/>
               </a:rPr>
-              <a:t>Precision analog</a:t>
-            </a:r>
-          </a:p>
-        </p:txBody>
-      </p:sp>
-      <p:sp>
-        <p:nvSpPr>
-          <p:cNvPr id="20" name="Oval 19"/>
+              <a:t>Blank-page problem</a:t>
+            </a:r>
+          </a:p>
+        </p:txBody>
+      </p:sp>
+      <p:sp>
+        <p:nvSpPr>
+          <p:cNvPr id="8" name="TextBox 7"/>
+          <p:cNvSpPr txBox="1"/>
+          <p:nvPr/>
+        </p:nvSpPr>
+        <p:spPr>
+          <a:xfrm>
+            <a:off x="1298448" y="2898648"/>
+            <a:ext cx="4187952" cy="640080"/>
+          </a:xfrm>
+          <a:prstGeom prst="rect">
+            <a:avLst/>
+          </a:prstGeom>
+          <a:noFill/>
+        </p:spPr>
+        <p:txBody>
+          <a:bodyPr wrap="square" anchor="t" lIns="0" rIns="0" tIns="0" bIns="0">
+            <a:noAutofit/>
+          </a:bodyPr>
+          <a:lstStyle/>
+          <a:p>
+            <a:pPr algn="l">
+              <a:lnSpc>
+                <a:spcPct val="108000"/>
+              </a:lnSpc>
+            </a:pPr>
+            <a:r>
+              <a:rPr sz="1300" b="0" i="0">
+                <a:solidFill>
+                  <a:srgbClr val="8B98A5"/>
+                </a:solidFill>
+                <a:latin typeface="Calibri"/>
+              </a:rPr>
+              <a:t>Turning an idea into a structured KiCad project takes an experienced engineer.</a:t>
+            </a:r>
+          </a:p>
+        </p:txBody>
+      </p:sp>
+      <p:sp>
+        <p:nvSpPr>
+          <p:cNvPr id="9" name="Oval 8"/>
           <p:cNvSpPr/>
           <p:nvPr/>
         </p:nvSpPr>
         <p:spPr>
           <a:xfrm>
-            <a:off x="10515600" y="3081528"/>
-            <a:ext cx="420624" cy="420624"/>
+            <a:off x="1005840" y="3675888"/>
+            <a:ext cx="146304" cy="146304"/>
           </a:xfrm>
           <a:prstGeom prst="ellipse">
             <a:avLst/>
           </a:prstGeom>
           <a:solidFill>
-            <a:srgbClr val="8B98A5"/>
+            <a:srgbClr val="2D3A48"/>
           </a:solidFill>
           <a:ln>
             <a:noFill/>
@@ -4187,35 +3736,35 @@
           <a:p>
             <a:pPr algn="ctr"/>
             <a:r>
-              <a:rPr sz="1300" b="1">
+              <a:rPr sz="1400" b="1">
                 <a:solidFill>
                   <a:srgbClr val="E6EDF3"/>
                 </a:solidFill>
                 <a:latin typeface="Calibri"/>
               </a:rPr>
-              <a:t>+2</a:t>
-            </a:r>
-          </a:p>
-        </p:txBody>
-      </p:sp>
-      <p:sp>
-        <p:nvSpPr>
-          <p:cNvPr id="21" name="TextBox 20"/>
-          <p:cNvSpPr txBox="1"/>
-          <p:nvPr/>
-        </p:nvSpPr>
-        <p:spPr>
-          <a:xfrm>
-            <a:off x="6949440" y="3703320"/>
-            <a:ext cx="3291840" cy="457200"/>
-          </a:xfrm>
-          <a:prstGeom prst="rect">
-            <a:avLst/>
-          </a:prstGeom>
-          <a:noFill/>
-        </p:spPr>
-        <p:txBody>
-          <a:bodyPr wrap="square" anchor="ctr" lIns="0" rIns="0" tIns="0" bIns="0">
+              <a:t/>
+            </a:r>
+          </a:p>
+        </p:txBody>
+      </p:sp>
+      <p:sp>
+        <p:nvSpPr>
+          <p:cNvPr id="10" name="TextBox 9"/>
+          <p:cNvSpPr txBox="1"/>
+          <p:nvPr/>
+        </p:nvSpPr>
+        <p:spPr>
+          <a:xfrm>
+            <a:off x="1298448" y="3593592"/>
+            <a:ext cx="4187952" cy="365760"/>
+          </a:xfrm>
+          <a:prstGeom prst="rect">
+            <a:avLst/>
+          </a:prstGeom>
+          <a:noFill/>
+        </p:spPr>
+        <p:txBody>
+          <a:bodyPr wrap="square" anchor="t" lIns="0" rIns="0" tIns="0" bIns="0">
             <a:noAutofit/>
           </a:bodyPr>
           <a:lstStyle/>
@@ -4226,33 +3775,72 @@
               </a:lnSpc>
             </a:pPr>
             <a:r>
-              <a:rPr sz="1500" b="0" i="0">
+              <a:rPr sz="1500" b="1" i="0">
                 <a:solidFill>
                   <a:srgbClr val="E6EDF3"/>
                 </a:solidFill>
                 <a:latin typeface="Calibri"/>
               </a:rPr>
-              <a:t>Battery IoT</a:t>
-            </a:r>
-          </a:p>
-        </p:txBody>
-      </p:sp>
-      <p:sp>
-        <p:nvSpPr>
-          <p:cNvPr id="22" name="Oval 21"/>
+              <a:t>Hours before the real work</a:t>
+            </a:r>
+          </a:p>
+        </p:txBody>
+      </p:sp>
+      <p:sp>
+        <p:nvSpPr>
+          <p:cNvPr id="11" name="TextBox 10"/>
+          <p:cNvSpPr txBox="1"/>
+          <p:nvPr/>
+        </p:nvSpPr>
+        <p:spPr>
+          <a:xfrm>
+            <a:off x="1298448" y="3922776"/>
+            <a:ext cx="4187952" cy="640080"/>
+          </a:xfrm>
+          <a:prstGeom prst="rect">
+            <a:avLst/>
+          </a:prstGeom>
+          <a:noFill/>
+        </p:spPr>
+        <p:txBody>
+          <a:bodyPr wrap="square" anchor="t" lIns="0" rIns="0" tIns="0" bIns="0">
+            <a:noAutofit/>
+          </a:bodyPr>
+          <a:lstStyle/>
+          <a:p>
+            <a:pPr algn="l">
+              <a:lnSpc>
+                <a:spcPct val="108000"/>
+              </a:lnSpc>
+            </a:pPr>
+            <a:r>
+              <a:rPr sz="1300" b="0" i="0">
+                <a:solidFill>
+                  <a:srgbClr val="8B98A5"/>
+                </a:solidFill>
+                <a:latin typeface="Calibri"/>
+              </a:rPr>
+              <a:t>Sheet hierarchy, power domains, interfaces — all by hand.</a:t>
+            </a:r>
+          </a:p>
+        </p:txBody>
+      </p:sp>
+      <p:sp>
+        <p:nvSpPr>
+          <p:cNvPr id="12" name="Oval 11"/>
           <p:cNvSpPr/>
           <p:nvPr/>
         </p:nvSpPr>
         <p:spPr>
           <a:xfrm>
-            <a:off x="10515600" y="3721608"/>
-            <a:ext cx="420624" cy="420624"/>
+            <a:off x="1005840" y="4700016"/>
+            <a:ext cx="146304" cy="146304"/>
           </a:xfrm>
           <a:prstGeom prst="ellipse">
             <a:avLst/>
           </a:prstGeom>
           <a:solidFill>
-            <a:srgbClr val="4F9CF9"/>
+            <a:srgbClr val="2D3A48"/>
           </a:solidFill>
           <a:ln>
             <a:noFill/>
@@ -4279,35 +3867,35 @@
           <a:p>
             <a:pPr algn="ctr"/>
             <a:r>
-              <a:rPr sz="1300" b="1">
-                <a:solidFill>
-                  <a:srgbClr val="0F1419"/>
-                </a:solidFill>
-                <a:latin typeface="Calibri"/>
-              </a:rPr>
-              <a:t>+4</a:t>
-            </a:r>
-          </a:p>
-        </p:txBody>
-      </p:sp>
-      <p:sp>
-        <p:nvSpPr>
-          <p:cNvPr id="23" name="TextBox 22"/>
-          <p:cNvSpPr txBox="1"/>
-          <p:nvPr/>
-        </p:nvSpPr>
-        <p:spPr>
-          <a:xfrm>
-            <a:off x="6949440" y="4343400"/>
-            <a:ext cx="3291840" cy="457200"/>
-          </a:xfrm>
-          <a:prstGeom prst="rect">
-            <a:avLst/>
-          </a:prstGeom>
-          <a:noFill/>
-        </p:spPr>
-        <p:txBody>
-          <a:bodyPr wrap="square" anchor="ctr" lIns="0" rIns="0" tIns="0" bIns="0">
+              <a:rPr sz="1400" b="1">
+                <a:solidFill>
+                  <a:srgbClr val="E6EDF3"/>
+                </a:solidFill>
+                <a:latin typeface="Calibri"/>
+              </a:rPr>
+              <a:t/>
+            </a:r>
+          </a:p>
+        </p:txBody>
+      </p:sp>
+      <p:sp>
+        <p:nvSpPr>
+          <p:cNvPr id="13" name="TextBox 12"/>
+          <p:cNvSpPr txBox="1"/>
+          <p:nvPr/>
+        </p:nvSpPr>
+        <p:spPr>
+          <a:xfrm>
+            <a:off x="1298448" y="4617720"/>
+            <a:ext cx="4187952" cy="365760"/>
+          </a:xfrm>
+          <a:prstGeom prst="rect">
+            <a:avLst/>
+          </a:prstGeom>
+          <a:noFill/>
+        </p:spPr>
+        <p:txBody>
+          <a:bodyPr wrap="square" anchor="t" lIns="0" rIns="0" tIns="0" bIns="0">
             <a:noAutofit/>
           </a:bodyPr>
           <a:lstStyle/>
@@ -4318,33 +3906,159 @@
               </a:lnSpc>
             </a:pPr>
             <a:r>
-              <a:rPr sz="1500" b="0" i="0">
+              <a:rPr sz="1500" b="1" i="0">
                 <a:solidFill>
                   <a:srgbClr val="E6EDF3"/>
                 </a:solidFill>
                 <a:latin typeface="Calibri"/>
               </a:rPr>
-              <a:t>Medical wearable</a:t>
-            </a:r>
-          </a:p>
-        </p:txBody>
-      </p:sp>
-      <p:sp>
-        <p:nvSpPr>
-          <p:cNvPr id="24" name="Oval 23"/>
+              <a:t>Easy to forget the boring bits</a:t>
+            </a:r>
+          </a:p>
+        </p:txBody>
+      </p:sp>
+      <p:sp>
+        <p:nvSpPr>
+          <p:cNvPr id="14" name="TextBox 13"/>
+          <p:cNvSpPr txBox="1"/>
+          <p:nvPr/>
+        </p:nvSpPr>
+        <p:spPr>
+          <a:xfrm>
+            <a:off x="1298448" y="4946904"/>
+            <a:ext cx="4187952" cy="640080"/>
+          </a:xfrm>
+          <a:prstGeom prst="rect">
+            <a:avLst/>
+          </a:prstGeom>
+          <a:noFill/>
+        </p:spPr>
+        <p:txBody>
+          <a:bodyPr wrap="square" anchor="t" lIns="0" rIns="0" tIns="0" bIns="0">
+            <a:noAutofit/>
+          </a:bodyPr>
+          <a:lstStyle/>
+          <a:p>
+            <a:pPr algn="l">
+              <a:lnSpc>
+                <a:spcPct val="108000"/>
+              </a:lnSpc>
+            </a:pPr>
+            <a:r>
+              <a:rPr sz="1300" b="0" i="0">
+                <a:solidFill>
+                  <a:srgbClr val="8B98A5"/>
+                </a:solidFill>
+                <a:latin typeface="Calibri"/>
+              </a:rPr>
+              <a:t>Protection, debug access, review items slip through under time pressure.</a:t>
+            </a:r>
+          </a:p>
+        </p:txBody>
+      </p:sp>
+      <p:sp>
+        <p:nvSpPr>
+          <p:cNvPr id="15" name="Rounded Rectangle 14"/>
           <p:cNvSpPr/>
           <p:nvPr/>
         </p:nvSpPr>
         <p:spPr>
           <a:xfrm>
-            <a:off x="10515600" y="4361688"/>
-            <a:ext cx="420624" cy="420624"/>
+            <a:off x="6400800" y="1600200"/>
+            <a:ext cx="5120640" cy="4160520"/>
+          </a:xfrm>
+          <a:prstGeom prst="roundRect">
+            <a:avLst>
+              <a:gd name="adj" fmla="val 8000"/>
+            </a:avLst>
+          </a:prstGeom>
+          <a:solidFill>
+            <a:srgbClr val="1A212B"/>
+          </a:solidFill>
+          <a:ln w="12700">
+            <a:solidFill>
+              <a:srgbClr val="2D3A48"/>
+            </a:solidFill>
+          </a:ln>
+          <a:effectLst/>
+        </p:spPr>
+        <p:style>
+          <a:lnRef idx="1">
+            <a:schemeClr val="accent1"/>
+          </a:lnRef>
+          <a:fillRef idx="3">
+            <a:schemeClr val="accent1"/>
+          </a:fillRef>
+          <a:effectRef idx="2">
+            <a:schemeClr val="accent1"/>
+          </a:effectRef>
+          <a:fontRef idx="minor">
+            <a:schemeClr val="lt1"/>
+          </a:fontRef>
+        </p:style>
+        <p:txBody>
+          <a:bodyPr rtlCol="0" anchor="ctr"/>
+          <a:lstStyle/>
+          <a:p>
+            <a:pPr algn="ctr"/>
+          </a:p>
+        </p:txBody>
+      </p:sp>
+      <p:sp>
+        <p:nvSpPr>
+          <p:cNvPr id="16" name="TextBox 15"/>
+          <p:cNvSpPr txBox="1"/>
+          <p:nvPr/>
+        </p:nvSpPr>
+        <p:spPr>
+          <a:xfrm>
+            <a:off x="6766560" y="1828800"/>
+            <a:ext cx="4389120" cy="457200"/>
+          </a:xfrm>
+          <a:prstGeom prst="rect">
+            <a:avLst/>
+          </a:prstGeom>
+          <a:noFill/>
+        </p:spPr>
+        <p:txBody>
+          <a:bodyPr wrap="square" anchor="t" lIns="0" rIns="0" tIns="0" bIns="0">
+            <a:noAutofit/>
+          </a:bodyPr>
+          <a:lstStyle/>
+          <a:p>
+            <a:pPr algn="l">
+              <a:lnSpc>
+                <a:spcPct val="100000"/>
+              </a:lnSpc>
+            </a:pPr>
+            <a:r>
+              <a:rPr sz="1800" b="1" i="0">
+                <a:solidFill>
+                  <a:srgbClr val="D29922"/>
+                </a:solidFill>
+                <a:latin typeface="Calibri"/>
+              </a:rPr>
+              <a:t>A single LLM</a:t>
+            </a:r>
+          </a:p>
+        </p:txBody>
+      </p:sp>
+      <p:sp>
+        <p:nvSpPr>
+          <p:cNvPr id="17" name="Oval 16"/>
+          <p:cNvSpPr/>
+          <p:nvPr/>
+        </p:nvSpPr>
+        <p:spPr>
+          <a:xfrm>
+            <a:off x="6766560" y="2651760"/>
+            <a:ext cx="146304" cy="146304"/>
           </a:xfrm>
           <a:prstGeom prst="ellipse">
             <a:avLst/>
           </a:prstGeom>
           <a:solidFill>
-            <a:srgbClr val="4F9CF9"/>
+            <a:srgbClr val="D29922"/>
           </a:solidFill>
           <a:ln>
             <a:noFill/>
@@ -4371,35 +4085,35 @@
           <a:p>
             <a:pPr algn="ctr"/>
             <a:r>
-              <a:rPr sz="1300" b="1">
-                <a:solidFill>
-                  <a:srgbClr val="0F1419"/>
-                </a:solidFill>
-                <a:latin typeface="Calibri"/>
-              </a:rPr>
-              <a:t>+5</a:t>
-            </a:r>
-          </a:p>
-        </p:txBody>
-      </p:sp>
-      <p:sp>
-        <p:nvSpPr>
-          <p:cNvPr id="25" name="TextBox 24"/>
-          <p:cNvSpPr txBox="1"/>
-          <p:nvPr/>
-        </p:nvSpPr>
-        <p:spPr>
-          <a:xfrm>
-            <a:off x="6949440" y="4983480"/>
-            <a:ext cx="3291840" cy="457200"/>
-          </a:xfrm>
-          <a:prstGeom prst="rect">
-            <a:avLst/>
-          </a:prstGeom>
-          <a:noFill/>
-        </p:spPr>
-        <p:txBody>
-          <a:bodyPr wrap="square" anchor="ctr" lIns="0" rIns="0" tIns="0" bIns="0">
+              <a:rPr sz="1400" b="1">
+                <a:solidFill>
+                  <a:srgbClr val="E6EDF3"/>
+                </a:solidFill>
+                <a:latin typeface="Calibri"/>
+              </a:rPr>
+              <a:t/>
+            </a:r>
+          </a:p>
+        </p:txBody>
+      </p:sp>
+      <p:sp>
+        <p:nvSpPr>
+          <p:cNvPr id="18" name="TextBox 17"/>
+          <p:cNvSpPr txBox="1"/>
+          <p:nvPr/>
+        </p:nvSpPr>
+        <p:spPr>
+          <a:xfrm>
+            <a:off x="7059168" y="2569464"/>
+            <a:ext cx="4187952" cy="365760"/>
+          </a:xfrm>
+          <a:prstGeom prst="rect">
+            <a:avLst/>
+          </a:prstGeom>
+          <a:noFill/>
+        </p:spPr>
+        <p:txBody>
+          <a:bodyPr wrap="square" anchor="t" lIns="0" rIns="0" tIns="0" bIns="0">
             <a:noAutofit/>
           </a:bodyPr>
           <a:lstStyle/>
@@ -4410,33 +4124,72 @@
               </a:lnSpc>
             </a:pPr>
             <a:r>
-              <a:rPr sz="1500" b="0" i="0">
+              <a:rPr sz="1500" b="1" i="0">
                 <a:solidFill>
                   <a:srgbClr val="E6EDF3"/>
                 </a:solidFill>
                 <a:latin typeface="Calibri"/>
               </a:rPr>
-              <a:t>Industrial gateway</a:t>
-            </a:r>
-          </a:p>
-        </p:txBody>
-      </p:sp>
-      <p:sp>
-        <p:nvSpPr>
-          <p:cNvPr id="26" name="Oval 25"/>
+              <a:t>Fast, but shallow</a:t>
+            </a:r>
+          </a:p>
+        </p:txBody>
+      </p:sp>
+      <p:sp>
+        <p:nvSpPr>
+          <p:cNvPr id="19" name="TextBox 18"/>
+          <p:cNvSpPr txBox="1"/>
+          <p:nvPr/>
+        </p:nvSpPr>
+        <p:spPr>
+          <a:xfrm>
+            <a:off x="7059168" y="2898648"/>
+            <a:ext cx="4187952" cy="640080"/>
+          </a:xfrm>
+          <a:prstGeom prst="rect">
+            <a:avLst/>
+          </a:prstGeom>
+          <a:noFill/>
+        </p:spPr>
+        <p:txBody>
+          <a:bodyPr wrap="square" anchor="t" lIns="0" rIns="0" tIns="0" bIns="0">
+            <a:noAutofit/>
+          </a:bodyPr>
+          <a:lstStyle/>
+          <a:p>
+            <a:pPr algn="l">
+              <a:lnSpc>
+                <a:spcPct val="108000"/>
+              </a:lnSpc>
+            </a:pPr>
+            <a:r>
+              <a:rPr sz="1300" b="0" i="0">
+                <a:solidFill>
+                  <a:srgbClr val="8B98A5"/>
+                </a:solidFill>
+                <a:latin typeface="Calibri"/>
+              </a:rPr>
+              <a:t>One pass gives a plausible answer — and skips the unglamorous essentials.</a:t>
+            </a:r>
+          </a:p>
+        </p:txBody>
+      </p:sp>
+      <p:sp>
+        <p:nvSpPr>
+          <p:cNvPr id="20" name="Oval 19"/>
           <p:cNvSpPr/>
           <p:nvPr/>
         </p:nvSpPr>
         <p:spPr>
           <a:xfrm>
-            <a:off x="10515600" y="5001768"/>
-            <a:ext cx="420624" cy="420624"/>
+            <a:off x="6766560" y="3675888"/>
+            <a:ext cx="146304" cy="146304"/>
           </a:xfrm>
           <a:prstGeom prst="ellipse">
             <a:avLst/>
           </a:prstGeom>
           <a:solidFill>
-            <a:srgbClr val="222C38"/>
+            <a:srgbClr val="D29922"/>
           </a:solidFill>
           <a:ln>
             <a:noFill/>
@@ -4463,13 +4216,279 @@
           <a:p>
             <a:pPr algn="ctr"/>
             <a:r>
-              <a:rPr sz="1300" b="1">
+              <a:rPr sz="1400" b="1">
                 <a:solidFill>
                   <a:srgbClr val="E6EDF3"/>
                 </a:solidFill>
                 <a:latin typeface="Calibri"/>
               </a:rPr>
-              <a:t>+3</a:t>
+              <a:t/>
+            </a:r>
+          </a:p>
+        </p:txBody>
+      </p:sp>
+      <p:sp>
+        <p:nvSpPr>
+          <p:cNvPr id="21" name="TextBox 20"/>
+          <p:cNvSpPr txBox="1"/>
+          <p:nvPr/>
+        </p:nvSpPr>
+        <p:spPr>
+          <a:xfrm>
+            <a:off x="7059168" y="3593592"/>
+            <a:ext cx="4187952" cy="365760"/>
+          </a:xfrm>
+          <a:prstGeom prst="rect">
+            <a:avLst/>
+          </a:prstGeom>
+          <a:noFill/>
+        </p:spPr>
+        <p:txBody>
+          <a:bodyPr wrap="square" anchor="t" lIns="0" rIns="0" tIns="0" bIns="0">
+            <a:noAutofit/>
+          </a:bodyPr>
+          <a:lstStyle/>
+          <a:p>
+            <a:pPr algn="l">
+              <a:lnSpc>
+                <a:spcPct val="100000"/>
+              </a:lnSpc>
+            </a:pPr>
+            <a:r>
+              <a:rPr sz="1500" b="1" i="0">
+                <a:solidFill>
+                  <a:srgbClr val="E6EDF3"/>
+                </a:solidFill>
+                <a:latin typeface="Calibri"/>
+              </a:rPr>
+              <a:t>Misses safety / review items</a:t>
+            </a:r>
+          </a:p>
+        </p:txBody>
+      </p:sp>
+      <p:sp>
+        <p:nvSpPr>
+          <p:cNvPr id="22" name="TextBox 21"/>
+          <p:cNvSpPr txBox="1"/>
+          <p:nvPr/>
+        </p:nvSpPr>
+        <p:spPr>
+          <a:xfrm>
+            <a:off x="7059168" y="3922776"/>
+            <a:ext cx="4187952" cy="640080"/>
+          </a:xfrm>
+          <a:prstGeom prst="rect">
+            <a:avLst/>
+          </a:prstGeom>
+          <a:noFill/>
+        </p:spPr>
+        <p:txBody>
+          <a:bodyPr wrap="square" anchor="t" lIns="0" rIns="0" tIns="0" bIns="0">
+            <a:noAutofit/>
+          </a:bodyPr>
+          <a:lstStyle/>
+          <a:p>
+            <a:pPr algn="l">
+              <a:lnSpc>
+                <a:spcPct val="108000"/>
+              </a:lnSpc>
+            </a:pPr>
+            <a:r>
+              <a:rPr sz="1300" b="0" i="0">
+                <a:solidFill>
+                  <a:srgbClr val="8B98A5"/>
+                </a:solidFill>
+                <a:latin typeface="Calibri"/>
+              </a:rPr>
+              <a:t>Reverse-polarity, overcurrent, reset/clock — gone in 1 of every 2 designs.</a:t>
+            </a:r>
+          </a:p>
+        </p:txBody>
+      </p:sp>
+      <p:sp>
+        <p:nvSpPr>
+          <p:cNvPr id="23" name="Oval 22"/>
+          <p:cNvSpPr/>
+          <p:nvPr/>
+        </p:nvSpPr>
+        <p:spPr>
+          <a:xfrm>
+            <a:off x="6766560" y="4700016"/>
+            <a:ext cx="146304" cy="146304"/>
+          </a:xfrm>
+          <a:prstGeom prst="ellipse">
+            <a:avLst/>
+          </a:prstGeom>
+          <a:solidFill>
+            <a:srgbClr val="D29922"/>
+          </a:solidFill>
+          <a:ln>
+            <a:noFill/>
+          </a:ln>
+          <a:effectLst/>
+        </p:spPr>
+        <p:style>
+          <a:lnRef idx="1">
+            <a:schemeClr val="accent1"/>
+          </a:lnRef>
+          <a:fillRef idx="3">
+            <a:schemeClr val="accent1"/>
+          </a:fillRef>
+          <a:effectRef idx="2">
+            <a:schemeClr val="accent1"/>
+          </a:effectRef>
+          <a:fontRef idx="minor">
+            <a:schemeClr val="lt1"/>
+          </a:fontRef>
+        </p:style>
+        <p:txBody>
+          <a:bodyPr rtlCol="0" anchor="ctr" wrap="none" lIns="0" rIns="0" tIns="0" bIns="0"/>
+          <a:lstStyle/>
+          <a:p>
+            <a:pPr algn="ctr"/>
+            <a:r>
+              <a:rPr sz="1400" b="1">
+                <a:solidFill>
+                  <a:srgbClr val="E6EDF3"/>
+                </a:solidFill>
+                <a:latin typeface="Calibri"/>
+              </a:rPr>
+              <a:t/>
+            </a:r>
+          </a:p>
+        </p:txBody>
+      </p:sp>
+      <p:sp>
+        <p:nvSpPr>
+          <p:cNvPr id="24" name="TextBox 23"/>
+          <p:cNvSpPr txBox="1"/>
+          <p:nvPr/>
+        </p:nvSpPr>
+        <p:spPr>
+          <a:xfrm>
+            <a:off x="7059168" y="4617720"/>
+            <a:ext cx="4187952" cy="365760"/>
+          </a:xfrm>
+          <a:prstGeom prst="rect">
+            <a:avLst/>
+          </a:prstGeom>
+          <a:noFill/>
+        </p:spPr>
+        <p:txBody>
+          <a:bodyPr wrap="square" anchor="t" lIns="0" rIns="0" tIns="0" bIns="0">
+            <a:noAutofit/>
+          </a:bodyPr>
+          <a:lstStyle/>
+          <a:p>
+            <a:pPr algn="l">
+              <a:lnSpc>
+                <a:spcPct val="100000"/>
+              </a:lnSpc>
+            </a:pPr>
+            <a:r>
+              <a:rPr sz="1500" b="1" i="0">
+                <a:solidFill>
+                  <a:srgbClr val="E6EDF3"/>
+                </a:solidFill>
+                <a:latin typeface="Calibri"/>
+              </a:rPr>
+              <a:t>No one checks its work</a:t>
+            </a:r>
+          </a:p>
+        </p:txBody>
+      </p:sp>
+      <p:sp>
+        <p:nvSpPr>
+          <p:cNvPr id="25" name="TextBox 24"/>
+          <p:cNvSpPr txBox="1"/>
+          <p:nvPr/>
+        </p:nvSpPr>
+        <p:spPr>
+          <a:xfrm>
+            <a:off x="7059168" y="4946904"/>
+            <a:ext cx="4187952" cy="640080"/>
+          </a:xfrm>
+          <a:prstGeom prst="rect">
+            <a:avLst/>
+          </a:prstGeom>
+          <a:noFill/>
+        </p:spPr>
+        <p:txBody>
+          <a:bodyPr wrap="square" anchor="t" lIns="0" rIns="0" tIns="0" bIns="0">
+            <a:noAutofit/>
+          </a:bodyPr>
+          <a:lstStyle/>
+          <a:p>
+            <a:pPr algn="l">
+              <a:lnSpc>
+                <a:spcPct val="108000"/>
+              </a:lnSpc>
+            </a:pPr>
+            <a:r>
+              <a:rPr sz="1300" b="0" i="0">
+                <a:solidFill>
+                  <a:srgbClr val="8B98A5"/>
+                </a:solidFill>
+                <a:latin typeface="Calibri"/>
+              </a:rPr>
+              <a:t>Nothing challenges the first draft or asks what's missing.</a:t>
+            </a:r>
+          </a:p>
+        </p:txBody>
+      </p:sp>
+      <p:sp>
+        <p:nvSpPr>
+          <p:cNvPr id="26" name="TextBox 25"/>
+          <p:cNvSpPr txBox="1"/>
+          <p:nvPr/>
+        </p:nvSpPr>
+        <p:spPr>
+          <a:xfrm>
+            <a:off x="640080" y="5989320"/>
+            <a:ext cx="10881360" cy="548640"/>
+          </a:xfrm>
+          <a:prstGeom prst="rect">
+            <a:avLst/>
+          </a:prstGeom>
+          <a:noFill/>
+        </p:spPr>
+        <p:txBody>
+          <a:bodyPr wrap="square" anchor="t" lIns="0" rIns="0" tIns="0" bIns="0">
+            <a:noAutofit/>
+          </a:bodyPr>
+          <a:lstStyle/>
+          <a:p>
+            <a:pPr algn="l">
+              <a:lnSpc>
+                <a:spcPct val="100000"/>
+              </a:lnSpc>
+            </a:pPr>
+            <a:r>
+              <a:rPr sz="1500" b="0" i="0">
+                <a:solidFill>
+                  <a:srgbClr val="8B98A5"/>
+                </a:solidFill>
+                <a:latin typeface="Calibri"/>
+              </a:rPr>
+              <a:t>Our take:  a small </a:t>
+            </a:r>
+            <a:r>
+              <a:rPr sz="1500" b="1" i="0">
+                <a:solidFill>
+                  <a:srgbClr val="4F9CF9"/>
+                </a:solidFill>
+                <a:latin typeface="Calibri"/>
+              </a:rPr>
+              <a:t>team of agents that argue</a:t>
+            </a:r>
+            <a:r>
+              <a:rPr sz="1500" b="0" i="0">
+                <a:solidFill>
+                  <a:srgbClr val="8B98A5"/>
+                </a:solidFill>
+                <a:latin typeface="Calibri"/>
+              </a:rPr>
+              <a:t> → a structured, reviewed starting point you finish in KiCad.</a:t>
             </a:r>
           </a:p>
         </p:txBody>
@@ -4477,45 +4496,6 @@
       <p:sp>
         <p:nvSpPr>
           <p:cNvPr id="27" name="TextBox 26"/>
-          <p:cNvSpPr txBox="1"/>
-          <p:nvPr/>
-        </p:nvSpPr>
-        <p:spPr>
-          <a:xfrm>
-            <a:off x="6949440" y="5669280"/>
-            <a:ext cx="4251960" cy="457200"/>
-          </a:xfrm>
-          <a:prstGeom prst="rect">
-            <a:avLst/>
-          </a:prstGeom>
-          <a:noFill/>
-        </p:spPr>
-        <p:txBody>
-          <a:bodyPr wrap="square" anchor="t" lIns="0" rIns="0" tIns="0" bIns="0">
-            <a:noAutofit/>
-          </a:bodyPr>
-          <a:lstStyle/>
-          <a:p>
-            <a:pPr algn="l">
-              <a:lnSpc>
-                <a:spcPct val="100000"/>
-              </a:lnSpc>
-            </a:pPr>
-            <a:r>
-              <a:rPr sz="1400" b="1" i="0">
-                <a:solidFill>
-                  <a:srgbClr val="4F9CF9"/>
-                </a:solidFill>
-                <a:latin typeface="Calibri"/>
-              </a:rPr>
-              <a:t>↑  the gap widens with complexity</a:t>
-            </a:r>
-          </a:p>
-        </p:txBody>
-      </p:sp>
-      <p:sp>
-        <p:nvSpPr>
-          <p:cNvPr id="28" name="TextBox 27"/>
           <p:cNvSpPr txBox="1"/>
           <p:nvPr/>
         </p:nvSpPr>
@@ -4554,7 +4534,7 @@
       </p:sp>
       <p:sp>
         <p:nvSpPr>
-          <p:cNvPr id="29" name="TextBox 28"/>
+          <p:cNvPr id="28" name="TextBox 27"/>
           <p:cNvSpPr txBox="1"/>
           <p:nvPr/>
         </p:nvSpPr>
@@ -4586,7 +4566,7 @@
                 </a:solidFill>
                 <a:latin typeface="Calibri"/>
               </a:rPr>
-              <a:t>3 / 9</a:t>
+              <a:t>2 / 9</a:t>
             </a:r>
           </a:p>
         </p:txBody>
@@ -4687,25 +4667,1426 @@
                 </a:solidFill>
                 <a:latin typeface="Calibri"/>
               </a:rPr>
-              <a:t>When agents disagree, the design gets better</a:t>
-            </a:r>
-          </a:p>
-        </p:txBody>
-      </p:sp>
-      <p:sp>
-        <p:nvSpPr>
-          <p:cNvPr id="4" name="Rounded Rectangle 3"/>
+              <a:t>Two heads beat one — and we measured it</a:t>
+            </a:r>
+          </a:p>
+        </p:txBody>
+      </p:sp>
+      <p:sp>
+        <p:nvSpPr>
+          <p:cNvPr id="4" name="TextBox 3"/>
+          <p:cNvSpPr txBox="1"/>
+          <p:nvPr/>
+        </p:nvSpPr>
+        <p:spPr>
+          <a:xfrm>
+            <a:off x="640080" y="1554480"/>
+            <a:ext cx="5486400" cy="1463040"/>
+          </a:xfrm>
+          <a:prstGeom prst="rect">
+            <a:avLst/>
+          </a:prstGeom>
+          <a:noFill/>
+        </p:spPr>
+        <p:txBody>
+          <a:bodyPr wrap="square" anchor="t" lIns="0" rIns="0" tIns="0" bIns="0">
+            <a:noAutofit/>
+          </a:bodyPr>
+          <a:lstStyle/>
+          <a:p>
+            <a:pPr algn="l">
+              <a:lnSpc>
+                <a:spcPct val="100000"/>
+              </a:lnSpc>
+            </a:pPr>
+            <a:r>
+              <a:rPr sz="9600" b="1" i="0">
+                <a:solidFill>
+                  <a:srgbClr val="4F9CF9"/>
+                </a:solidFill>
+                <a:latin typeface="Calibri"/>
+              </a:rPr>
+              <a:t>+3.2</a:t>
+            </a:r>
+          </a:p>
+        </p:txBody>
+      </p:sp>
+      <p:sp>
+        <p:nvSpPr>
+          <p:cNvPr id="5" name="TextBox 4"/>
+          <p:cNvSpPr txBox="1"/>
+          <p:nvPr/>
+        </p:nvSpPr>
+        <p:spPr>
+          <a:xfrm>
+            <a:off x="713232" y="2971800"/>
+            <a:ext cx="5394960" cy="640080"/>
+          </a:xfrm>
+          <a:prstGeom prst="rect">
+            <a:avLst/>
+          </a:prstGeom>
+          <a:noFill/>
+        </p:spPr>
+        <p:txBody>
+          <a:bodyPr wrap="square" anchor="t" lIns="0" rIns="0" tIns="0" bIns="0">
+            <a:noAutofit/>
+          </a:bodyPr>
+          <a:lstStyle/>
+          <a:p>
+            <a:pPr algn="l">
+              <a:lnSpc>
+                <a:spcPct val="110000"/>
+              </a:lnSpc>
+            </a:pPr>
+            <a:r>
+              <a:rPr sz="1500" b="0" i="0">
+                <a:solidFill>
+                  <a:srgbClr val="8B98A5"/>
+                </a:solidFill>
+                <a:latin typeface="Calibri"/>
+              </a:rPr>
+              <a:t>more design concerns surfaced than a single LLM — on average, across 5 diverse hard designs (live Qwen).</a:t>
+            </a:r>
+          </a:p>
+        </p:txBody>
+      </p:sp>
+      <p:sp>
+        <p:nvSpPr>
+          <p:cNvPr id="6" name="Rounded Rectangle 5"/>
           <p:cNvSpPr/>
           <p:nvPr/>
         </p:nvSpPr>
         <p:spPr>
           <a:xfrm>
-            <a:off x="576072" y="1444752"/>
-            <a:ext cx="5111496" cy="4780258"/>
+            <a:off x="731520" y="4069080"/>
+            <a:ext cx="4937760" cy="457200"/>
+          </a:xfrm>
+          <a:prstGeom prst="roundRect">
+            <a:avLst>
+              <a:gd name="adj" fmla="val 50000"/>
+            </a:avLst>
+          </a:prstGeom>
+          <a:solidFill>
+            <a:srgbClr val="222C38"/>
+          </a:solidFill>
+          <a:ln>
+            <a:noFill/>
+          </a:ln>
+          <a:effectLst/>
+        </p:spPr>
+        <p:style>
+          <a:lnRef idx="1">
+            <a:schemeClr val="accent1"/>
+          </a:lnRef>
+          <a:fillRef idx="3">
+            <a:schemeClr val="accent1"/>
+          </a:fillRef>
+          <a:effectRef idx="2">
+            <a:schemeClr val="accent1"/>
+          </a:effectRef>
+          <a:fontRef idx="minor">
+            <a:schemeClr val="lt1"/>
+          </a:fontRef>
+        </p:style>
+        <p:txBody>
+          <a:bodyPr rtlCol="0" anchor="ctr"/>
+          <a:lstStyle/>
+          <a:p>
+            <a:pPr algn="ctr"/>
+          </a:p>
+        </p:txBody>
+      </p:sp>
+      <p:sp>
+        <p:nvSpPr>
+          <p:cNvPr id="7" name="Rounded Rectangle 6"/>
+          <p:cNvSpPr/>
+          <p:nvPr/>
+        </p:nvSpPr>
+        <p:spPr>
+          <a:xfrm>
+            <a:off x="731520" y="4069080"/>
+            <a:ext cx="4773168" cy="457200"/>
+          </a:xfrm>
+          <a:prstGeom prst="roundRect">
+            <a:avLst>
+              <a:gd name="adj" fmla="val 50000"/>
+            </a:avLst>
+          </a:prstGeom>
+          <a:solidFill>
+            <a:srgbClr val="4F9CF9"/>
+          </a:solidFill>
+          <a:ln>
+            <a:noFill/>
+          </a:ln>
+          <a:effectLst/>
+        </p:spPr>
+        <p:style>
+          <a:lnRef idx="1">
+            <a:schemeClr val="accent1"/>
+          </a:lnRef>
+          <a:fillRef idx="3">
+            <a:schemeClr val="accent1"/>
+          </a:fillRef>
+          <a:effectRef idx="2">
+            <a:schemeClr val="accent1"/>
+          </a:effectRef>
+          <a:fontRef idx="minor">
+            <a:schemeClr val="lt1"/>
+          </a:fontRef>
+        </p:style>
+        <p:txBody>
+          <a:bodyPr rtlCol="0" anchor="ctr"/>
+          <a:lstStyle/>
+          <a:p>
+            <a:pPr algn="ctr"/>
+          </a:p>
+        </p:txBody>
+      </p:sp>
+      <p:sp>
+        <p:nvSpPr>
+          <p:cNvPr id="8" name="TextBox 7"/>
+          <p:cNvSpPr txBox="1"/>
+          <p:nvPr/>
+        </p:nvSpPr>
+        <p:spPr>
+          <a:xfrm>
+            <a:off x="731520" y="3758184"/>
+            <a:ext cx="4937760" cy="274320"/>
+          </a:xfrm>
+          <a:prstGeom prst="rect">
+            <a:avLst/>
+          </a:prstGeom>
+          <a:noFill/>
+        </p:spPr>
+        <p:txBody>
+          <a:bodyPr wrap="square" anchor="t" lIns="0" rIns="0" tIns="0" bIns="0">
+            <a:noAutofit/>
+          </a:bodyPr>
+          <a:lstStyle/>
+          <a:p>
+            <a:pPr algn="l">
+              <a:lnSpc>
+                <a:spcPct val="100000"/>
+              </a:lnSpc>
+            </a:pPr>
+            <a:r>
+              <a:rPr sz="1300" b="1" i="0">
+                <a:solidFill>
+                  <a:srgbClr val="E6EDF3"/>
+                </a:solidFill>
+                <a:latin typeface="Calibri"/>
+              </a:rPr>
+              <a:t>Multi-agent team</a:t>
+            </a:r>
+          </a:p>
+        </p:txBody>
+      </p:sp>
+      <p:sp>
+        <p:nvSpPr>
+          <p:cNvPr id="9" name="TextBox 8"/>
+          <p:cNvSpPr txBox="1"/>
+          <p:nvPr/>
+        </p:nvSpPr>
+        <p:spPr>
+          <a:xfrm>
+            <a:off x="5596128" y="4087368"/>
+            <a:ext cx="1280160" cy="365760"/>
+          </a:xfrm>
+          <a:prstGeom prst="rect">
+            <a:avLst/>
+          </a:prstGeom>
+          <a:noFill/>
+        </p:spPr>
+        <p:txBody>
+          <a:bodyPr wrap="square" anchor="ctr" lIns="0" rIns="0" tIns="0" bIns="0">
+            <a:noAutofit/>
+          </a:bodyPr>
+          <a:lstStyle/>
+          <a:p>
+            <a:pPr algn="l">
+              <a:lnSpc>
+                <a:spcPct val="100000"/>
+              </a:lnSpc>
+            </a:pPr>
+            <a:r>
+              <a:rPr sz="1400" b="1" i="0">
+                <a:solidFill>
+                  <a:srgbClr val="4F9CF9"/>
+                </a:solidFill>
+                <a:latin typeface="Calibri"/>
+              </a:rPr>
+              <a:t>11.6 / 12</a:t>
+            </a:r>
+          </a:p>
+        </p:txBody>
+      </p:sp>
+      <p:sp>
+        <p:nvSpPr>
+          <p:cNvPr id="10" name="Rounded Rectangle 9"/>
+          <p:cNvSpPr/>
+          <p:nvPr/>
+        </p:nvSpPr>
+        <p:spPr>
+          <a:xfrm>
+            <a:off x="731520" y="5074920"/>
+            <a:ext cx="4937760" cy="457200"/>
+          </a:xfrm>
+          <a:prstGeom prst="roundRect">
+            <a:avLst>
+              <a:gd name="adj" fmla="val 50000"/>
+            </a:avLst>
+          </a:prstGeom>
+          <a:solidFill>
+            <a:srgbClr val="222C38"/>
+          </a:solidFill>
+          <a:ln>
+            <a:noFill/>
+          </a:ln>
+          <a:effectLst/>
+        </p:spPr>
+        <p:style>
+          <a:lnRef idx="1">
+            <a:schemeClr val="accent1"/>
+          </a:lnRef>
+          <a:fillRef idx="3">
+            <a:schemeClr val="accent1"/>
+          </a:fillRef>
+          <a:effectRef idx="2">
+            <a:schemeClr val="accent1"/>
+          </a:effectRef>
+          <a:fontRef idx="minor">
+            <a:schemeClr val="lt1"/>
+          </a:fontRef>
+        </p:style>
+        <p:txBody>
+          <a:bodyPr rtlCol="0" anchor="ctr"/>
+          <a:lstStyle/>
+          <a:p>
+            <a:pPr algn="ctr"/>
+          </a:p>
+        </p:txBody>
+      </p:sp>
+      <p:sp>
+        <p:nvSpPr>
+          <p:cNvPr id="11" name="Rounded Rectangle 10"/>
+          <p:cNvSpPr/>
+          <p:nvPr/>
+        </p:nvSpPr>
+        <p:spPr>
+          <a:xfrm>
+            <a:off x="731520" y="5074920"/>
+            <a:ext cx="3456432" cy="457200"/>
+          </a:xfrm>
+          <a:prstGeom prst="roundRect">
+            <a:avLst>
+              <a:gd name="adj" fmla="val 50000"/>
+            </a:avLst>
+          </a:prstGeom>
+          <a:solidFill>
+            <a:srgbClr val="8B98A5"/>
+          </a:solidFill>
+          <a:ln>
+            <a:noFill/>
+          </a:ln>
+          <a:effectLst/>
+        </p:spPr>
+        <p:style>
+          <a:lnRef idx="1">
+            <a:schemeClr val="accent1"/>
+          </a:lnRef>
+          <a:fillRef idx="3">
+            <a:schemeClr val="accent1"/>
+          </a:fillRef>
+          <a:effectRef idx="2">
+            <a:schemeClr val="accent1"/>
+          </a:effectRef>
+          <a:fontRef idx="minor">
+            <a:schemeClr val="lt1"/>
+          </a:fontRef>
+        </p:style>
+        <p:txBody>
+          <a:bodyPr rtlCol="0" anchor="ctr"/>
+          <a:lstStyle/>
+          <a:p>
+            <a:pPr algn="ctr"/>
+          </a:p>
+        </p:txBody>
+      </p:sp>
+      <p:sp>
+        <p:nvSpPr>
+          <p:cNvPr id="12" name="TextBox 11"/>
+          <p:cNvSpPr txBox="1"/>
+          <p:nvPr/>
+        </p:nvSpPr>
+        <p:spPr>
+          <a:xfrm>
+            <a:off x="731520" y="4764024"/>
+            <a:ext cx="4937760" cy="274320"/>
+          </a:xfrm>
+          <a:prstGeom prst="rect">
+            <a:avLst/>
+          </a:prstGeom>
+          <a:noFill/>
+        </p:spPr>
+        <p:txBody>
+          <a:bodyPr wrap="square" anchor="t" lIns="0" rIns="0" tIns="0" bIns="0">
+            <a:noAutofit/>
+          </a:bodyPr>
+          <a:lstStyle/>
+          <a:p>
+            <a:pPr algn="l">
+              <a:lnSpc>
+                <a:spcPct val="100000"/>
+              </a:lnSpc>
+            </a:pPr>
+            <a:r>
+              <a:rPr sz="1300" b="1" i="0">
+                <a:solidFill>
+                  <a:srgbClr val="E6EDF3"/>
+                </a:solidFill>
+                <a:latin typeface="Calibri"/>
+              </a:rPr>
+              <a:t>Single agent</a:t>
+            </a:r>
+          </a:p>
+        </p:txBody>
+      </p:sp>
+      <p:sp>
+        <p:nvSpPr>
+          <p:cNvPr id="13" name="TextBox 12"/>
+          <p:cNvSpPr txBox="1"/>
+          <p:nvPr/>
+        </p:nvSpPr>
+        <p:spPr>
+          <a:xfrm>
+            <a:off x="4279392" y="5093208"/>
+            <a:ext cx="1280160" cy="365760"/>
+          </a:xfrm>
+          <a:prstGeom prst="rect">
+            <a:avLst/>
+          </a:prstGeom>
+          <a:noFill/>
+        </p:spPr>
+        <p:txBody>
+          <a:bodyPr wrap="square" anchor="ctr" lIns="0" rIns="0" tIns="0" bIns="0">
+            <a:noAutofit/>
+          </a:bodyPr>
+          <a:lstStyle/>
+          <a:p>
+            <a:pPr algn="l">
+              <a:lnSpc>
+                <a:spcPct val="100000"/>
+              </a:lnSpc>
+            </a:pPr>
+            <a:r>
+              <a:rPr sz="1400" b="1" i="0">
+                <a:solidFill>
+                  <a:srgbClr val="8B98A5"/>
+                </a:solidFill>
+                <a:latin typeface="Calibri"/>
+              </a:rPr>
+              <a:t>8.4 / 12</a:t>
+            </a:r>
+          </a:p>
+        </p:txBody>
+      </p:sp>
+      <p:sp>
+        <p:nvSpPr>
+          <p:cNvPr id="14" name="TextBox 13"/>
+          <p:cNvSpPr txBox="1"/>
+          <p:nvPr/>
+        </p:nvSpPr>
+        <p:spPr>
+          <a:xfrm>
+            <a:off x="731520" y="5806440"/>
+            <a:ext cx="5486400" cy="457200"/>
+          </a:xfrm>
+          <a:prstGeom prst="rect">
+            <a:avLst/>
+          </a:prstGeom>
+          <a:noFill/>
+        </p:spPr>
+        <p:txBody>
+          <a:bodyPr wrap="square" anchor="t" lIns="0" rIns="0" tIns="0" bIns="0">
+            <a:noAutofit/>
+          </a:bodyPr>
+          <a:lstStyle/>
+          <a:p>
+            <a:pPr algn="l">
+              <a:lnSpc>
+                <a:spcPct val="105000"/>
+              </a:lnSpc>
+            </a:pPr>
+            <a:r>
+              <a:rPr sz="1100" b="0" i="1">
+                <a:solidFill>
+                  <a:srgbClr val="8B98A5"/>
+                </a:solidFill>
+                <a:latin typeface="Calibri"/>
+              </a:rPr>
+              <a:t>Coverage = engineering concern surfaced as work, scored by a deterministic 12-point rubric.</a:t>
+            </a:r>
+          </a:p>
+        </p:txBody>
+      </p:sp>
+      <p:sp>
+        <p:nvSpPr>
+          <p:cNvPr id="15" name="Rounded Rectangle 14"/>
+          <p:cNvSpPr/>
+          <p:nvPr/>
+        </p:nvSpPr>
+        <p:spPr>
+          <a:xfrm>
+            <a:off x="6583680" y="1554480"/>
+            <a:ext cx="4983480" cy="4343400"/>
           </a:xfrm>
           <a:prstGeom prst="roundRect">
             <a:avLst>
               <a:gd name="adj" fmla="val 8000"/>
+            </a:avLst>
+          </a:prstGeom>
+          <a:solidFill>
+            <a:srgbClr val="1A212B"/>
+          </a:solidFill>
+          <a:ln w="12700">
+            <a:solidFill>
+              <a:srgbClr val="2D3A48"/>
+            </a:solidFill>
+          </a:ln>
+          <a:effectLst/>
+        </p:spPr>
+        <p:style>
+          <a:lnRef idx="1">
+            <a:schemeClr val="accent1"/>
+          </a:lnRef>
+          <a:fillRef idx="3">
+            <a:schemeClr val="accent1"/>
+          </a:fillRef>
+          <a:effectRef idx="2">
+            <a:schemeClr val="accent1"/>
+          </a:effectRef>
+          <a:fontRef idx="minor">
+            <a:schemeClr val="lt1"/>
+          </a:fontRef>
+        </p:style>
+        <p:txBody>
+          <a:bodyPr rtlCol="0" anchor="ctr"/>
+          <a:lstStyle/>
+          <a:p>
+            <a:pPr algn="ctr"/>
+          </a:p>
+        </p:txBody>
+      </p:sp>
+      <p:sp>
+        <p:nvSpPr>
+          <p:cNvPr id="16" name="TextBox 15"/>
+          <p:cNvSpPr txBox="1"/>
+          <p:nvPr/>
+        </p:nvSpPr>
+        <p:spPr>
+          <a:xfrm>
+            <a:off x="6903720" y="1810512"/>
+            <a:ext cx="4343400" cy="365760"/>
+          </a:xfrm>
+          <a:prstGeom prst="rect">
+            <a:avLst/>
+          </a:prstGeom>
+          <a:noFill/>
+        </p:spPr>
+        <p:txBody>
+          <a:bodyPr wrap="square" anchor="t" lIns="0" rIns="0" tIns="0" bIns="0">
+            <a:noAutofit/>
+          </a:bodyPr>
+          <a:lstStyle/>
+          <a:p>
+            <a:pPr algn="l">
+              <a:lnSpc>
+                <a:spcPct val="100000"/>
+              </a:lnSpc>
+            </a:pPr>
+            <a:r>
+              <a:rPr sz="1400" b="1" i="0">
+                <a:solidFill>
+                  <a:srgbClr val="E6EDF3"/>
+                </a:solidFill>
+                <a:latin typeface="Calibri"/>
+              </a:rPr>
+              <a:t>Per design  ·  coverage delta (multi − single)</a:t>
+            </a:r>
+          </a:p>
+        </p:txBody>
+      </p:sp>
+      <p:sp>
+        <p:nvSpPr>
+          <p:cNvPr id="17" name="TextBox 16"/>
+          <p:cNvSpPr txBox="1"/>
+          <p:nvPr/>
+        </p:nvSpPr>
+        <p:spPr>
+          <a:xfrm>
+            <a:off x="6949440" y="2423160"/>
+            <a:ext cx="3291840" cy="457200"/>
+          </a:xfrm>
+          <a:prstGeom prst="rect">
+            <a:avLst/>
+          </a:prstGeom>
+          <a:noFill/>
+        </p:spPr>
+        <p:txBody>
+          <a:bodyPr wrap="square" anchor="ctr" lIns="0" rIns="0" tIns="0" bIns="0">
+            <a:noAutofit/>
+          </a:bodyPr>
+          <a:lstStyle/>
+          <a:p>
+            <a:pPr algn="l">
+              <a:lnSpc>
+                <a:spcPct val="100000"/>
+              </a:lnSpc>
+            </a:pPr>
+            <a:r>
+              <a:rPr sz="1500" b="0" i="0">
+                <a:solidFill>
+                  <a:srgbClr val="E6EDF3"/>
+                </a:solidFill>
+                <a:latin typeface="Calibri"/>
+              </a:rPr>
+              <a:t>Motor + safety</a:t>
+            </a:r>
+          </a:p>
+        </p:txBody>
+      </p:sp>
+      <p:sp>
+        <p:nvSpPr>
+          <p:cNvPr id="18" name="Oval 17"/>
+          <p:cNvSpPr/>
+          <p:nvPr/>
+        </p:nvSpPr>
+        <p:spPr>
+          <a:xfrm>
+            <a:off x="10515600" y="2441448"/>
+            <a:ext cx="420624" cy="420624"/>
+          </a:xfrm>
+          <a:prstGeom prst="ellipse">
+            <a:avLst/>
+          </a:prstGeom>
+          <a:solidFill>
+            <a:srgbClr val="8B98A5"/>
+          </a:solidFill>
+          <a:ln>
+            <a:noFill/>
+          </a:ln>
+          <a:effectLst/>
+        </p:spPr>
+        <p:style>
+          <a:lnRef idx="1">
+            <a:schemeClr val="accent1"/>
+          </a:lnRef>
+          <a:fillRef idx="3">
+            <a:schemeClr val="accent1"/>
+          </a:fillRef>
+          <a:effectRef idx="2">
+            <a:schemeClr val="accent1"/>
+          </a:effectRef>
+          <a:fontRef idx="minor">
+            <a:schemeClr val="lt1"/>
+          </a:fontRef>
+        </p:style>
+        <p:txBody>
+          <a:bodyPr rtlCol="0" anchor="ctr" wrap="none" lIns="0" rIns="0" tIns="0" bIns="0"/>
+          <a:lstStyle/>
+          <a:p>
+            <a:pPr algn="ctr"/>
+            <a:r>
+              <a:rPr sz="1300" b="1">
+                <a:solidFill>
+                  <a:srgbClr val="E6EDF3"/>
+                </a:solidFill>
+                <a:latin typeface="Calibri"/>
+              </a:rPr>
+              <a:t>+2</a:t>
+            </a:r>
+          </a:p>
+        </p:txBody>
+      </p:sp>
+      <p:sp>
+        <p:nvSpPr>
+          <p:cNvPr id="19" name="TextBox 18"/>
+          <p:cNvSpPr txBox="1"/>
+          <p:nvPr/>
+        </p:nvSpPr>
+        <p:spPr>
+          <a:xfrm>
+            <a:off x="6949440" y="3063240"/>
+            <a:ext cx="3291840" cy="457200"/>
+          </a:xfrm>
+          <a:prstGeom prst="rect">
+            <a:avLst/>
+          </a:prstGeom>
+          <a:noFill/>
+        </p:spPr>
+        <p:txBody>
+          <a:bodyPr wrap="square" anchor="ctr" lIns="0" rIns="0" tIns="0" bIns="0">
+            <a:noAutofit/>
+          </a:bodyPr>
+          <a:lstStyle/>
+          <a:p>
+            <a:pPr algn="l">
+              <a:lnSpc>
+                <a:spcPct val="100000"/>
+              </a:lnSpc>
+            </a:pPr>
+            <a:r>
+              <a:rPr sz="1500" b="0" i="0">
+                <a:solidFill>
+                  <a:srgbClr val="E6EDF3"/>
+                </a:solidFill>
+                <a:latin typeface="Calibri"/>
+              </a:rPr>
+              <a:t>Precision analog</a:t>
+            </a:r>
+          </a:p>
+        </p:txBody>
+      </p:sp>
+      <p:sp>
+        <p:nvSpPr>
+          <p:cNvPr id="20" name="Oval 19"/>
+          <p:cNvSpPr/>
+          <p:nvPr/>
+        </p:nvSpPr>
+        <p:spPr>
+          <a:xfrm>
+            <a:off x="10515600" y="3081528"/>
+            <a:ext cx="420624" cy="420624"/>
+          </a:xfrm>
+          <a:prstGeom prst="ellipse">
+            <a:avLst/>
+          </a:prstGeom>
+          <a:solidFill>
+            <a:srgbClr val="8B98A5"/>
+          </a:solidFill>
+          <a:ln>
+            <a:noFill/>
+          </a:ln>
+          <a:effectLst/>
+        </p:spPr>
+        <p:style>
+          <a:lnRef idx="1">
+            <a:schemeClr val="accent1"/>
+          </a:lnRef>
+          <a:fillRef idx="3">
+            <a:schemeClr val="accent1"/>
+          </a:fillRef>
+          <a:effectRef idx="2">
+            <a:schemeClr val="accent1"/>
+          </a:effectRef>
+          <a:fontRef idx="minor">
+            <a:schemeClr val="lt1"/>
+          </a:fontRef>
+        </p:style>
+        <p:txBody>
+          <a:bodyPr rtlCol="0" anchor="ctr" wrap="none" lIns="0" rIns="0" tIns="0" bIns="0"/>
+          <a:lstStyle/>
+          <a:p>
+            <a:pPr algn="ctr"/>
+            <a:r>
+              <a:rPr sz="1300" b="1">
+                <a:solidFill>
+                  <a:srgbClr val="E6EDF3"/>
+                </a:solidFill>
+                <a:latin typeface="Calibri"/>
+              </a:rPr>
+              <a:t>+2</a:t>
+            </a:r>
+          </a:p>
+        </p:txBody>
+      </p:sp>
+      <p:sp>
+        <p:nvSpPr>
+          <p:cNvPr id="21" name="TextBox 20"/>
+          <p:cNvSpPr txBox="1"/>
+          <p:nvPr/>
+        </p:nvSpPr>
+        <p:spPr>
+          <a:xfrm>
+            <a:off x="6949440" y="3703320"/>
+            <a:ext cx="3291840" cy="457200"/>
+          </a:xfrm>
+          <a:prstGeom prst="rect">
+            <a:avLst/>
+          </a:prstGeom>
+          <a:noFill/>
+        </p:spPr>
+        <p:txBody>
+          <a:bodyPr wrap="square" anchor="ctr" lIns="0" rIns="0" tIns="0" bIns="0">
+            <a:noAutofit/>
+          </a:bodyPr>
+          <a:lstStyle/>
+          <a:p>
+            <a:pPr algn="l">
+              <a:lnSpc>
+                <a:spcPct val="100000"/>
+              </a:lnSpc>
+            </a:pPr>
+            <a:r>
+              <a:rPr sz="1500" b="0" i="0">
+                <a:solidFill>
+                  <a:srgbClr val="E6EDF3"/>
+                </a:solidFill>
+                <a:latin typeface="Calibri"/>
+              </a:rPr>
+              <a:t>Battery IoT</a:t>
+            </a:r>
+          </a:p>
+        </p:txBody>
+      </p:sp>
+      <p:sp>
+        <p:nvSpPr>
+          <p:cNvPr id="22" name="Oval 21"/>
+          <p:cNvSpPr/>
+          <p:nvPr/>
+        </p:nvSpPr>
+        <p:spPr>
+          <a:xfrm>
+            <a:off x="10515600" y="3721608"/>
+            <a:ext cx="420624" cy="420624"/>
+          </a:xfrm>
+          <a:prstGeom prst="ellipse">
+            <a:avLst/>
+          </a:prstGeom>
+          <a:solidFill>
+            <a:srgbClr val="4F9CF9"/>
+          </a:solidFill>
+          <a:ln>
+            <a:noFill/>
+          </a:ln>
+          <a:effectLst/>
+        </p:spPr>
+        <p:style>
+          <a:lnRef idx="1">
+            <a:schemeClr val="accent1"/>
+          </a:lnRef>
+          <a:fillRef idx="3">
+            <a:schemeClr val="accent1"/>
+          </a:fillRef>
+          <a:effectRef idx="2">
+            <a:schemeClr val="accent1"/>
+          </a:effectRef>
+          <a:fontRef idx="minor">
+            <a:schemeClr val="lt1"/>
+          </a:fontRef>
+        </p:style>
+        <p:txBody>
+          <a:bodyPr rtlCol="0" anchor="ctr" wrap="none" lIns="0" rIns="0" tIns="0" bIns="0"/>
+          <a:lstStyle/>
+          <a:p>
+            <a:pPr algn="ctr"/>
+            <a:r>
+              <a:rPr sz="1300" b="1">
+                <a:solidFill>
+                  <a:srgbClr val="0F1419"/>
+                </a:solidFill>
+                <a:latin typeface="Calibri"/>
+              </a:rPr>
+              <a:t>+4</a:t>
+            </a:r>
+          </a:p>
+        </p:txBody>
+      </p:sp>
+      <p:sp>
+        <p:nvSpPr>
+          <p:cNvPr id="23" name="TextBox 22"/>
+          <p:cNvSpPr txBox="1"/>
+          <p:nvPr/>
+        </p:nvSpPr>
+        <p:spPr>
+          <a:xfrm>
+            <a:off x="6949440" y="4343400"/>
+            <a:ext cx="3291840" cy="457200"/>
+          </a:xfrm>
+          <a:prstGeom prst="rect">
+            <a:avLst/>
+          </a:prstGeom>
+          <a:noFill/>
+        </p:spPr>
+        <p:txBody>
+          <a:bodyPr wrap="square" anchor="ctr" lIns="0" rIns="0" tIns="0" bIns="0">
+            <a:noAutofit/>
+          </a:bodyPr>
+          <a:lstStyle/>
+          <a:p>
+            <a:pPr algn="l">
+              <a:lnSpc>
+                <a:spcPct val="100000"/>
+              </a:lnSpc>
+            </a:pPr>
+            <a:r>
+              <a:rPr sz="1500" b="0" i="0">
+                <a:solidFill>
+                  <a:srgbClr val="E6EDF3"/>
+                </a:solidFill>
+                <a:latin typeface="Calibri"/>
+              </a:rPr>
+              <a:t>Medical wearable</a:t>
+            </a:r>
+          </a:p>
+        </p:txBody>
+      </p:sp>
+      <p:sp>
+        <p:nvSpPr>
+          <p:cNvPr id="24" name="Oval 23"/>
+          <p:cNvSpPr/>
+          <p:nvPr/>
+        </p:nvSpPr>
+        <p:spPr>
+          <a:xfrm>
+            <a:off x="10515600" y="4361688"/>
+            <a:ext cx="420624" cy="420624"/>
+          </a:xfrm>
+          <a:prstGeom prst="ellipse">
+            <a:avLst/>
+          </a:prstGeom>
+          <a:solidFill>
+            <a:srgbClr val="4F9CF9"/>
+          </a:solidFill>
+          <a:ln>
+            <a:noFill/>
+          </a:ln>
+          <a:effectLst/>
+        </p:spPr>
+        <p:style>
+          <a:lnRef idx="1">
+            <a:schemeClr val="accent1"/>
+          </a:lnRef>
+          <a:fillRef idx="3">
+            <a:schemeClr val="accent1"/>
+          </a:fillRef>
+          <a:effectRef idx="2">
+            <a:schemeClr val="accent1"/>
+          </a:effectRef>
+          <a:fontRef idx="minor">
+            <a:schemeClr val="lt1"/>
+          </a:fontRef>
+        </p:style>
+        <p:txBody>
+          <a:bodyPr rtlCol="0" anchor="ctr" wrap="none" lIns="0" rIns="0" tIns="0" bIns="0"/>
+          <a:lstStyle/>
+          <a:p>
+            <a:pPr algn="ctr"/>
+            <a:r>
+              <a:rPr sz="1300" b="1">
+                <a:solidFill>
+                  <a:srgbClr val="0F1419"/>
+                </a:solidFill>
+                <a:latin typeface="Calibri"/>
+              </a:rPr>
+              <a:t>+5</a:t>
+            </a:r>
+          </a:p>
+        </p:txBody>
+      </p:sp>
+      <p:sp>
+        <p:nvSpPr>
+          <p:cNvPr id="25" name="TextBox 24"/>
+          <p:cNvSpPr txBox="1"/>
+          <p:nvPr/>
+        </p:nvSpPr>
+        <p:spPr>
+          <a:xfrm>
+            <a:off x="6949440" y="4983480"/>
+            <a:ext cx="3291840" cy="457200"/>
+          </a:xfrm>
+          <a:prstGeom prst="rect">
+            <a:avLst/>
+          </a:prstGeom>
+          <a:noFill/>
+        </p:spPr>
+        <p:txBody>
+          <a:bodyPr wrap="square" anchor="ctr" lIns="0" rIns="0" tIns="0" bIns="0">
+            <a:noAutofit/>
+          </a:bodyPr>
+          <a:lstStyle/>
+          <a:p>
+            <a:pPr algn="l">
+              <a:lnSpc>
+                <a:spcPct val="100000"/>
+              </a:lnSpc>
+            </a:pPr>
+            <a:r>
+              <a:rPr sz="1500" b="0" i="0">
+                <a:solidFill>
+                  <a:srgbClr val="E6EDF3"/>
+                </a:solidFill>
+                <a:latin typeface="Calibri"/>
+              </a:rPr>
+              <a:t>Industrial gateway</a:t>
+            </a:r>
+          </a:p>
+        </p:txBody>
+      </p:sp>
+      <p:sp>
+        <p:nvSpPr>
+          <p:cNvPr id="26" name="Oval 25"/>
+          <p:cNvSpPr/>
+          <p:nvPr/>
+        </p:nvSpPr>
+        <p:spPr>
+          <a:xfrm>
+            <a:off x="10515600" y="5001768"/>
+            <a:ext cx="420624" cy="420624"/>
+          </a:xfrm>
+          <a:prstGeom prst="ellipse">
+            <a:avLst/>
+          </a:prstGeom>
+          <a:solidFill>
+            <a:srgbClr val="222C38"/>
+          </a:solidFill>
+          <a:ln>
+            <a:noFill/>
+          </a:ln>
+          <a:effectLst/>
+        </p:spPr>
+        <p:style>
+          <a:lnRef idx="1">
+            <a:schemeClr val="accent1"/>
+          </a:lnRef>
+          <a:fillRef idx="3">
+            <a:schemeClr val="accent1"/>
+          </a:fillRef>
+          <a:effectRef idx="2">
+            <a:schemeClr val="accent1"/>
+          </a:effectRef>
+          <a:fontRef idx="minor">
+            <a:schemeClr val="lt1"/>
+          </a:fontRef>
+        </p:style>
+        <p:txBody>
+          <a:bodyPr rtlCol="0" anchor="ctr" wrap="none" lIns="0" rIns="0" tIns="0" bIns="0"/>
+          <a:lstStyle/>
+          <a:p>
+            <a:pPr algn="ctr"/>
+            <a:r>
+              <a:rPr sz="1300" b="1">
+                <a:solidFill>
+                  <a:srgbClr val="E6EDF3"/>
+                </a:solidFill>
+                <a:latin typeface="Calibri"/>
+              </a:rPr>
+              <a:t>+3</a:t>
+            </a:r>
+          </a:p>
+        </p:txBody>
+      </p:sp>
+      <p:sp>
+        <p:nvSpPr>
+          <p:cNvPr id="27" name="TextBox 26"/>
+          <p:cNvSpPr txBox="1"/>
+          <p:nvPr/>
+        </p:nvSpPr>
+        <p:spPr>
+          <a:xfrm>
+            <a:off x="6949440" y="5669280"/>
+            <a:ext cx="4251960" cy="457200"/>
+          </a:xfrm>
+          <a:prstGeom prst="rect">
+            <a:avLst/>
+          </a:prstGeom>
+          <a:noFill/>
+        </p:spPr>
+        <p:txBody>
+          <a:bodyPr wrap="square" anchor="t" lIns="0" rIns="0" tIns="0" bIns="0">
+            <a:noAutofit/>
+          </a:bodyPr>
+          <a:lstStyle/>
+          <a:p>
+            <a:pPr algn="l">
+              <a:lnSpc>
+                <a:spcPct val="100000"/>
+              </a:lnSpc>
+            </a:pPr>
+            <a:r>
+              <a:rPr sz="1400" b="1" i="0">
+                <a:solidFill>
+                  <a:srgbClr val="4F9CF9"/>
+                </a:solidFill>
+                <a:latin typeface="Calibri"/>
+              </a:rPr>
+              <a:t>↑  the gap widens with complexity</a:t>
+            </a:r>
+          </a:p>
+        </p:txBody>
+      </p:sp>
+      <p:sp>
+        <p:nvSpPr>
+          <p:cNvPr id="28" name="TextBox 27"/>
+          <p:cNvSpPr txBox="1"/>
+          <p:nvPr/>
+        </p:nvSpPr>
+        <p:spPr>
+          <a:xfrm>
+            <a:off x="640080" y="6437376"/>
+            <a:ext cx="4572000" cy="274320"/>
+          </a:xfrm>
+          <a:prstGeom prst="rect">
+            <a:avLst/>
+          </a:prstGeom>
+          <a:noFill/>
+        </p:spPr>
+        <p:txBody>
+          <a:bodyPr wrap="square" anchor="t" lIns="0" rIns="0" tIns="0" bIns="0">
+            <a:noAutofit/>
+          </a:bodyPr>
+          <a:lstStyle/>
+          <a:p>
+            <a:pPr algn="l">
+              <a:lnSpc>
+                <a:spcPct val="100000"/>
+              </a:lnSpc>
+            </a:pPr>
+            <a:r>
+              <a:rPr sz="1000" b="0" i="0">
+                <a:solidFill>
+                  <a:srgbClr val="8B98A5"/>
+                </a:solidFill>
+                <a:latin typeface="Calibri"/>
+              </a:rPr>
+              <a:t>AI Circuit Architect</a:t>
+            </a:r>
+          </a:p>
+        </p:txBody>
+      </p:sp>
+      <p:sp>
+        <p:nvSpPr>
+          <p:cNvPr id="29" name="TextBox 28"/>
+          <p:cNvSpPr txBox="1"/>
+          <p:nvPr/>
+        </p:nvSpPr>
+        <p:spPr>
+          <a:xfrm>
+            <a:off x="10607040" y="6437376"/>
+            <a:ext cx="1097280" cy="274320"/>
+          </a:xfrm>
+          <a:prstGeom prst="rect">
+            <a:avLst/>
+          </a:prstGeom>
+          <a:noFill/>
+        </p:spPr>
+        <p:txBody>
+          <a:bodyPr wrap="square" anchor="t" lIns="0" rIns="0" tIns="0" bIns="0">
+            <a:noAutofit/>
+          </a:bodyPr>
+          <a:lstStyle/>
+          <a:p>
+            <a:pPr algn="r">
+              <a:lnSpc>
+                <a:spcPct val="100000"/>
+              </a:lnSpc>
+            </a:pPr>
+            <a:r>
+              <a:rPr sz="1000" b="0" i="0">
+                <a:solidFill>
+                  <a:srgbClr val="8B98A5"/>
+                </a:solidFill>
+                <a:latin typeface="Calibri"/>
+              </a:rPr>
+              <a:t>3 / 9</a:t>
+            </a:r>
+          </a:p>
+        </p:txBody>
+      </p:sp>
+    </p:spTree>
+  </p:cSld>
+  <p:clrMapOvr>
+    <a:masterClrMapping/>
+  </p:clrMapOvr>
+</p:sld>
+</file>
+
+<file path=ppt/slides/slide4.xml><?xml version="1.0" encoding="utf-8"?>
+<p:sld xmlns:a="http://schemas.openxmlformats.org/drawingml/2006/main" xmlns:p="http://schemas.openxmlformats.org/presentationml/2006/main" xmlns:r="http://schemas.openxmlformats.org/officeDocument/2006/relationships">
+  <p:cSld>
+    <p:spTree>
+      <p:nvGrpSpPr>
+        <p:cNvPr id="1" name=""/>
+        <p:cNvGrpSpPr/>
+        <p:nvPr/>
+      </p:nvGrpSpPr>
+      <p:grpSpPr/>
+      <p:sp>
+        <p:nvSpPr>
+          <p:cNvPr id="2" name="Rectangle 1"/>
+          <p:cNvSpPr/>
+          <p:nvPr/>
+        </p:nvSpPr>
+        <p:spPr>
+          <a:xfrm>
+            <a:off x="0" y="0"/>
+            <a:ext cx="12191695" cy="6858000"/>
+          </a:xfrm>
+          <a:prstGeom prst="rect">
+            <a:avLst/>
+          </a:prstGeom>
+          <a:solidFill>
+            <a:srgbClr val="0F1419"/>
+          </a:solidFill>
+          <a:ln>
+            <a:noFill/>
+          </a:ln>
+          <a:effectLst/>
+        </p:spPr>
+        <p:style>
+          <a:lnRef idx="1">
+            <a:schemeClr val="accent1"/>
+          </a:lnRef>
+          <a:fillRef idx="3">
+            <a:schemeClr val="accent1"/>
+          </a:fillRef>
+          <a:effectRef idx="2">
+            <a:schemeClr val="accent1"/>
+          </a:effectRef>
+          <a:fontRef idx="minor">
+            <a:schemeClr val="lt1"/>
+          </a:fontRef>
+        </p:style>
+        <p:txBody>
+          <a:bodyPr rtlCol="0" anchor="ctr"/>
+          <a:lstStyle/>
+          <a:p>
+            <a:pPr algn="ctr"/>
+          </a:p>
+        </p:txBody>
+      </p:sp>
+      <p:sp>
+        <p:nvSpPr>
+          <p:cNvPr id="3" name="TextBox 2"/>
+          <p:cNvSpPr txBox="1"/>
+          <p:nvPr/>
+        </p:nvSpPr>
+        <p:spPr>
+          <a:xfrm>
+            <a:off x="640080" y="502920"/>
+            <a:ext cx="10881360" cy="914400"/>
+          </a:xfrm>
+          <a:prstGeom prst="rect">
+            <a:avLst/>
+          </a:prstGeom>
+          <a:noFill/>
+        </p:spPr>
+        <p:txBody>
+          <a:bodyPr wrap="square" anchor="t" lIns="0" rIns="0" tIns="0" bIns="0">
+            <a:noAutofit/>
+          </a:bodyPr>
+          <a:lstStyle/>
+          <a:p>
+            <a:pPr algn="l">
+              <a:lnSpc>
+                <a:spcPct val="100000"/>
+              </a:lnSpc>
+            </a:pPr>
+            <a:r>
+              <a:rPr sz="3400" b="1" i="0">
+                <a:solidFill>
+                  <a:srgbClr val="E6EDF3"/>
+                </a:solidFill>
+                <a:latin typeface="Calibri"/>
+              </a:rPr>
+              <a:t>A team, not a prompt — six specialist agents</a:t>
+            </a:r>
+          </a:p>
+        </p:txBody>
+      </p:sp>
+      <p:sp>
+        <p:nvSpPr>
+          <p:cNvPr id="4" name="TextBox 3"/>
+          <p:cNvSpPr txBox="1"/>
+          <p:nvPr/>
+        </p:nvSpPr>
+        <p:spPr>
+          <a:xfrm>
+            <a:off x="640080" y="1325880"/>
+            <a:ext cx="10881360" cy="457200"/>
+          </a:xfrm>
+          <a:prstGeom prst="rect">
+            <a:avLst/>
+          </a:prstGeom>
+          <a:noFill/>
+        </p:spPr>
+        <p:txBody>
+          <a:bodyPr wrap="square" anchor="t" lIns="0" rIns="0" tIns="0" bIns="0">
+            <a:noAutofit/>
+          </a:bodyPr>
+          <a:lstStyle/>
+          <a:p>
+            <a:pPr algn="l">
+              <a:lnSpc>
+                <a:spcPct val="100000"/>
+              </a:lnSpc>
+            </a:pPr>
+            <a:r>
+              <a:rPr sz="1500" b="0" i="0">
+                <a:solidFill>
+                  <a:srgbClr val="8B98A5"/>
+                </a:solidFill>
+                <a:latin typeface="Calibri"/>
+              </a:rPr>
+              <a:t>Each stage has one job and its own model tier. Work hands off left to right; reviewers can send it back.</a:t>
+            </a:r>
+          </a:p>
+        </p:txBody>
+      </p:sp>
+      <p:sp>
+        <p:nvSpPr>
+          <p:cNvPr id="5" name="Rounded Rectangle 4"/>
+          <p:cNvSpPr/>
+          <p:nvPr/>
+        </p:nvSpPr>
+        <p:spPr>
+          <a:xfrm>
+            <a:off x="566928" y="2286000"/>
+            <a:ext cx="1627632" cy="2331720"/>
+          </a:xfrm>
+          <a:prstGeom prst="roundRect">
+            <a:avLst>
+              <a:gd name="adj" fmla="val 8000"/>
+            </a:avLst>
+          </a:prstGeom>
+          <a:solidFill>
+            <a:srgbClr val="1A212B"/>
+          </a:solidFill>
+          <a:ln w="12700">
+            <a:solidFill>
+              <a:srgbClr val="2D3A48"/>
+            </a:solidFill>
+          </a:ln>
+          <a:effectLst/>
+        </p:spPr>
+        <p:style>
+          <a:lnRef idx="1">
+            <a:schemeClr val="accent1"/>
+          </a:lnRef>
+          <a:fillRef idx="3">
+            <a:schemeClr val="accent1"/>
+          </a:fillRef>
+          <a:effectRef idx="2">
+            <a:schemeClr val="accent1"/>
+          </a:effectRef>
+          <a:fontRef idx="minor">
+            <a:schemeClr val="lt1"/>
+          </a:fontRef>
+        </p:style>
+        <p:txBody>
+          <a:bodyPr rtlCol="0" anchor="ctr"/>
+          <a:lstStyle/>
+          <a:p>
+            <a:pPr algn="ctr"/>
+          </a:p>
+        </p:txBody>
+      </p:sp>
+      <p:sp>
+        <p:nvSpPr>
+          <p:cNvPr id="6" name="Oval 5"/>
+          <p:cNvSpPr/>
+          <p:nvPr/>
+        </p:nvSpPr>
+        <p:spPr>
+          <a:xfrm>
+            <a:off x="996696" y="2606040"/>
+            <a:ext cx="768096" cy="768096"/>
+          </a:xfrm>
+          <a:prstGeom prst="ellipse">
+            <a:avLst/>
+          </a:prstGeom>
+          <a:solidFill>
+            <a:srgbClr val="4F9CF9"/>
+          </a:solidFill>
+          <a:ln>
+            <a:noFill/>
+          </a:ln>
+          <a:effectLst/>
+        </p:spPr>
+        <p:style>
+          <a:lnRef idx="1">
+            <a:schemeClr val="accent1"/>
+          </a:lnRef>
+          <a:fillRef idx="3">
+            <a:schemeClr val="accent1"/>
+          </a:fillRef>
+          <a:effectRef idx="2">
+            <a:schemeClr val="accent1"/>
+          </a:effectRef>
+          <a:fontRef idx="minor">
+            <a:schemeClr val="lt1"/>
+          </a:fontRef>
+        </p:style>
+        <p:txBody>
+          <a:bodyPr rtlCol="0" anchor="ctr" wrap="none" lIns="0" rIns="0" tIns="0" bIns="0"/>
+          <a:lstStyle/>
+          <a:p>
+            <a:pPr algn="ctr"/>
+            <a:r>
+              <a:rPr sz="2000" b="1">
+                <a:solidFill>
+                  <a:srgbClr val="0F1419"/>
+                </a:solidFill>
+                <a:latin typeface="Calibri"/>
+              </a:rPr>
+              <a:t>RQ</a:t>
+            </a:r>
+          </a:p>
+        </p:txBody>
+      </p:sp>
+      <p:sp>
+        <p:nvSpPr>
+          <p:cNvPr id="7" name="TextBox 6"/>
+          <p:cNvSpPr txBox="1"/>
+          <p:nvPr/>
+        </p:nvSpPr>
+        <p:spPr>
+          <a:xfrm>
+            <a:off x="612648" y="3566160"/>
+            <a:ext cx="1536192" cy="548640"/>
+          </a:xfrm>
+          <a:prstGeom prst="rect">
+            <a:avLst/>
+          </a:prstGeom>
+          <a:noFill/>
+        </p:spPr>
+        <p:txBody>
+          <a:bodyPr wrap="square" anchor="t" lIns="0" rIns="0" tIns="0" bIns="0">
+            <a:noAutofit/>
+          </a:bodyPr>
+          <a:lstStyle/>
+          <a:p>
+            <a:pPr algn="ctr">
+              <a:lnSpc>
+                <a:spcPct val="95000"/>
+              </a:lnSpc>
+            </a:pPr>
+            <a:r>
+              <a:rPr sz="1450" b="1" i="0">
+                <a:solidFill>
+                  <a:srgbClr val="E6EDF3"/>
+                </a:solidFill>
+                <a:latin typeface="Calibri"/>
+              </a:rPr>
+              <a:t>Requirements</a:t>
+            </a:r>
+          </a:p>
+        </p:txBody>
+      </p:sp>
+      <p:sp>
+        <p:nvSpPr>
+          <p:cNvPr id="8" name="Rounded Rectangle 7"/>
+          <p:cNvSpPr/>
+          <p:nvPr/>
+        </p:nvSpPr>
+        <p:spPr>
+          <a:xfrm>
+            <a:off x="813816" y="4114800"/>
+            <a:ext cx="1133856" cy="329184"/>
+          </a:xfrm>
+          <a:prstGeom prst="roundRect">
+            <a:avLst>
+              <a:gd name="adj" fmla="val 50000"/>
             </a:avLst>
           </a:prstGeom>
           <a:solidFill>
@@ -4740,41 +6121,55 @@
           </a:p>
         </p:txBody>
       </p:sp>
-      <p:pic>
-        <p:nvPicPr>
-          <p:cNvPr id="5" name="Picture 4" descr="society_rework.png"/>
-          <p:cNvPicPr>
-            <a:picLocks noChangeAspect="1"/>
-          </p:cNvPicPr>
-          <p:nvPr/>
-        </p:nvPicPr>
-        <p:blipFill>
-          <a:blip r:embed="rId2"/>
-          <a:srcRect b="40000"/>
-          <a:stretch>
-            <a:fillRect/>
-          </a:stretch>
-        </p:blipFill>
-        <p:spPr>
-          <a:xfrm>
-            <a:off x="640080" y="1508760"/>
-            <a:ext cx="4983480" cy="4652242"/>
-          </a:xfrm>
-          <a:prstGeom prst="rect">
-            <a:avLst/>
-          </a:prstGeom>
-        </p:spPr>
-      </p:pic>
-      <p:sp>
-        <p:nvSpPr>
-          <p:cNvPr id="6" name="TextBox 5"/>
-          <p:cNvSpPr txBox="1"/>
-          <p:nvPr/>
-        </p:nvSpPr>
-        <p:spPr>
-          <a:xfrm>
-            <a:off x="6355080" y="1463040"/>
-            <a:ext cx="5212080" cy="640080"/>
+      <p:sp>
+        <p:nvSpPr>
+          <p:cNvPr id="9" name="TextBox 8"/>
+          <p:cNvSpPr txBox="1"/>
+          <p:nvPr/>
+        </p:nvSpPr>
+        <p:spPr>
+          <a:xfrm>
+            <a:off x="813816" y="4114800"/>
+            <a:ext cx="1133856" cy="329184"/>
+          </a:xfrm>
+          <a:prstGeom prst="rect">
+            <a:avLst/>
+          </a:prstGeom>
+          <a:noFill/>
+        </p:spPr>
+        <p:txBody>
+          <a:bodyPr wrap="square" anchor="ctr" lIns="0" rIns="0" tIns="0" bIns="0">
+            <a:noAutofit/>
+          </a:bodyPr>
+          <a:lstStyle/>
+          <a:p>
+            <a:pPr algn="ctr">
+              <a:lnSpc>
+                <a:spcPct val="100000"/>
+              </a:lnSpc>
+            </a:pPr>
+            <a:r>
+              <a:rPr sz="1100" b="0" i="0">
+                <a:solidFill>
+                  <a:srgbClr val="4F9CF9"/>
+                </a:solidFill>
+                <a:latin typeface="Calibri"/>
+              </a:rPr>
+              <a:t>qwen-plus</a:t>
+            </a:r>
+          </a:p>
+        </p:txBody>
+      </p:sp>
+      <p:sp>
+        <p:nvSpPr>
+          <p:cNvPr id="10" name="TextBox 9"/>
+          <p:cNvSpPr txBox="1"/>
+          <p:nvPr/>
+        </p:nvSpPr>
+        <p:spPr>
+          <a:xfrm>
+            <a:off x="2176272" y="2834640"/>
+            <a:ext cx="310896" cy="457200"/>
           </a:xfrm>
           <a:prstGeom prst="rect">
             <a:avLst/>
@@ -4787,33 +6182,347 @@
           </a:bodyPr>
           <a:lstStyle/>
           <a:p>
-            <a:pPr algn="l">
-              <a:lnSpc>
-                <a:spcPct val="115000"/>
-              </a:lnSpc>
-            </a:pPr>
-            <a:r>
-              <a:rPr sz="1600" b="0" i="0">
+            <a:pPr algn="ctr">
+              <a:lnSpc>
+                <a:spcPct val="100000"/>
+              </a:lnSpc>
+            </a:pPr>
+            <a:r>
+              <a:rPr sz="2600" b="0" i="0">
                 <a:solidFill>
                   <a:srgbClr val="8B98A5"/>
                 </a:solidFill>
                 <a:latin typeface="Calibri"/>
               </a:rPr>
-              <a:t>Our system is not a pipeline. The Critic challenges the Architect, who reworks — live, in rounds.</a:t>
-            </a:r>
-          </a:p>
-        </p:txBody>
-      </p:sp>
-      <p:sp>
-        <p:nvSpPr>
-          <p:cNvPr id="7" name="Oval 6"/>
+              <a:t>›</a:t>
+            </a:r>
+          </a:p>
+        </p:txBody>
+      </p:sp>
+      <p:sp>
+        <p:nvSpPr>
+          <p:cNvPr id="11" name="Rounded Rectangle 10"/>
           <p:cNvSpPr/>
           <p:nvPr/>
         </p:nvSpPr>
         <p:spPr>
           <a:xfrm>
-            <a:off x="6355080" y="2377440"/>
-            <a:ext cx="457200" cy="457200"/>
+            <a:off x="2450592" y="2286000"/>
+            <a:ext cx="1627632" cy="2331720"/>
+          </a:xfrm>
+          <a:prstGeom prst="roundRect">
+            <a:avLst>
+              <a:gd name="adj" fmla="val 8000"/>
+            </a:avLst>
+          </a:prstGeom>
+          <a:solidFill>
+            <a:srgbClr val="1A212B"/>
+          </a:solidFill>
+          <a:ln w="12700">
+            <a:solidFill>
+              <a:srgbClr val="2D3A48"/>
+            </a:solidFill>
+          </a:ln>
+          <a:effectLst/>
+        </p:spPr>
+        <p:style>
+          <a:lnRef idx="1">
+            <a:schemeClr val="accent1"/>
+          </a:lnRef>
+          <a:fillRef idx="3">
+            <a:schemeClr val="accent1"/>
+          </a:fillRef>
+          <a:effectRef idx="2">
+            <a:schemeClr val="accent1"/>
+          </a:effectRef>
+          <a:fontRef idx="minor">
+            <a:schemeClr val="lt1"/>
+          </a:fontRef>
+        </p:style>
+        <p:txBody>
+          <a:bodyPr rtlCol="0" anchor="ctr"/>
+          <a:lstStyle/>
+          <a:p>
+            <a:pPr algn="ctr"/>
+          </a:p>
+        </p:txBody>
+      </p:sp>
+      <p:sp>
+        <p:nvSpPr>
+          <p:cNvPr id="12" name="Oval 11"/>
+          <p:cNvSpPr/>
+          <p:nvPr/>
+        </p:nvSpPr>
+        <p:spPr>
+          <a:xfrm>
+            <a:off x="2880360" y="2606040"/>
+            <a:ext cx="768096" cy="768096"/>
+          </a:xfrm>
+          <a:prstGeom prst="ellipse">
+            <a:avLst/>
+          </a:prstGeom>
+          <a:solidFill>
+            <a:srgbClr val="4F9CF9"/>
+          </a:solidFill>
+          <a:ln>
+            <a:noFill/>
+          </a:ln>
+          <a:effectLst/>
+        </p:spPr>
+        <p:style>
+          <a:lnRef idx="1">
+            <a:schemeClr val="accent1"/>
+          </a:lnRef>
+          <a:fillRef idx="3">
+            <a:schemeClr val="accent1"/>
+          </a:fillRef>
+          <a:effectRef idx="2">
+            <a:schemeClr val="accent1"/>
+          </a:effectRef>
+          <a:fontRef idx="minor">
+            <a:schemeClr val="lt1"/>
+          </a:fontRef>
+        </p:style>
+        <p:txBody>
+          <a:bodyPr rtlCol="0" anchor="ctr" wrap="none" lIns="0" rIns="0" tIns="0" bIns="0"/>
+          <a:lstStyle/>
+          <a:p>
+            <a:pPr algn="ctr"/>
+            <a:r>
+              <a:rPr sz="2000" b="1">
+                <a:solidFill>
+                  <a:srgbClr val="0F1419"/>
+                </a:solidFill>
+                <a:latin typeface="Calibri"/>
+              </a:rPr>
+              <a:t>AR</a:t>
+            </a:r>
+          </a:p>
+        </p:txBody>
+      </p:sp>
+      <p:sp>
+        <p:nvSpPr>
+          <p:cNvPr id="13" name="TextBox 12"/>
+          <p:cNvSpPr txBox="1"/>
+          <p:nvPr/>
+        </p:nvSpPr>
+        <p:spPr>
+          <a:xfrm>
+            <a:off x="2496312" y="3566160"/>
+            <a:ext cx="1536192" cy="548640"/>
+          </a:xfrm>
+          <a:prstGeom prst="rect">
+            <a:avLst/>
+          </a:prstGeom>
+          <a:noFill/>
+        </p:spPr>
+        <p:txBody>
+          <a:bodyPr wrap="square" anchor="t" lIns="0" rIns="0" tIns="0" bIns="0">
+            <a:noAutofit/>
+          </a:bodyPr>
+          <a:lstStyle/>
+          <a:p>
+            <a:pPr algn="ctr">
+              <a:lnSpc>
+                <a:spcPct val="95000"/>
+              </a:lnSpc>
+            </a:pPr>
+            <a:r>
+              <a:rPr sz="1450" b="1" i="0">
+                <a:solidFill>
+                  <a:srgbClr val="E6EDF3"/>
+                </a:solidFill>
+                <a:latin typeface="Calibri"/>
+              </a:rPr>
+              <a:t>Architect</a:t>
+            </a:r>
+          </a:p>
+        </p:txBody>
+      </p:sp>
+      <p:sp>
+        <p:nvSpPr>
+          <p:cNvPr id="14" name="Rounded Rectangle 13"/>
+          <p:cNvSpPr/>
+          <p:nvPr/>
+        </p:nvSpPr>
+        <p:spPr>
+          <a:xfrm>
+            <a:off x="2697480" y="4114800"/>
+            <a:ext cx="1133856" cy="329184"/>
+          </a:xfrm>
+          <a:prstGeom prst="roundRect">
+            <a:avLst>
+              <a:gd name="adj" fmla="val 50000"/>
+            </a:avLst>
+          </a:prstGeom>
+          <a:solidFill>
+            <a:srgbClr val="222C38"/>
+          </a:solidFill>
+          <a:ln w="12700">
+            <a:solidFill>
+              <a:srgbClr val="2D3A48"/>
+            </a:solidFill>
+          </a:ln>
+          <a:effectLst/>
+        </p:spPr>
+        <p:style>
+          <a:lnRef idx="1">
+            <a:schemeClr val="accent1"/>
+          </a:lnRef>
+          <a:fillRef idx="3">
+            <a:schemeClr val="accent1"/>
+          </a:fillRef>
+          <a:effectRef idx="2">
+            <a:schemeClr val="accent1"/>
+          </a:effectRef>
+          <a:fontRef idx="minor">
+            <a:schemeClr val="lt1"/>
+          </a:fontRef>
+        </p:style>
+        <p:txBody>
+          <a:bodyPr rtlCol="0" anchor="ctr"/>
+          <a:lstStyle/>
+          <a:p>
+            <a:pPr algn="ctr"/>
+          </a:p>
+        </p:txBody>
+      </p:sp>
+      <p:sp>
+        <p:nvSpPr>
+          <p:cNvPr id="15" name="TextBox 14"/>
+          <p:cNvSpPr txBox="1"/>
+          <p:nvPr/>
+        </p:nvSpPr>
+        <p:spPr>
+          <a:xfrm>
+            <a:off x="2697480" y="4114800"/>
+            <a:ext cx="1133856" cy="329184"/>
+          </a:xfrm>
+          <a:prstGeom prst="rect">
+            <a:avLst/>
+          </a:prstGeom>
+          <a:noFill/>
+        </p:spPr>
+        <p:txBody>
+          <a:bodyPr wrap="square" anchor="ctr" lIns="0" rIns="0" tIns="0" bIns="0">
+            <a:noAutofit/>
+          </a:bodyPr>
+          <a:lstStyle/>
+          <a:p>
+            <a:pPr algn="ctr">
+              <a:lnSpc>
+                <a:spcPct val="100000"/>
+              </a:lnSpc>
+            </a:pPr>
+            <a:r>
+              <a:rPr sz="1100" b="0" i="0">
+                <a:solidFill>
+                  <a:srgbClr val="4F9CF9"/>
+                </a:solidFill>
+                <a:latin typeface="Calibri"/>
+              </a:rPr>
+              <a:t>qwen-plus</a:t>
+            </a:r>
+          </a:p>
+        </p:txBody>
+      </p:sp>
+      <p:sp>
+        <p:nvSpPr>
+          <p:cNvPr id="16" name="TextBox 15"/>
+          <p:cNvSpPr txBox="1"/>
+          <p:nvPr/>
+        </p:nvSpPr>
+        <p:spPr>
+          <a:xfrm>
+            <a:off x="4059936" y="2834640"/>
+            <a:ext cx="310896" cy="457200"/>
+          </a:xfrm>
+          <a:prstGeom prst="rect">
+            <a:avLst/>
+          </a:prstGeom>
+          <a:noFill/>
+        </p:spPr>
+        <p:txBody>
+          <a:bodyPr wrap="square" anchor="t" lIns="0" rIns="0" tIns="0" bIns="0">
+            <a:noAutofit/>
+          </a:bodyPr>
+          <a:lstStyle/>
+          <a:p>
+            <a:pPr algn="ctr">
+              <a:lnSpc>
+                <a:spcPct val="100000"/>
+              </a:lnSpc>
+            </a:pPr>
+            <a:r>
+              <a:rPr sz="2600" b="0" i="0">
+                <a:solidFill>
+                  <a:srgbClr val="8B98A5"/>
+                </a:solidFill>
+                <a:latin typeface="Calibri"/>
+              </a:rPr>
+              <a:t>›</a:t>
+            </a:r>
+          </a:p>
+        </p:txBody>
+      </p:sp>
+      <p:sp>
+        <p:nvSpPr>
+          <p:cNvPr id="17" name="Rounded Rectangle 16"/>
+          <p:cNvSpPr/>
+          <p:nvPr/>
+        </p:nvSpPr>
+        <p:spPr>
+          <a:xfrm>
+            <a:off x="4334256" y="2286000"/>
+            <a:ext cx="1627632" cy="2331720"/>
+          </a:xfrm>
+          <a:prstGeom prst="roundRect">
+            <a:avLst>
+              <a:gd name="adj" fmla="val 8000"/>
+            </a:avLst>
+          </a:prstGeom>
+          <a:solidFill>
+            <a:srgbClr val="1A212B"/>
+          </a:solidFill>
+          <a:ln w="12700">
+            <a:solidFill>
+              <a:srgbClr val="2D3A48"/>
+            </a:solidFill>
+          </a:ln>
+          <a:effectLst/>
+        </p:spPr>
+        <p:style>
+          <a:lnRef idx="1">
+            <a:schemeClr val="accent1"/>
+          </a:lnRef>
+          <a:fillRef idx="3">
+            <a:schemeClr val="accent1"/>
+          </a:fillRef>
+          <a:effectRef idx="2">
+            <a:schemeClr val="accent1"/>
+          </a:effectRef>
+          <a:fontRef idx="minor">
+            <a:schemeClr val="lt1"/>
+          </a:fontRef>
+        </p:style>
+        <p:txBody>
+          <a:bodyPr rtlCol="0" anchor="ctr"/>
+          <a:lstStyle/>
+          <a:p>
+            <a:pPr algn="ctr"/>
+          </a:p>
+        </p:txBody>
+      </p:sp>
+      <p:sp>
+        <p:nvSpPr>
+          <p:cNvPr id="18" name="Oval 17"/>
+          <p:cNvSpPr/>
+          <p:nvPr/>
+        </p:nvSpPr>
+        <p:spPr>
+          <a:xfrm>
+            <a:off x="4764024" y="2606040"/>
+            <a:ext cx="768096" cy="768096"/>
           </a:xfrm>
           <a:prstGeom prst="ellipse">
             <a:avLst/>
@@ -4846,27 +6555,27 @@
           <a:p>
             <a:pPr algn="ctr"/>
             <a:r>
-              <a:rPr sz="1600" b="1">
+              <a:rPr sz="2000" b="1">
                 <a:solidFill>
                   <a:srgbClr val="0F1419"/>
                 </a:solidFill>
                 <a:latin typeface="Calibri"/>
               </a:rPr>
-              <a:t>1</a:t>
-            </a:r>
-          </a:p>
-        </p:txBody>
-      </p:sp>
-      <p:sp>
-        <p:nvSpPr>
-          <p:cNvPr id="8" name="TextBox 7"/>
-          <p:cNvSpPr txBox="1"/>
-          <p:nvPr/>
-        </p:nvSpPr>
-        <p:spPr>
-          <a:xfrm>
-            <a:off x="7013448" y="2340864"/>
-            <a:ext cx="4553712" cy="365760"/>
+              <a:t>DC</a:t>
+            </a:r>
+          </a:p>
+        </p:txBody>
+      </p:sp>
+      <p:sp>
+        <p:nvSpPr>
+          <p:cNvPr id="19" name="TextBox 18"/>
+          <p:cNvSpPr txBox="1"/>
+          <p:nvPr/>
+        </p:nvSpPr>
+        <p:spPr>
+          <a:xfrm>
+            <a:off x="4379976" y="3566160"/>
+            <a:ext cx="1536192" cy="548640"/>
           </a:xfrm>
           <a:prstGeom prst="rect">
             <a:avLst/>
@@ -4879,33 +6588,120 @@
           </a:bodyPr>
           <a:lstStyle/>
           <a:p>
-            <a:pPr algn="l">
+            <a:pPr algn="ctr">
+              <a:lnSpc>
+                <a:spcPct val="95000"/>
+              </a:lnSpc>
+            </a:pPr>
+            <a:r>
+              <a:rPr sz="1450" b="1" i="0">
+                <a:solidFill>
+                  <a:srgbClr val="E6EDF3"/>
+                </a:solidFill>
+                <a:latin typeface="Calibri"/>
+              </a:rPr>
+              <a:t>Design Critic</a:t>
+            </a:r>
+          </a:p>
+        </p:txBody>
+      </p:sp>
+      <p:sp>
+        <p:nvSpPr>
+          <p:cNvPr id="20" name="Rounded Rectangle 19"/>
+          <p:cNvSpPr/>
+          <p:nvPr/>
+        </p:nvSpPr>
+        <p:spPr>
+          <a:xfrm>
+            <a:off x="4581144" y="4114800"/>
+            <a:ext cx="1133856" cy="329184"/>
+          </a:xfrm>
+          <a:prstGeom prst="roundRect">
+            <a:avLst>
+              <a:gd name="adj" fmla="val 50000"/>
+            </a:avLst>
+          </a:prstGeom>
+          <a:solidFill>
+            <a:srgbClr val="222C38"/>
+          </a:solidFill>
+          <a:ln w="12700">
+            <a:solidFill>
+              <a:srgbClr val="2D3A48"/>
+            </a:solidFill>
+          </a:ln>
+          <a:effectLst/>
+        </p:spPr>
+        <p:style>
+          <a:lnRef idx="1">
+            <a:schemeClr val="accent1"/>
+          </a:lnRef>
+          <a:fillRef idx="3">
+            <a:schemeClr val="accent1"/>
+          </a:fillRef>
+          <a:effectRef idx="2">
+            <a:schemeClr val="accent1"/>
+          </a:effectRef>
+          <a:fontRef idx="minor">
+            <a:schemeClr val="lt1"/>
+          </a:fontRef>
+        </p:style>
+        <p:txBody>
+          <a:bodyPr rtlCol="0" anchor="ctr"/>
+          <a:lstStyle/>
+          <a:p>
+            <a:pPr algn="ctr"/>
+          </a:p>
+        </p:txBody>
+      </p:sp>
+      <p:sp>
+        <p:nvSpPr>
+          <p:cNvPr id="21" name="TextBox 20"/>
+          <p:cNvSpPr txBox="1"/>
+          <p:nvPr/>
+        </p:nvSpPr>
+        <p:spPr>
+          <a:xfrm>
+            <a:off x="4581144" y="4114800"/>
+            <a:ext cx="1133856" cy="329184"/>
+          </a:xfrm>
+          <a:prstGeom prst="rect">
+            <a:avLst/>
+          </a:prstGeom>
+          <a:noFill/>
+        </p:spPr>
+        <p:txBody>
+          <a:bodyPr wrap="square" anchor="ctr" lIns="0" rIns="0" tIns="0" bIns="0">
+            <a:noAutofit/>
+          </a:bodyPr>
+          <a:lstStyle/>
+          <a:p>
+            <a:pPr algn="ctr">
               <a:lnSpc>
                 <a:spcPct val="100000"/>
               </a:lnSpc>
             </a:pPr>
             <a:r>
-              <a:rPr sz="1500" b="1" i="0">
+              <a:rPr sz="1100" b="0" i="0">
                 <a:solidFill>
                   <a:srgbClr val="F778BA"/>
                 </a:solidFill>
                 <a:latin typeface="Calibri"/>
               </a:rPr>
-              <a:t>Round 1 — Design Critic</a:t>
-            </a:r>
-          </a:p>
-        </p:txBody>
-      </p:sp>
-      <p:sp>
-        <p:nvSpPr>
-          <p:cNvPr id="9" name="TextBox 8"/>
-          <p:cNvSpPr txBox="1"/>
-          <p:nvPr/>
-        </p:nvSpPr>
-        <p:spPr>
-          <a:xfrm>
-            <a:off x="7013448" y="2688336"/>
-            <a:ext cx="4553712" cy="640080"/>
+              <a:t>qwen-max</a:t>
+            </a:r>
+          </a:p>
+        </p:txBody>
+      </p:sp>
+      <p:sp>
+        <p:nvSpPr>
+          <p:cNvPr id="22" name="TextBox 21"/>
+          <p:cNvSpPr txBox="1"/>
+          <p:nvPr/>
+        </p:nvSpPr>
+        <p:spPr>
+          <a:xfrm>
+            <a:off x="5943600" y="2834640"/>
+            <a:ext cx="310896" cy="457200"/>
           </a:xfrm>
           <a:prstGeom prst="rect">
             <a:avLst/>
@@ -4918,33 +6714,81 @@
           </a:bodyPr>
           <a:lstStyle/>
           <a:p>
-            <a:pPr algn="l">
-              <a:lnSpc>
-                <a:spcPct val="110000"/>
-              </a:lnSpc>
-            </a:pPr>
-            <a:r>
-              <a:rPr sz="1350" b="0" i="0">
-                <a:solidFill>
-                  <a:srgbClr val="E6EDF3"/>
-                </a:solidFill>
-                <a:latin typeface="Calibri"/>
-              </a:rPr>
-              <a:t>Flags a gap: the Architect's 5 blocks miss a Debug / SWD + status-LED block.</a:t>
-            </a:r>
-          </a:p>
-        </p:txBody>
-      </p:sp>
-      <p:sp>
-        <p:nvSpPr>
-          <p:cNvPr id="10" name="Oval 9"/>
+            <a:pPr algn="ctr">
+              <a:lnSpc>
+                <a:spcPct val="100000"/>
+              </a:lnSpc>
+            </a:pPr>
+            <a:r>
+              <a:rPr sz="2600" b="0" i="0">
+                <a:solidFill>
+                  <a:srgbClr val="8B98A5"/>
+                </a:solidFill>
+                <a:latin typeface="Calibri"/>
+              </a:rPr>
+              <a:t>›</a:t>
+            </a:r>
+          </a:p>
+        </p:txBody>
+      </p:sp>
+      <p:sp>
+        <p:nvSpPr>
+          <p:cNvPr id="23" name="Rounded Rectangle 22"/>
           <p:cNvSpPr/>
           <p:nvPr/>
         </p:nvSpPr>
         <p:spPr>
           <a:xfrm>
-            <a:off x="6355080" y="3520440"/>
-            <a:ext cx="457200" cy="457200"/>
+            <a:off x="6217920" y="2286000"/>
+            <a:ext cx="1627632" cy="2331720"/>
+          </a:xfrm>
+          <a:prstGeom prst="roundRect">
+            <a:avLst>
+              <a:gd name="adj" fmla="val 8000"/>
+            </a:avLst>
+          </a:prstGeom>
+          <a:solidFill>
+            <a:srgbClr val="1A212B"/>
+          </a:solidFill>
+          <a:ln w="12700">
+            <a:solidFill>
+              <a:srgbClr val="2D3A48"/>
+            </a:solidFill>
+          </a:ln>
+          <a:effectLst/>
+        </p:spPr>
+        <p:style>
+          <a:lnRef idx="1">
+            <a:schemeClr val="accent1"/>
+          </a:lnRef>
+          <a:fillRef idx="3">
+            <a:schemeClr val="accent1"/>
+          </a:fillRef>
+          <a:effectRef idx="2">
+            <a:schemeClr val="accent1"/>
+          </a:effectRef>
+          <a:fontRef idx="minor">
+            <a:schemeClr val="lt1"/>
+          </a:fontRef>
+        </p:style>
+        <p:txBody>
+          <a:bodyPr rtlCol="0" anchor="ctr"/>
+          <a:lstStyle/>
+          <a:p>
+            <a:pPr algn="ctr"/>
+          </a:p>
+        </p:txBody>
+      </p:sp>
+      <p:sp>
+        <p:nvSpPr>
+          <p:cNvPr id="24" name="Oval 23"/>
+          <p:cNvSpPr/>
+          <p:nvPr/>
+        </p:nvSpPr>
+        <p:spPr>
+          <a:xfrm>
+            <a:off x="6647688" y="2606040"/>
+            <a:ext cx="768096" cy="768096"/>
           </a:xfrm>
           <a:prstGeom prst="ellipse">
             <a:avLst/>
@@ -4977,12 +6821,1271 @@
           <a:p>
             <a:pPr algn="ctr"/>
             <a:r>
+              <a:rPr sz="2000" b="1">
+                <a:solidFill>
+                  <a:srgbClr val="0F1419"/>
+                </a:solidFill>
+                <a:latin typeface="Calibri"/>
+              </a:rPr>
+              <a:t>AB</a:t>
+            </a:r>
+          </a:p>
+        </p:txBody>
+      </p:sp>
+      <p:sp>
+        <p:nvSpPr>
+          <p:cNvPr id="25" name="TextBox 24"/>
+          <p:cNvSpPr txBox="1"/>
+          <p:nvPr/>
+        </p:nvSpPr>
+        <p:spPr>
+          <a:xfrm>
+            <a:off x="6263640" y="3566160"/>
+            <a:ext cx="1536192" cy="548640"/>
+          </a:xfrm>
+          <a:prstGeom prst="rect">
+            <a:avLst/>
+          </a:prstGeom>
+          <a:noFill/>
+        </p:spPr>
+        <p:txBody>
+          <a:bodyPr wrap="square" anchor="t" lIns="0" rIns="0" tIns="0" bIns="0">
+            <a:noAutofit/>
+          </a:bodyPr>
+          <a:lstStyle/>
+          <a:p>
+            <a:pPr algn="ctr">
+              <a:lnSpc>
+                <a:spcPct val="95000"/>
+              </a:lnSpc>
+            </a:pPr>
+            <a:r>
+              <a:rPr sz="1450" b="1" i="0">
+                <a:solidFill>
+                  <a:srgbClr val="E6EDF3"/>
+                </a:solidFill>
+                <a:latin typeface="Calibri"/>
+              </a:rPr>
+              <a:t>Arbitration</a:t>
+            </a:r>
+          </a:p>
+        </p:txBody>
+      </p:sp>
+      <p:sp>
+        <p:nvSpPr>
+          <p:cNvPr id="26" name="Rounded Rectangle 25"/>
+          <p:cNvSpPr/>
+          <p:nvPr/>
+        </p:nvSpPr>
+        <p:spPr>
+          <a:xfrm>
+            <a:off x="6464808" y="4114800"/>
+            <a:ext cx="1133856" cy="329184"/>
+          </a:xfrm>
+          <a:prstGeom prst="roundRect">
+            <a:avLst>
+              <a:gd name="adj" fmla="val 50000"/>
+            </a:avLst>
+          </a:prstGeom>
+          <a:solidFill>
+            <a:srgbClr val="222C38"/>
+          </a:solidFill>
+          <a:ln w="12700">
+            <a:solidFill>
+              <a:srgbClr val="2D3A48"/>
+            </a:solidFill>
+          </a:ln>
+          <a:effectLst/>
+        </p:spPr>
+        <p:style>
+          <a:lnRef idx="1">
+            <a:schemeClr val="accent1"/>
+          </a:lnRef>
+          <a:fillRef idx="3">
+            <a:schemeClr val="accent1"/>
+          </a:fillRef>
+          <a:effectRef idx="2">
+            <a:schemeClr val="accent1"/>
+          </a:effectRef>
+          <a:fontRef idx="minor">
+            <a:schemeClr val="lt1"/>
+          </a:fontRef>
+        </p:style>
+        <p:txBody>
+          <a:bodyPr rtlCol="0" anchor="ctr"/>
+          <a:lstStyle/>
+          <a:p>
+            <a:pPr algn="ctr"/>
+          </a:p>
+        </p:txBody>
+      </p:sp>
+      <p:sp>
+        <p:nvSpPr>
+          <p:cNvPr id="27" name="TextBox 26"/>
+          <p:cNvSpPr txBox="1"/>
+          <p:nvPr/>
+        </p:nvSpPr>
+        <p:spPr>
+          <a:xfrm>
+            <a:off x="6464808" y="4114800"/>
+            <a:ext cx="1133856" cy="329184"/>
+          </a:xfrm>
+          <a:prstGeom prst="rect">
+            <a:avLst/>
+          </a:prstGeom>
+          <a:noFill/>
+        </p:spPr>
+        <p:txBody>
+          <a:bodyPr wrap="square" anchor="ctr" lIns="0" rIns="0" tIns="0" bIns="0">
+            <a:noAutofit/>
+          </a:bodyPr>
+          <a:lstStyle/>
+          <a:p>
+            <a:pPr algn="ctr">
+              <a:lnSpc>
+                <a:spcPct val="100000"/>
+              </a:lnSpc>
+            </a:pPr>
+            <a:r>
+              <a:rPr sz="1100" b="0" i="0">
+                <a:solidFill>
+                  <a:srgbClr val="F778BA"/>
+                </a:solidFill>
+                <a:latin typeface="Calibri"/>
+              </a:rPr>
+              <a:t>qwen-max</a:t>
+            </a:r>
+          </a:p>
+        </p:txBody>
+      </p:sp>
+      <p:sp>
+        <p:nvSpPr>
+          <p:cNvPr id="28" name="TextBox 27"/>
+          <p:cNvSpPr txBox="1"/>
+          <p:nvPr/>
+        </p:nvSpPr>
+        <p:spPr>
+          <a:xfrm>
+            <a:off x="7827264" y="2834640"/>
+            <a:ext cx="310896" cy="457200"/>
+          </a:xfrm>
+          <a:prstGeom prst="rect">
+            <a:avLst/>
+          </a:prstGeom>
+          <a:noFill/>
+        </p:spPr>
+        <p:txBody>
+          <a:bodyPr wrap="square" anchor="t" lIns="0" rIns="0" tIns="0" bIns="0">
+            <a:noAutofit/>
+          </a:bodyPr>
+          <a:lstStyle/>
+          <a:p>
+            <a:pPr algn="ctr">
+              <a:lnSpc>
+                <a:spcPct val="100000"/>
+              </a:lnSpc>
+            </a:pPr>
+            <a:r>
+              <a:rPr sz="2600" b="0" i="0">
+                <a:solidFill>
+                  <a:srgbClr val="8B98A5"/>
+                </a:solidFill>
+                <a:latin typeface="Calibri"/>
+              </a:rPr>
+              <a:t>›</a:t>
+            </a:r>
+          </a:p>
+        </p:txBody>
+      </p:sp>
+      <p:sp>
+        <p:nvSpPr>
+          <p:cNvPr id="29" name="Rounded Rectangle 28"/>
+          <p:cNvSpPr/>
+          <p:nvPr/>
+        </p:nvSpPr>
+        <p:spPr>
+          <a:xfrm>
+            <a:off x="8101583" y="2286000"/>
+            <a:ext cx="1627632" cy="2331720"/>
+          </a:xfrm>
+          <a:prstGeom prst="roundRect">
+            <a:avLst>
+              <a:gd name="adj" fmla="val 8000"/>
+            </a:avLst>
+          </a:prstGeom>
+          <a:solidFill>
+            <a:srgbClr val="1A212B"/>
+          </a:solidFill>
+          <a:ln w="12700">
+            <a:solidFill>
+              <a:srgbClr val="2D3A48"/>
+            </a:solidFill>
+          </a:ln>
+          <a:effectLst/>
+        </p:spPr>
+        <p:style>
+          <a:lnRef idx="1">
+            <a:schemeClr val="accent1"/>
+          </a:lnRef>
+          <a:fillRef idx="3">
+            <a:schemeClr val="accent1"/>
+          </a:fillRef>
+          <a:effectRef idx="2">
+            <a:schemeClr val="accent1"/>
+          </a:effectRef>
+          <a:fontRef idx="minor">
+            <a:schemeClr val="lt1"/>
+          </a:fontRef>
+        </p:style>
+        <p:txBody>
+          <a:bodyPr rtlCol="0" anchor="ctr"/>
+          <a:lstStyle/>
+          <a:p>
+            <a:pPr algn="ctr"/>
+          </a:p>
+        </p:txBody>
+      </p:sp>
+      <p:sp>
+        <p:nvSpPr>
+          <p:cNvPr id="30" name="Oval 29"/>
+          <p:cNvSpPr/>
+          <p:nvPr/>
+        </p:nvSpPr>
+        <p:spPr>
+          <a:xfrm>
+            <a:off x="8531351" y="2606040"/>
+            <a:ext cx="768096" cy="768096"/>
+          </a:xfrm>
+          <a:prstGeom prst="ellipse">
+            <a:avLst/>
+          </a:prstGeom>
+          <a:solidFill>
+            <a:srgbClr val="0D9488"/>
+          </a:solidFill>
+          <a:ln>
+            <a:noFill/>
+          </a:ln>
+          <a:effectLst/>
+        </p:spPr>
+        <p:style>
+          <a:lnRef idx="1">
+            <a:schemeClr val="accent1"/>
+          </a:lnRef>
+          <a:fillRef idx="3">
+            <a:schemeClr val="accent1"/>
+          </a:fillRef>
+          <a:effectRef idx="2">
+            <a:schemeClr val="accent1"/>
+          </a:effectRef>
+          <a:fontRef idx="minor">
+            <a:schemeClr val="lt1"/>
+          </a:fontRef>
+        </p:style>
+        <p:txBody>
+          <a:bodyPr rtlCol="0" anchor="ctr" wrap="none" lIns="0" rIns="0" tIns="0" bIns="0"/>
+          <a:lstStyle/>
+          <a:p>
+            <a:pPr algn="ctr"/>
+            <a:r>
+              <a:rPr sz="2000" b="1">
+                <a:solidFill>
+                  <a:srgbClr val="0F1419"/>
+                </a:solidFill>
+                <a:latin typeface="Calibri"/>
+              </a:rPr>
+              <a:t>PE</a:t>
+            </a:r>
+          </a:p>
+        </p:txBody>
+      </p:sp>
+      <p:sp>
+        <p:nvSpPr>
+          <p:cNvPr id="31" name="TextBox 30"/>
+          <p:cNvSpPr txBox="1"/>
+          <p:nvPr/>
+        </p:nvSpPr>
+        <p:spPr>
+          <a:xfrm>
+            <a:off x="8147303" y="3566160"/>
+            <a:ext cx="1536192" cy="548640"/>
+          </a:xfrm>
+          <a:prstGeom prst="rect">
+            <a:avLst/>
+          </a:prstGeom>
+          <a:noFill/>
+        </p:spPr>
+        <p:txBody>
+          <a:bodyPr wrap="square" anchor="t" lIns="0" rIns="0" tIns="0" bIns="0">
+            <a:noAutofit/>
+          </a:bodyPr>
+          <a:lstStyle/>
+          <a:p>
+            <a:pPr algn="ctr">
+              <a:lnSpc>
+                <a:spcPct val="95000"/>
+              </a:lnSpc>
+            </a:pPr>
+            <a:r>
+              <a:rPr sz="1450" b="1" i="0">
+                <a:solidFill>
+                  <a:srgbClr val="E6EDF3"/>
+                </a:solidFill>
+                <a:latin typeface="Calibri"/>
+              </a:rPr>
+              <a:t>PCB Engineer</a:t>
+            </a:r>
+          </a:p>
+        </p:txBody>
+      </p:sp>
+      <p:sp>
+        <p:nvSpPr>
+          <p:cNvPr id="32" name="Rounded Rectangle 31"/>
+          <p:cNvSpPr/>
+          <p:nvPr/>
+        </p:nvSpPr>
+        <p:spPr>
+          <a:xfrm>
+            <a:off x="8348471" y="4114800"/>
+            <a:ext cx="1133856" cy="329184"/>
+          </a:xfrm>
+          <a:prstGeom prst="roundRect">
+            <a:avLst>
+              <a:gd name="adj" fmla="val 50000"/>
+            </a:avLst>
+          </a:prstGeom>
+          <a:solidFill>
+            <a:srgbClr val="222C38"/>
+          </a:solidFill>
+          <a:ln w="12700">
+            <a:solidFill>
+              <a:srgbClr val="2D3A48"/>
+            </a:solidFill>
+          </a:ln>
+          <a:effectLst/>
+        </p:spPr>
+        <p:style>
+          <a:lnRef idx="1">
+            <a:schemeClr val="accent1"/>
+          </a:lnRef>
+          <a:fillRef idx="3">
+            <a:schemeClr val="accent1"/>
+          </a:fillRef>
+          <a:effectRef idx="2">
+            <a:schemeClr val="accent1"/>
+          </a:effectRef>
+          <a:fontRef idx="minor">
+            <a:schemeClr val="lt1"/>
+          </a:fontRef>
+        </p:style>
+        <p:txBody>
+          <a:bodyPr rtlCol="0" anchor="ctr"/>
+          <a:lstStyle/>
+          <a:p>
+            <a:pPr algn="ctr"/>
+          </a:p>
+        </p:txBody>
+      </p:sp>
+      <p:sp>
+        <p:nvSpPr>
+          <p:cNvPr id="33" name="TextBox 32"/>
+          <p:cNvSpPr txBox="1"/>
+          <p:nvPr/>
+        </p:nvSpPr>
+        <p:spPr>
+          <a:xfrm>
+            <a:off x="8348471" y="4114800"/>
+            <a:ext cx="1133856" cy="329184"/>
+          </a:xfrm>
+          <a:prstGeom prst="rect">
+            <a:avLst/>
+          </a:prstGeom>
+          <a:noFill/>
+        </p:spPr>
+        <p:txBody>
+          <a:bodyPr wrap="square" anchor="ctr" lIns="0" rIns="0" tIns="0" bIns="0">
+            <a:noAutofit/>
+          </a:bodyPr>
+          <a:lstStyle/>
+          <a:p>
+            <a:pPr algn="ctr">
+              <a:lnSpc>
+                <a:spcPct val="100000"/>
+              </a:lnSpc>
+            </a:pPr>
+            <a:r>
+              <a:rPr sz="1100" b="0" i="0">
+                <a:solidFill>
+                  <a:srgbClr val="4F9CF9"/>
+                </a:solidFill>
+                <a:latin typeface="Calibri"/>
+              </a:rPr>
+              <a:t>qwen-plus</a:t>
+            </a:r>
+          </a:p>
+        </p:txBody>
+      </p:sp>
+      <p:sp>
+        <p:nvSpPr>
+          <p:cNvPr id="34" name="TextBox 33"/>
+          <p:cNvSpPr txBox="1"/>
+          <p:nvPr/>
+        </p:nvSpPr>
+        <p:spPr>
+          <a:xfrm>
+            <a:off x="9710927" y="2834640"/>
+            <a:ext cx="310896" cy="457200"/>
+          </a:xfrm>
+          <a:prstGeom prst="rect">
+            <a:avLst/>
+          </a:prstGeom>
+          <a:noFill/>
+        </p:spPr>
+        <p:txBody>
+          <a:bodyPr wrap="square" anchor="t" lIns="0" rIns="0" tIns="0" bIns="0">
+            <a:noAutofit/>
+          </a:bodyPr>
+          <a:lstStyle/>
+          <a:p>
+            <a:pPr algn="ctr">
+              <a:lnSpc>
+                <a:spcPct val="100000"/>
+              </a:lnSpc>
+            </a:pPr>
+            <a:r>
+              <a:rPr sz="2600" b="0" i="0">
+                <a:solidFill>
+                  <a:srgbClr val="8B98A5"/>
+                </a:solidFill>
+                <a:latin typeface="Calibri"/>
+              </a:rPr>
+              <a:t>›</a:t>
+            </a:r>
+          </a:p>
+        </p:txBody>
+      </p:sp>
+      <p:sp>
+        <p:nvSpPr>
+          <p:cNvPr id="35" name="Rounded Rectangle 34"/>
+          <p:cNvSpPr/>
+          <p:nvPr/>
+        </p:nvSpPr>
+        <p:spPr>
+          <a:xfrm>
+            <a:off x="9985248" y="2286000"/>
+            <a:ext cx="1627632" cy="2331720"/>
+          </a:xfrm>
+          <a:prstGeom prst="roundRect">
+            <a:avLst>
+              <a:gd name="adj" fmla="val 8000"/>
+            </a:avLst>
+          </a:prstGeom>
+          <a:solidFill>
+            <a:srgbClr val="1A212B"/>
+          </a:solidFill>
+          <a:ln w="12700">
+            <a:solidFill>
+              <a:srgbClr val="2D3A48"/>
+            </a:solidFill>
+          </a:ln>
+          <a:effectLst/>
+        </p:spPr>
+        <p:style>
+          <a:lnRef idx="1">
+            <a:schemeClr val="accent1"/>
+          </a:lnRef>
+          <a:fillRef idx="3">
+            <a:schemeClr val="accent1"/>
+          </a:fillRef>
+          <a:effectRef idx="2">
+            <a:schemeClr val="accent1"/>
+          </a:effectRef>
+          <a:fontRef idx="minor">
+            <a:schemeClr val="lt1"/>
+          </a:fontRef>
+        </p:style>
+        <p:txBody>
+          <a:bodyPr rtlCol="0" anchor="ctr"/>
+          <a:lstStyle/>
+          <a:p>
+            <a:pPr algn="ctr"/>
+          </a:p>
+        </p:txBody>
+      </p:sp>
+      <p:sp>
+        <p:nvSpPr>
+          <p:cNvPr id="36" name="Oval 35"/>
+          <p:cNvSpPr/>
+          <p:nvPr/>
+        </p:nvSpPr>
+        <p:spPr>
+          <a:xfrm>
+            <a:off x="10415016" y="2606040"/>
+            <a:ext cx="768096" cy="768096"/>
+          </a:xfrm>
+          <a:prstGeom prst="ellipse">
+            <a:avLst/>
+          </a:prstGeom>
+          <a:solidFill>
+            <a:srgbClr val="F778BA"/>
+          </a:solidFill>
+          <a:ln>
+            <a:noFill/>
+          </a:ln>
+          <a:effectLst/>
+        </p:spPr>
+        <p:style>
+          <a:lnRef idx="1">
+            <a:schemeClr val="accent1"/>
+          </a:lnRef>
+          <a:fillRef idx="3">
+            <a:schemeClr val="accent1"/>
+          </a:fillRef>
+          <a:effectRef idx="2">
+            <a:schemeClr val="accent1"/>
+          </a:effectRef>
+          <a:fontRef idx="minor">
+            <a:schemeClr val="lt1"/>
+          </a:fontRef>
+        </p:style>
+        <p:txBody>
+          <a:bodyPr rtlCol="0" anchor="ctr" wrap="none" lIns="0" rIns="0" tIns="0" bIns="0"/>
+          <a:lstStyle/>
+          <a:p>
+            <a:pPr algn="ctr"/>
+            <a:r>
+              <a:rPr sz="2000" b="1">
+                <a:solidFill>
+                  <a:srgbClr val="0F1419"/>
+                </a:solidFill>
+                <a:latin typeface="Calibri"/>
+              </a:rPr>
+              <a:t>PC</a:t>
+            </a:r>
+          </a:p>
+        </p:txBody>
+      </p:sp>
+      <p:sp>
+        <p:nvSpPr>
+          <p:cNvPr id="37" name="TextBox 36"/>
+          <p:cNvSpPr txBox="1"/>
+          <p:nvPr/>
+        </p:nvSpPr>
+        <p:spPr>
+          <a:xfrm>
+            <a:off x="10030968" y="3566160"/>
+            <a:ext cx="1536192" cy="548640"/>
+          </a:xfrm>
+          <a:prstGeom prst="rect">
+            <a:avLst/>
+          </a:prstGeom>
+          <a:noFill/>
+        </p:spPr>
+        <p:txBody>
+          <a:bodyPr wrap="square" anchor="t" lIns="0" rIns="0" tIns="0" bIns="0">
+            <a:noAutofit/>
+          </a:bodyPr>
+          <a:lstStyle/>
+          <a:p>
+            <a:pPr algn="ctr">
+              <a:lnSpc>
+                <a:spcPct val="95000"/>
+              </a:lnSpc>
+            </a:pPr>
+            <a:r>
+              <a:rPr sz="1450" b="1" i="0">
+                <a:solidFill>
+                  <a:srgbClr val="E6EDF3"/>
+                </a:solidFill>
+                <a:latin typeface="Calibri"/>
+              </a:rPr>
+              <a:t>PCB Critic</a:t>
+            </a:r>
+          </a:p>
+        </p:txBody>
+      </p:sp>
+      <p:sp>
+        <p:nvSpPr>
+          <p:cNvPr id="38" name="Rounded Rectangle 37"/>
+          <p:cNvSpPr/>
+          <p:nvPr/>
+        </p:nvSpPr>
+        <p:spPr>
+          <a:xfrm>
+            <a:off x="10232136" y="4114800"/>
+            <a:ext cx="1133856" cy="329184"/>
+          </a:xfrm>
+          <a:prstGeom prst="roundRect">
+            <a:avLst>
+              <a:gd name="adj" fmla="val 50000"/>
+            </a:avLst>
+          </a:prstGeom>
+          <a:solidFill>
+            <a:srgbClr val="222C38"/>
+          </a:solidFill>
+          <a:ln w="12700">
+            <a:solidFill>
+              <a:srgbClr val="2D3A48"/>
+            </a:solidFill>
+          </a:ln>
+          <a:effectLst/>
+        </p:spPr>
+        <p:style>
+          <a:lnRef idx="1">
+            <a:schemeClr val="accent1"/>
+          </a:lnRef>
+          <a:fillRef idx="3">
+            <a:schemeClr val="accent1"/>
+          </a:fillRef>
+          <a:effectRef idx="2">
+            <a:schemeClr val="accent1"/>
+          </a:effectRef>
+          <a:fontRef idx="minor">
+            <a:schemeClr val="lt1"/>
+          </a:fontRef>
+        </p:style>
+        <p:txBody>
+          <a:bodyPr rtlCol="0" anchor="ctr"/>
+          <a:lstStyle/>
+          <a:p>
+            <a:pPr algn="ctr"/>
+          </a:p>
+        </p:txBody>
+      </p:sp>
+      <p:sp>
+        <p:nvSpPr>
+          <p:cNvPr id="39" name="TextBox 38"/>
+          <p:cNvSpPr txBox="1"/>
+          <p:nvPr/>
+        </p:nvSpPr>
+        <p:spPr>
+          <a:xfrm>
+            <a:off x="10232136" y="4114800"/>
+            <a:ext cx="1133856" cy="329184"/>
+          </a:xfrm>
+          <a:prstGeom prst="rect">
+            <a:avLst/>
+          </a:prstGeom>
+          <a:noFill/>
+        </p:spPr>
+        <p:txBody>
+          <a:bodyPr wrap="square" anchor="ctr" lIns="0" rIns="0" tIns="0" bIns="0">
+            <a:noAutofit/>
+          </a:bodyPr>
+          <a:lstStyle/>
+          <a:p>
+            <a:pPr algn="ctr">
+              <a:lnSpc>
+                <a:spcPct val="100000"/>
+              </a:lnSpc>
+            </a:pPr>
+            <a:r>
+              <a:rPr sz="1100" b="0" i="0">
+                <a:solidFill>
+                  <a:srgbClr val="F778BA"/>
+                </a:solidFill>
+                <a:latin typeface="Calibri"/>
+              </a:rPr>
+              <a:t>qwen-max</a:t>
+            </a:r>
+          </a:p>
+        </p:txBody>
+      </p:sp>
+      <p:sp>
+        <p:nvSpPr>
+          <p:cNvPr id="40" name="TextBox 39"/>
+          <p:cNvSpPr txBox="1"/>
+          <p:nvPr/>
+        </p:nvSpPr>
+        <p:spPr>
+          <a:xfrm>
+            <a:off x="640080" y="5074920"/>
+            <a:ext cx="10881360" cy="548640"/>
+          </a:xfrm>
+          <a:prstGeom prst="rect">
+            <a:avLst/>
+          </a:prstGeom>
+          <a:noFill/>
+        </p:spPr>
+        <p:txBody>
+          <a:bodyPr wrap="square" anchor="t" lIns="0" rIns="0" tIns="0" bIns="0">
+            <a:noAutofit/>
+          </a:bodyPr>
+          <a:lstStyle/>
+          <a:p>
+            <a:pPr algn="l">
+              <a:lnSpc>
+                <a:spcPct val="100000"/>
+              </a:lnSpc>
+            </a:pPr>
+            <a:r>
+              <a:rPr sz="1500" b="0" i="0">
+                <a:solidFill>
+                  <a:srgbClr val="8B98A5"/>
+                </a:solidFill>
+                <a:latin typeface="Calibri"/>
+              </a:rPr>
+              <a:t>Juniors (qwen-plus) propose; </a:t>
+            </a:r>
+            <a:r>
+              <a:rPr sz="1500" b="1" i="0">
+                <a:solidFill>
+                  <a:srgbClr val="E6EDF3"/>
+                </a:solidFill>
+                <a:latin typeface="Calibri"/>
+              </a:rPr>
+              <a:t>senior reviewers (qwen-max) hold them to account — and demand rework.</a:t>
+            </a:r>
+          </a:p>
+        </p:txBody>
+      </p:sp>
+      <p:sp>
+        <p:nvSpPr>
+          <p:cNvPr id="41" name="TextBox 40"/>
+          <p:cNvSpPr txBox="1"/>
+          <p:nvPr/>
+        </p:nvSpPr>
+        <p:spPr>
+          <a:xfrm>
+            <a:off x="640080" y="5669280"/>
+            <a:ext cx="10881360" cy="457200"/>
+          </a:xfrm>
+          <a:prstGeom prst="rect">
+            <a:avLst/>
+          </a:prstGeom>
+          <a:noFill/>
+        </p:spPr>
+        <p:txBody>
+          <a:bodyPr wrap="square" anchor="t" lIns="0" rIns="0" tIns="0" bIns="0">
+            <a:noAutofit/>
+          </a:bodyPr>
+          <a:lstStyle/>
+          <a:p>
+            <a:pPr algn="l">
+              <a:lnSpc>
+                <a:spcPct val="100000"/>
+              </a:lnSpc>
+            </a:pPr>
+            <a:r>
+              <a:rPr sz="1300" b="0" i="1">
+                <a:solidFill>
+                  <a:srgbClr val="8B98A5"/>
+                </a:solidFill>
+                <a:latin typeface="Calibri"/>
+              </a:rPr>
+              <a:t>A stateless orchestrator coordinates them; you can run it one-click or sign off each stage.</a:t>
+            </a:r>
+          </a:p>
+        </p:txBody>
+      </p:sp>
+      <p:sp>
+        <p:nvSpPr>
+          <p:cNvPr id="42" name="TextBox 41"/>
+          <p:cNvSpPr txBox="1"/>
+          <p:nvPr/>
+        </p:nvSpPr>
+        <p:spPr>
+          <a:xfrm>
+            <a:off x="640080" y="6437376"/>
+            <a:ext cx="4572000" cy="274320"/>
+          </a:xfrm>
+          <a:prstGeom prst="rect">
+            <a:avLst/>
+          </a:prstGeom>
+          <a:noFill/>
+        </p:spPr>
+        <p:txBody>
+          <a:bodyPr wrap="square" anchor="t" lIns="0" rIns="0" tIns="0" bIns="0">
+            <a:noAutofit/>
+          </a:bodyPr>
+          <a:lstStyle/>
+          <a:p>
+            <a:pPr algn="l">
+              <a:lnSpc>
+                <a:spcPct val="100000"/>
+              </a:lnSpc>
+            </a:pPr>
+            <a:r>
+              <a:rPr sz="1000" b="0" i="0">
+                <a:solidFill>
+                  <a:srgbClr val="8B98A5"/>
+                </a:solidFill>
+                <a:latin typeface="Calibri"/>
+              </a:rPr>
+              <a:t>AI Circuit Architect</a:t>
+            </a:r>
+          </a:p>
+        </p:txBody>
+      </p:sp>
+      <p:sp>
+        <p:nvSpPr>
+          <p:cNvPr id="43" name="TextBox 42"/>
+          <p:cNvSpPr txBox="1"/>
+          <p:nvPr/>
+        </p:nvSpPr>
+        <p:spPr>
+          <a:xfrm>
+            <a:off x="10607040" y="6437376"/>
+            <a:ext cx="1097280" cy="274320"/>
+          </a:xfrm>
+          <a:prstGeom prst="rect">
+            <a:avLst/>
+          </a:prstGeom>
+          <a:noFill/>
+        </p:spPr>
+        <p:txBody>
+          <a:bodyPr wrap="square" anchor="t" lIns="0" rIns="0" tIns="0" bIns="0">
+            <a:noAutofit/>
+          </a:bodyPr>
+          <a:lstStyle/>
+          <a:p>
+            <a:pPr algn="r">
+              <a:lnSpc>
+                <a:spcPct val="100000"/>
+              </a:lnSpc>
+            </a:pPr>
+            <a:r>
+              <a:rPr sz="1000" b="0" i="0">
+                <a:solidFill>
+                  <a:srgbClr val="8B98A5"/>
+                </a:solidFill>
+                <a:latin typeface="Calibri"/>
+              </a:rPr>
+              <a:t>4 / 9</a:t>
+            </a:r>
+          </a:p>
+        </p:txBody>
+      </p:sp>
+    </p:spTree>
+  </p:cSld>
+  <p:clrMapOvr>
+    <a:masterClrMapping/>
+  </p:clrMapOvr>
+</p:sld>
+</file>
+
+<file path=ppt/slides/slide5.xml><?xml version="1.0" encoding="utf-8"?>
+<p:sld xmlns:a="http://schemas.openxmlformats.org/drawingml/2006/main" xmlns:p="http://schemas.openxmlformats.org/presentationml/2006/main" xmlns:r="http://schemas.openxmlformats.org/officeDocument/2006/relationships">
+  <p:cSld>
+    <p:spTree>
+      <p:nvGrpSpPr>
+        <p:cNvPr id="1" name=""/>
+        <p:cNvGrpSpPr/>
+        <p:nvPr/>
+      </p:nvGrpSpPr>
+      <p:grpSpPr/>
+      <p:sp>
+        <p:nvSpPr>
+          <p:cNvPr id="2" name="Rectangle 1"/>
+          <p:cNvSpPr/>
+          <p:nvPr/>
+        </p:nvSpPr>
+        <p:spPr>
+          <a:xfrm>
+            <a:off x="0" y="0"/>
+            <a:ext cx="12191695" cy="6858000"/>
+          </a:xfrm>
+          <a:prstGeom prst="rect">
+            <a:avLst/>
+          </a:prstGeom>
+          <a:solidFill>
+            <a:srgbClr val="0F1419"/>
+          </a:solidFill>
+          <a:ln>
+            <a:noFill/>
+          </a:ln>
+          <a:effectLst/>
+        </p:spPr>
+        <p:style>
+          <a:lnRef idx="1">
+            <a:schemeClr val="accent1"/>
+          </a:lnRef>
+          <a:fillRef idx="3">
+            <a:schemeClr val="accent1"/>
+          </a:fillRef>
+          <a:effectRef idx="2">
+            <a:schemeClr val="accent1"/>
+          </a:effectRef>
+          <a:fontRef idx="minor">
+            <a:schemeClr val="lt1"/>
+          </a:fontRef>
+        </p:style>
+        <p:txBody>
+          <a:bodyPr rtlCol="0" anchor="ctr"/>
+          <a:lstStyle/>
+          <a:p>
+            <a:pPr algn="ctr"/>
+          </a:p>
+        </p:txBody>
+      </p:sp>
+      <p:sp>
+        <p:nvSpPr>
+          <p:cNvPr id="3" name="TextBox 2"/>
+          <p:cNvSpPr txBox="1"/>
+          <p:nvPr/>
+        </p:nvSpPr>
+        <p:spPr>
+          <a:xfrm>
+            <a:off x="640080" y="502920"/>
+            <a:ext cx="10881360" cy="914400"/>
+          </a:xfrm>
+          <a:prstGeom prst="rect">
+            <a:avLst/>
+          </a:prstGeom>
+          <a:noFill/>
+        </p:spPr>
+        <p:txBody>
+          <a:bodyPr wrap="square" anchor="t" lIns="0" rIns="0" tIns="0" bIns="0">
+            <a:noAutofit/>
+          </a:bodyPr>
+          <a:lstStyle/>
+          <a:p>
+            <a:pPr algn="l">
+              <a:lnSpc>
+                <a:spcPct val="100000"/>
+              </a:lnSpc>
+            </a:pPr>
+            <a:r>
+              <a:rPr sz="3400" b="1" i="0">
+                <a:solidFill>
+                  <a:srgbClr val="E6EDF3"/>
+                </a:solidFill>
+                <a:latin typeface="Calibri"/>
+              </a:rPr>
+              <a:t>When agents disagree, the design gets better</a:t>
+            </a:r>
+          </a:p>
+        </p:txBody>
+      </p:sp>
+      <p:sp>
+        <p:nvSpPr>
+          <p:cNvPr id="4" name="Rounded Rectangle 3"/>
+          <p:cNvSpPr/>
+          <p:nvPr/>
+        </p:nvSpPr>
+        <p:spPr>
+          <a:xfrm>
+            <a:off x="566928" y="2075688"/>
+            <a:ext cx="5632704" cy="2194998"/>
+          </a:xfrm>
+          <a:prstGeom prst="roundRect">
+            <a:avLst>
+              <a:gd name="adj" fmla="val 8000"/>
+            </a:avLst>
+          </a:prstGeom>
+          <a:solidFill>
+            <a:srgbClr val="222C38"/>
+          </a:solidFill>
+          <a:ln w="12700">
+            <a:solidFill>
+              <a:srgbClr val="2D3A48"/>
+            </a:solidFill>
+          </a:ln>
+          <a:effectLst/>
+        </p:spPr>
+        <p:style>
+          <a:lnRef idx="1">
+            <a:schemeClr val="accent1"/>
+          </a:lnRef>
+          <a:fillRef idx="3">
+            <a:schemeClr val="accent1"/>
+          </a:fillRef>
+          <a:effectRef idx="2">
+            <a:schemeClr val="accent1"/>
+          </a:effectRef>
+          <a:fontRef idx="minor">
+            <a:schemeClr val="lt1"/>
+          </a:fontRef>
+        </p:style>
+        <p:txBody>
+          <a:bodyPr rtlCol="0" anchor="ctr"/>
+          <a:lstStyle/>
+          <a:p>
+            <a:pPr algn="ctr"/>
+          </a:p>
+        </p:txBody>
+      </p:sp>
+      <p:pic>
+        <p:nvPicPr>
+          <p:cNvPr id="5" name="Picture 4" descr="society_rework.png"/>
+          <p:cNvPicPr>
+            <a:picLocks noChangeAspect="1"/>
+          </p:cNvPicPr>
+          <p:nvPr/>
+        </p:nvPicPr>
+        <p:blipFill>
+          <a:blip r:embed="rId2"/>
+          <a:srcRect t="6000" b="70000"/>
+          <a:stretch>
+            <a:fillRect/>
+          </a:stretch>
+        </p:blipFill>
+        <p:spPr>
+          <a:xfrm>
+            <a:off x="640080" y="2148840"/>
+            <a:ext cx="5486400" cy="2048694"/>
+          </a:xfrm>
+          <a:prstGeom prst="rect">
+            <a:avLst/>
+          </a:prstGeom>
+        </p:spPr>
+      </p:pic>
+      <p:sp>
+        <p:nvSpPr>
+          <p:cNvPr id="6" name="TextBox 5"/>
+          <p:cNvSpPr txBox="1"/>
+          <p:nvPr/>
+        </p:nvSpPr>
+        <p:spPr>
+          <a:xfrm>
+            <a:off x="704088" y="4398702"/>
+            <a:ext cx="5486400" cy="365760"/>
+          </a:xfrm>
+          <a:prstGeom prst="rect">
+            <a:avLst/>
+          </a:prstGeom>
+          <a:noFill/>
+        </p:spPr>
+        <p:txBody>
+          <a:bodyPr wrap="square" anchor="t" lIns="0" rIns="0" tIns="0" bIns="0">
+            <a:noAutofit/>
+          </a:bodyPr>
+          <a:lstStyle/>
+          <a:p>
+            <a:pPr algn="l">
+              <a:lnSpc>
+                <a:spcPct val="100000"/>
+              </a:lnSpc>
+            </a:pPr>
+            <a:r>
+              <a:rPr sz="1200" b="0" i="1">
+                <a:solidFill>
+                  <a:srgbClr val="8B98A5"/>
+                </a:solidFill>
+                <a:latin typeface="Calibri"/>
+              </a:rPr>
+              <a:t>Live Agent-Society view  ·  the Critic → Architect rework round</a:t>
+            </a:r>
+          </a:p>
+        </p:txBody>
+      </p:sp>
+      <p:sp>
+        <p:nvSpPr>
+          <p:cNvPr id="7" name="TextBox 6"/>
+          <p:cNvSpPr txBox="1"/>
+          <p:nvPr/>
+        </p:nvSpPr>
+        <p:spPr>
+          <a:xfrm>
+            <a:off x="6355080" y="1463040"/>
+            <a:ext cx="5212080" cy="640080"/>
+          </a:xfrm>
+          <a:prstGeom prst="rect">
+            <a:avLst/>
+          </a:prstGeom>
+          <a:noFill/>
+        </p:spPr>
+        <p:txBody>
+          <a:bodyPr wrap="square" anchor="t" lIns="0" rIns="0" tIns="0" bIns="0">
+            <a:noAutofit/>
+          </a:bodyPr>
+          <a:lstStyle/>
+          <a:p>
+            <a:pPr algn="l">
+              <a:lnSpc>
+                <a:spcPct val="115000"/>
+              </a:lnSpc>
+            </a:pPr>
+            <a:r>
+              <a:rPr sz="1600" b="0" i="0">
+                <a:solidFill>
+                  <a:srgbClr val="8B98A5"/>
+                </a:solidFill>
+                <a:latin typeface="Calibri"/>
+              </a:rPr>
+              <a:t>Our system is not a pipeline. The Critic challenges the Architect, who reworks — live, in rounds.</a:t>
+            </a:r>
+          </a:p>
+        </p:txBody>
+      </p:sp>
+      <p:sp>
+        <p:nvSpPr>
+          <p:cNvPr id="8" name="Oval 7"/>
+          <p:cNvSpPr/>
+          <p:nvPr/>
+        </p:nvSpPr>
+        <p:spPr>
+          <a:xfrm>
+            <a:off x="6355080" y="2377440"/>
+            <a:ext cx="457200" cy="457200"/>
+          </a:xfrm>
+          <a:prstGeom prst="ellipse">
+            <a:avLst/>
+          </a:prstGeom>
+          <a:solidFill>
+            <a:srgbClr val="F778BA"/>
+          </a:solidFill>
+          <a:ln>
+            <a:noFill/>
+          </a:ln>
+          <a:effectLst/>
+        </p:spPr>
+        <p:style>
+          <a:lnRef idx="1">
+            <a:schemeClr val="accent1"/>
+          </a:lnRef>
+          <a:fillRef idx="3">
+            <a:schemeClr val="accent1"/>
+          </a:fillRef>
+          <a:effectRef idx="2">
+            <a:schemeClr val="accent1"/>
+          </a:effectRef>
+          <a:fontRef idx="minor">
+            <a:schemeClr val="lt1"/>
+          </a:fontRef>
+        </p:style>
+        <p:txBody>
+          <a:bodyPr rtlCol="0" anchor="ctr" wrap="none" lIns="0" rIns="0" tIns="0" bIns="0"/>
+          <a:lstStyle/>
+          <a:p>
+            <a:pPr algn="ctr"/>
+            <a:r>
               <a:rPr sz="1600" b="1">
                 <a:solidFill>
                   <a:srgbClr val="0F1419"/>
                 </a:solidFill>
                 <a:latin typeface="Calibri"/>
               </a:rPr>
+              <a:t>1</a:t>
+            </a:r>
+          </a:p>
+        </p:txBody>
+      </p:sp>
+      <p:sp>
+        <p:nvSpPr>
+          <p:cNvPr id="9" name="TextBox 8"/>
+          <p:cNvSpPr txBox="1"/>
+          <p:nvPr/>
+        </p:nvSpPr>
+        <p:spPr>
+          <a:xfrm>
+            <a:off x="7013448" y="2340864"/>
+            <a:ext cx="4553712" cy="365760"/>
+          </a:xfrm>
+          <a:prstGeom prst="rect">
+            <a:avLst/>
+          </a:prstGeom>
+          <a:noFill/>
+        </p:spPr>
+        <p:txBody>
+          <a:bodyPr wrap="square" anchor="t" lIns="0" rIns="0" tIns="0" bIns="0">
+            <a:noAutofit/>
+          </a:bodyPr>
+          <a:lstStyle/>
+          <a:p>
+            <a:pPr algn="l">
+              <a:lnSpc>
+                <a:spcPct val="100000"/>
+              </a:lnSpc>
+            </a:pPr>
+            <a:r>
+              <a:rPr sz="1500" b="1" i="0">
+                <a:solidFill>
+                  <a:srgbClr val="F778BA"/>
+                </a:solidFill>
+                <a:latin typeface="Calibri"/>
+              </a:rPr>
+              <a:t>Round 1 — Design Critic</a:t>
+            </a:r>
+          </a:p>
+        </p:txBody>
+      </p:sp>
+      <p:sp>
+        <p:nvSpPr>
+          <p:cNvPr id="10" name="TextBox 9"/>
+          <p:cNvSpPr txBox="1"/>
+          <p:nvPr/>
+        </p:nvSpPr>
+        <p:spPr>
+          <a:xfrm>
+            <a:off x="7013448" y="2688336"/>
+            <a:ext cx="4553712" cy="640080"/>
+          </a:xfrm>
+          <a:prstGeom prst="rect">
+            <a:avLst/>
+          </a:prstGeom>
+          <a:noFill/>
+        </p:spPr>
+        <p:txBody>
+          <a:bodyPr wrap="square" anchor="t" lIns="0" rIns="0" tIns="0" bIns="0">
+            <a:noAutofit/>
+          </a:bodyPr>
+          <a:lstStyle/>
+          <a:p>
+            <a:pPr algn="l">
+              <a:lnSpc>
+                <a:spcPct val="110000"/>
+              </a:lnSpc>
+            </a:pPr>
+            <a:r>
+              <a:rPr sz="1350" b="0" i="0">
+                <a:solidFill>
+                  <a:srgbClr val="E6EDF3"/>
+                </a:solidFill>
+                <a:latin typeface="Calibri"/>
+              </a:rPr>
+              <a:t>Flags a gap: the Architect's 5 blocks miss a Debug / SWD + status-LED block.</a:t>
+            </a:r>
+          </a:p>
+        </p:txBody>
+      </p:sp>
+      <p:sp>
+        <p:nvSpPr>
+          <p:cNvPr id="11" name="Oval 10"/>
+          <p:cNvSpPr/>
+          <p:nvPr/>
+        </p:nvSpPr>
+        <p:spPr>
+          <a:xfrm>
+            <a:off x="6355080" y="3474720"/>
+            <a:ext cx="457200" cy="457200"/>
+          </a:xfrm>
+          <a:prstGeom prst="ellipse">
+            <a:avLst/>
+          </a:prstGeom>
+          <a:solidFill>
+            <a:srgbClr val="D29922"/>
+          </a:solidFill>
+          <a:ln>
+            <a:noFill/>
+          </a:ln>
+          <a:effectLst/>
+        </p:spPr>
+        <p:style>
+          <a:lnRef idx="1">
+            <a:schemeClr val="accent1"/>
+          </a:lnRef>
+          <a:fillRef idx="3">
+            <a:schemeClr val="accent1"/>
+          </a:fillRef>
+          <a:effectRef idx="2">
+            <a:schemeClr val="accent1"/>
+          </a:effectRef>
+          <a:fontRef idx="minor">
+            <a:schemeClr val="lt1"/>
+          </a:fontRef>
+        </p:style>
+        <p:txBody>
+          <a:bodyPr rtlCol="0" anchor="ctr" wrap="none" lIns="0" rIns="0" tIns="0" bIns="0"/>
+          <a:lstStyle/>
+          <a:p>
+            <a:pPr algn="ctr"/>
+            <a:r>
+              <a:rPr sz="1600" b="1">
+                <a:solidFill>
+                  <a:srgbClr val="0F1419"/>
+                </a:solidFill>
+                <a:latin typeface="Calibri"/>
+              </a:rPr>
               <a:t>2</a:t>
             </a:r>
           </a:p>
@@ -4990,13 +8093,13 @@
       </p:sp>
       <p:sp>
         <p:nvSpPr>
-          <p:cNvPr id="11" name="TextBox 10"/>
-          <p:cNvSpPr txBox="1"/>
-          <p:nvPr/>
-        </p:nvSpPr>
-        <p:spPr>
-          <a:xfrm>
-            <a:off x="7013448" y="3483864"/>
+          <p:cNvPr id="12" name="TextBox 11"/>
+          <p:cNvSpPr txBox="1"/>
+          <p:nvPr/>
+        </p:nvSpPr>
+        <p:spPr>
+          <a:xfrm>
+            <a:off x="7013448" y="3438144"/>
             <a:ext cx="4553712" cy="365760"/>
           </a:xfrm>
           <a:prstGeom prst="rect">
@@ -5029,13 +8132,13 @@
       </p:sp>
       <p:sp>
         <p:nvSpPr>
-          <p:cNvPr id="12" name="TextBox 11"/>
-          <p:cNvSpPr txBox="1"/>
-          <p:nvPr/>
-        </p:nvSpPr>
-        <p:spPr>
-          <a:xfrm>
-            <a:off x="7013448" y="3831336"/>
+          <p:cNvPr id="13" name="TextBox 12"/>
+          <p:cNvSpPr txBox="1"/>
+          <p:nvPr/>
+        </p:nvSpPr>
+        <p:spPr>
+          <a:xfrm>
+            <a:off x="7013448" y="3785616"/>
             <a:ext cx="4553712" cy="640080"/>
           </a:xfrm>
           <a:prstGeom prst="rect">
@@ -5068,13 +8171,13 @@
       </p:sp>
       <p:sp>
         <p:nvSpPr>
-          <p:cNvPr id="13" name="Oval 12"/>
+          <p:cNvPr id="14" name="Oval 13"/>
           <p:cNvSpPr/>
           <p:nvPr/>
         </p:nvSpPr>
         <p:spPr>
           <a:xfrm>
-            <a:off x="6355080" y="4663440"/>
+            <a:off x="6355080" y="4572000"/>
             <a:ext cx="457200" cy="457200"/>
           </a:xfrm>
           <a:prstGeom prst="ellipse">
@@ -5121,13 +8224,13 @@
       </p:sp>
       <p:sp>
         <p:nvSpPr>
-          <p:cNvPr id="14" name="TextBox 13"/>
-          <p:cNvSpPr txBox="1"/>
-          <p:nvPr/>
-        </p:nvSpPr>
-        <p:spPr>
-          <a:xfrm>
-            <a:off x="7013448" y="4626864"/>
+          <p:cNvPr id="15" name="TextBox 14"/>
+          <p:cNvSpPr txBox="1"/>
+          <p:nvPr/>
+        </p:nvSpPr>
+        <p:spPr>
+          <a:xfrm>
+            <a:off x="7013448" y="4535424"/>
             <a:ext cx="4553712" cy="365760"/>
           </a:xfrm>
           <a:prstGeom prst="rect">
@@ -5160,13 +8263,13 @@
       </p:sp>
       <p:sp>
         <p:nvSpPr>
-          <p:cNvPr id="15" name="TextBox 14"/>
-          <p:cNvSpPr txBox="1"/>
-          <p:nvPr/>
-        </p:nvSpPr>
-        <p:spPr>
-          <a:xfrm>
-            <a:off x="7013448" y="4974336"/>
+          <p:cNvPr id="16" name="TextBox 15"/>
+          <p:cNvSpPr txBox="1"/>
+          <p:nvPr/>
+        </p:nvSpPr>
+        <p:spPr>
+          <a:xfrm>
+            <a:off x="7013448" y="4882896"/>
             <a:ext cx="4553712" cy="640080"/>
           </a:xfrm>
           <a:prstGeom prst="rect">
@@ -5199,13 +8302,13 @@
       </p:sp>
       <p:sp>
         <p:nvSpPr>
-          <p:cNvPr id="16" name="TextBox 15"/>
-          <p:cNvSpPr txBox="1"/>
-          <p:nvPr/>
-        </p:nvSpPr>
-        <p:spPr>
-          <a:xfrm>
-            <a:off x="6355080" y="5852160"/>
+          <p:cNvPr id="17" name="TextBox 16"/>
+          <p:cNvSpPr txBox="1"/>
+          <p:nvPr/>
+        </p:nvSpPr>
+        <p:spPr>
+          <a:xfrm>
+            <a:off x="6355080" y="5715000"/>
             <a:ext cx="5212080" cy="548640"/>
           </a:xfrm>
           <a:prstGeom prst="rect">
@@ -5238,7 +8341,7 @@
       </p:sp>
       <p:sp>
         <p:nvSpPr>
-          <p:cNvPr id="17" name="TextBox 16"/>
+          <p:cNvPr id="18" name="TextBox 17"/>
           <p:cNvSpPr txBox="1"/>
           <p:nvPr/>
         </p:nvSpPr>
@@ -5277,7 +8380,7 @@
       </p:sp>
       <p:sp>
         <p:nvSpPr>
-          <p:cNvPr id="18" name="TextBox 17"/>
+          <p:cNvPr id="19" name="TextBox 18"/>
           <p:cNvSpPr txBox="1"/>
           <p:nvPr/>
         </p:nvSpPr>
@@ -5310,6 +8413,3760 @@
                 <a:latin typeface="Calibri"/>
               </a:rPr>
               <a:t>5 / 9</a:t>
+            </a:r>
+          </a:p>
+        </p:txBody>
+      </p:sp>
+    </p:spTree>
+  </p:cSld>
+  <p:clrMapOvr>
+    <a:masterClrMapping/>
+  </p:clrMapOvr>
+</p:sld>
+</file>
+
+<file path=ppt/slides/slide6.xml><?xml version="1.0" encoding="utf-8"?>
+<p:sld xmlns:a="http://schemas.openxmlformats.org/drawingml/2006/main" xmlns:p="http://schemas.openxmlformats.org/presentationml/2006/main" xmlns:r="http://schemas.openxmlformats.org/officeDocument/2006/relationships">
+  <p:cSld>
+    <p:spTree>
+      <p:nvGrpSpPr>
+        <p:cNvPr id="1" name=""/>
+        <p:cNvGrpSpPr/>
+        <p:nvPr/>
+      </p:nvGrpSpPr>
+      <p:grpSpPr/>
+      <p:sp>
+        <p:nvSpPr>
+          <p:cNvPr id="2" name="Rectangle 1"/>
+          <p:cNvSpPr/>
+          <p:nvPr/>
+        </p:nvSpPr>
+        <p:spPr>
+          <a:xfrm>
+            <a:off x="0" y="0"/>
+            <a:ext cx="12191695" cy="6858000"/>
+          </a:xfrm>
+          <a:prstGeom prst="rect">
+            <a:avLst/>
+          </a:prstGeom>
+          <a:solidFill>
+            <a:srgbClr val="0F1419"/>
+          </a:solidFill>
+          <a:ln>
+            <a:noFill/>
+          </a:ln>
+          <a:effectLst/>
+        </p:spPr>
+        <p:style>
+          <a:lnRef idx="1">
+            <a:schemeClr val="accent1"/>
+          </a:lnRef>
+          <a:fillRef idx="3">
+            <a:schemeClr val="accent1"/>
+          </a:fillRef>
+          <a:effectRef idx="2">
+            <a:schemeClr val="accent1"/>
+          </a:effectRef>
+          <a:fontRef idx="minor">
+            <a:schemeClr val="lt1"/>
+          </a:fontRef>
+        </p:style>
+        <p:txBody>
+          <a:bodyPr rtlCol="0" anchor="ctr"/>
+          <a:lstStyle/>
+          <a:p>
+            <a:pPr algn="ctr"/>
+          </a:p>
+        </p:txBody>
+      </p:sp>
+      <p:sp>
+        <p:nvSpPr>
+          <p:cNvPr id="3" name="TextBox 2"/>
+          <p:cNvSpPr txBox="1"/>
+          <p:nvPr/>
+        </p:nvSpPr>
+        <p:spPr>
+          <a:xfrm>
+            <a:off x="640080" y="502920"/>
+            <a:ext cx="10881360" cy="914400"/>
+          </a:xfrm>
+          <a:prstGeom prst="rect">
+            <a:avLst/>
+          </a:prstGeom>
+          <a:noFill/>
+        </p:spPr>
+        <p:txBody>
+          <a:bodyPr wrap="square" anchor="t" lIns="0" rIns="0" tIns="0" bIns="0">
+            <a:noAutofit/>
+          </a:bodyPr>
+          <a:lstStyle/>
+          <a:p>
+            <a:pPr algn="l">
+              <a:lnSpc>
+                <a:spcPct val="100000"/>
+              </a:lnSpc>
+            </a:pPr>
+            <a:r>
+              <a:rPr sz="3400" b="1" i="0">
+                <a:solidFill>
+                  <a:srgbClr val="E6EDF3"/>
+                </a:solidFill>
+                <a:latin typeface="Calibri"/>
+              </a:rPr>
+              <a:t>Measured on a deterministic rubric — not vibes</a:t>
+            </a:r>
+          </a:p>
+        </p:txBody>
+      </p:sp>
+      <p:sp>
+        <p:nvSpPr>
+          <p:cNvPr id="4" name="TextBox 3"/>
+          <p:cNvSpPr txBox="1"/>
+          <p:nvPr/>
+        </p:nvSpPr>
+        <p:spPr>
+          <a:xfrm>
+            <a:off x="640080" y="1325880"/>
+            <a:ext cx="10881360" cy="457200"/>
+          </a:xfrm>
+          <a:prstGeom prst="rect">
+            <a:avLst/>
+          </a:prstGeom>
+          <a:noFill/>
+        </p:spPr>
+        <p:txBody>
+          <a:bodyPr wrap="square" anchor="t" lIns="0" rIns="0" tIns="0" bIns="0">
+            <a:noAutofit/>
+          </a:bodyPr>
+          <a:lstStyle/>
+          <a:p>
+            <a:pPr algn="l">
+              <a:lnSpc>
+                <a:spcPct val="100000"/>
+              </a:lnSpc>
+            </a:pPr>
+            <a:r>
+              <a:rPr sz="1500" b="0" i="0">
+                <a:solidFill>
+                  <a:srgbClr val="8B98A5"/>
+                </a:solidFill>
+                <a:latin typeface="Calibri"/>
+              </a:rPr>
+              <a:t>One 12-point engineering rubric scores both teams the same way — no LLM judging itself.</a:t>
+            </a:r>
+          </a:p>
+        </p:txBody>
+      </p:sp>
+      <p:sp>
+        <p:nvSpPr>
+          <p:cNvPr id="5" name="Rounded Rectangle 4"/>
+          <p:cNvSpPr/>
+          <p:nvPr/>
+        </p:nvSpPr>
+        <p:spPr>
+          <a:xfrm>
+            <a:off x="640080" y="2011680"/>
+            <a:ext cx="6583680" cy="3886200"/>
+          </a:xfrm>
+          <a:prstGeom prst="roundRect">
+            <a:avLst>
+              <a:gd name="adj" fmla="val 8000"/>
+            </a:avLst>
+          </a:prstGeom>
+          <a:solidFill>
+            <a:srgbClr val="1A212B"/>
+          </a:solidFill>
+          <a:ln w="12700">
+            <a:solidFill>
+              <a:srgbClr val="2D3A48"/>
+            </a:solidFill>
+          </a:ln>
+          <a:effectLst/>
+        </p:spPr>
+        <p:style>
+          <a:lnRef idx="1">
+            <a:schemeClr val="accent1"/>
+          </a:lnRef>
+          <a:fillRef idx="3">
+            <a:schemeClr val="accent1"/>
+          </a:fillRef>
+          <a:effectRef idx="2">
+            <a:schemeClr val="accent1"/>
+          </a:effectRef>
+          <a:fontRef idx="minor">
+            <a:schemeClr val="lt1"/>
+          </a:fontRef>
+        </p:style>
+        <p:txBody>
+          <a:bodyPr rtlCol="0" anchor="ctr"/>
+          <a:lstStyle/>
+          <a:p>
+            <a:pPr algn="ctr"/>
+          </a:p>
+        </p:txBody>
+      </p:sp>
+      <p:sp>
+        <p:nvSpPr>
+          <p:cNvPr id="6" name="TextBox 5"/>
+          <p:cNvSpPr txBox="1"/>
+          <p:nvPr/>
+        </p:nvSpPr>
+        <p:spPr>
+          <a:xfrm>
+            <a:off x="1005840" y="2240280"/>
+            <a:ext cx="5852160" cy="457200"/>
+          </a:xfrm>
+          <a:prstGeom prst="rect">
+            <a:avLst/>
+          </a:prstGeom>
+          <a:noFill/>
+        </p:spPr>
+        <p:txBody>
+          <a:bodyPr wrap="square" anchor="t" lIns="0" rIns="0" tIns="0" bIns="0">
+            <a:noAutofit/>
+          </a:bodyPr>
+          <a:lstStyle/>
+          <a:p>
+            <a:pPr algn="l">
+              <a:lnSpc>
+                <a:spcPct val="100000"/>
+              </a:lnSpc>
+            </a:pPr>
+            <a:r>
+              <a:rPr sz="1600" b="1" i="0">
+                <a:solidFill>
+                  <a:srgbClr val="E6EDF3"/>
+                </a:solidFill>
+                <a:latin typeface="Calibri"/>
+              </a:rPr>
+              <a:t>What a single agent most often skipped</a:t>
+            </a:r>
+          </a:p>
+        </p:txBody>
+      </p:sp>
+      <p:sp>
+        <p:nvSpPr>
+          <p:cNvPr id="7" name="TextBox 6"/>
+          <p:cNvSpPr txBox="1"/>
+          <p:nvPr/>
+        </p:nvSpPr>
+        <p:spPr>
+          <a:xfrm>
+            <a:off x="1005840" y="2670048"/>
+            <a:ext cx="5852160" cy="365760"/>
+          </a:xfrm>
+          <a:prstGeom prst="rect">
+            <a:avLst/>
+          </a:prstGeom>
+          <a:noFill/>
+        </p:spPr>
+        <p:txBody>
+          <a:bodyPr wrap="square" anchor="t" lIns="0" rIns="0" tIns="0" bIns="0">
+            <a:noAutofit/>
+          </a:bodyPr>
+          <a:lstStyle/>
+          <a:p>
+            <a:pPr algn="l">
+              <a:lnSpc>
+                <a:spcPct val="100000"/>
+              </a:lnSpc>
+            </a:pPr>
+            <a:r>
+              <a:rPr sz="1200" b="0" i="1">
+                <a:solidFill>
+                  <a:srgbClr val="8B98A5"/>
+                </a:solidFill>
+                <a:latin typeface="Calibri"/>
+              </a:rPr>
+              <a:t>across the 5 live designs — caught by the Critic / Arbitration</a:t>
+            </a:r>
+          </a:p>
+        </p:txBody>
+      </p:sp>
+      <p:sp>
+        <p:nvSpPr>
+          <p:cNvPr id="8" name="TextBox 7"/>
+          <p:cNvSpPr txBox="1"/>
+          <p:nvPr/>
+        </p:nvSpPr>
+        <p:spPr>
+          <a:xfrm>
+            <a:off x="1005840" y="3200400"/>
+            <a:ext cx="4754880" cy="411480"/>
+          </a:xfrm>
+          <a:prstGeom prst="rect">
+            <a:avLst/>
+          </a:prstGeom>
+          <a:noFill/>
+        </p:spPr>
+        <p:txBody>
+          <a:bodyPr wrap="square" anchor="ctr" lIns="0" rIns="0" tIns="0" bIns="0">
+            <a:noAutofit/>
+          </a:bodyPr>
+          <a:lstStyle/>
+          <a:p>
+            <a:pPr algn="l">
+              <a:lnSpc>
+                <a:spcPct val="100000"/>
+              </a:lnSpc>
+            </a:pPr>
+            <a:r>
+              <a:rPr sz="1500" b="0" i="0">
+                <a:solidFill>
+                  <a:srgbClr val="E6EDF3"/>
+                </a:solidFill>
+                <a:latin typeface="Calibri"/>
+              </a:rPr>
+              <a:t>Reverse-polarity protection</a:t>
+            </a:r>
+          </a:p>
+        </p:txBody>
+      </p:sp>
+      <p:sp>
+        <p:nvSpPr>
+          <p:cNvPr id="9" name="Oval 8"/>
+          <p:cNvSpPr/>
+          <p:nvPr/>
+        </p:nvSpPr>
+        <p:spPr>
+          <a:xfrm>
+            <a:off x="6172200" y="3218688"/>
+            <a:ext cx="402336" cy="402336"/>
+          </a:xfrm>
+          <a:prstGeom prst="ellipse">
+            <a:avLst/>
+          </a:prstGeom>
+          <a:solidFill>
+            <a:srgbClr val="D29922"/>
+          </a:solidFill>
+          <a:ln>
+            <a:noFill/>
+          </a:ln>
+          <a:effectLst/>
+        </p:spPr>
+        <p:style>
+          <a:lnRef idx="1">
+            <a:schemeClr val="accent1"/>
+          </a:lnRef>
+          <a:fillRef idx="3">
+            <a:schemeClr val="accent1"/>
+          </a:fillRef>
+          <a:effectRef idx="2">
+            <a:schemeClr val="accent1"/>
+          </a:effectRef>
+          <a:fontRef idx="minor">
+            <a:schemeClr val="lt1"/>
+          </a:fontRef>
+        </p:style>
+        <p:txBody>
+          <a:bodyPr rtlCol="0" anchor="ctr" wrap="none" lIns="0" rIns="0" tIns="0" bIns="0"/>
+          <a:lstStyle/>
+          <a:p>
+            <a:pPr algn="ctr"/>
+            <a:r>
+              <a:rPr sz="1200" b="1">
+                <a:solidFill>
+                  <a:srgbClr val="0F1419"/>
+                </a:solidFill>
+                <a:latin typeface="Calibri"/>
+              </a:rPr>
+              <a:t>5×</a:t>
+            </a:r>
+          </a:p>
+        </p:txBody>
+      </p:sp>
+      <p:sp>
+        <p:nvSpPr>
+          <p:cNvPr id="10" name="TextBox 9"/>
+          <p:cNvSpPr txBox="1"/>
+          <p:nvPr/>
+        </p:nvSpPr>
+        <p:spPr>
+          <a:xfrm>
+            <a:off x="1005840" y="3712464"/>
+            <a:ext cx="4754880" cy="411480"/>
+          </a:xfrm>
+          <a:prstGeom prst="rect">
+            <a:avLst/>
+          </a:prstGeom>
+          <a:noFill/>
+        </p:spPr>
+        <p:txBody>
+          <a:bodyPr wrap="square" anchor="ctr" lIns="0" rIns="0" tIns="0" bIns="0">
+            <a:noAutofit/>
+          </a:bodyPr>
+          <a:lstStyle/>
+          <a:p>
+            <a:pPr algn="l">
+              <a:lnSpc>
+                <a:spcPct val="100000"/>
+              </a:lnSpc>
+            </a:pPr>
+            <a:r>
+              <a:rPr sz="1500" b="0" i="0">
+                <a:solidFill>
+                  <a:srgbClr val="E6EDF3"/>
+                </a:solidFill>
+                <a:latin typeface="Calibri"/>
+              </a:rPr>
+              <a:t>Overcurrent / fuse protection</a:t>
+            </a:r>
+          </a:p>
+        </p:txBody>
+      </p:sp>
+      <p:sp>
+        <p:nvSpPr>
+          <p:cNvPr id="11" name="Oval 10"/>
+          <p:cNvSpPr/>
+          <p:nvPr/>
+        </p:nvSpPr>
+        <p:spPr>
+          <a:xfrm>
+            <a:off x="6172200" y="3730752"/>
+            <a:ext cx="402336" cy="402336"/>
+          </a:xfrm>
+          <a:prstGeom prst="ellipse">
+            <a:avLst/>
+          </a:prstGeom>
+          <a:solidFill>
+            <a:srgbClr val="D29922"/>
+          </a:solidFill>
+          <a:ln>
+            <a:noFill/>
+          </a:ln>
+          <a:effectLst/>
+        </p:spPr>
+        <p:style>
+          <a:lnRef idx="1">
+            <a:schemeClr val="accent1"/>
+          </a:lnRef>
+          <a:fillRef idx="3">
+            <a:schemeClr val="accent1"/>
+          </a:fillRef>
+          <a:effectRef idx="2">
+            <a:schemeClr val="accent1"/>
+          </a:effectRef>
+          <a:fontRef idx="minor">
+            <a:schemeClr val="lt1"/>
+          </a:fontRef>
+        </p:style>
+        <p:txBody>
+          <a:bodyPr rtlCol="0" anchor="ctr" wrap="none" lIns="0" rIns="0" tIns="0" bIns="0"/>
+          <a:lstStyle/>
+          <a:p>
+            <a:pPr algn="ctr"/>
+            <a:r>
+              <a:rPr sz="1200" b="1">
+                <a:solidFill>
+                  <a:srgbClr val="0F1419"/>
+                </a:solidFill>
+                <a:latin typeface="Calibri"/>
+              </a:rPr>
+              <a:t>4×</a:t>
+            </a:r>
+          </a:p>
+        </p:txBody>
+      </p:sp>
+      <p:sp>
+        <p:nvSpPr>
+          <p:cNvPr id="12" name="TextBox 11"/>
+          <p:cNvSpPr txBox="1"/>
+          <p:nvPr/>
+        </p:nvSpPr>
+        <p:spPr>
+          <a:xfrm>
+            <a:off x="1005840" y="4224528"/>
+            <a:ext cx="4754880" cy="411480"/>
+          </a:xfrm>
+          <a:prstGeom prst="rect">
+            <a:avLst/>
+          </a:prstGeom>
+          <a:noFill/>
+        </p:spPr>
+        <p:txBody>
+          <a:bodyPr wrap="square" anchor="ctr" lIns="0" rIns="0" tIns="0" bIns="0">
+            <a:noAutofit/>
+          </a:bodyPr>
+          <a:lstStyle/>
+          <a:p>
+            <a:pPr algn="l">
+              <a:lnSpc>
+                <a:spcPct val="100000"/>
+              </a:lnSpc>
+            </a:pPr>
+            <a:r>
+              <a:rPr sz="1500" b="0" i="0">
+                <a:solidFill>
+                  <a:srgbClr val="E6EDF3"/>
+                </a:solidFill>
+                <a:latin typeface="Calibri"/>
+              </a:rPr>
+              <a:t>Docs &amp; explicit uncertainty</a:t>
+            </a:r>
+          </a:p>
+        </p:txBody>
+      </p:sp>
+      <p:sp>
+        <p:nvSpPr>
+          <p:cNvPr id="13" name="Oval 12"/>
+          <p:cNvSpPr/>
+          <p:nvPr/>
+        </p:nvSpPr>
+        <p:spPr>
+          <a:xfrm>
+            <a:off x="6172200" y="4242816"/>
+            <a:ext cx="402336" cy="402336"/>
+          </a:xfrm>
+          <a:prstGeom prst="ellipse">
+            <a:avLst/>
+          </a:prstGeom>
+          <a:solidFill>
+            <a:srgbClr val="D29922"/>
+          </a:solidFill>
+          <a:ln>
+            <a:noFill/>
+          </a:ln>
+          <a:effectLst/>
+        </p:spPr>
+        <p:style>
+          <a:lnRef idx="1">
+            <a:schemeClr val="accent1"/>
+          </a:lnRef>
+          <a:fillRef idx="3">
+            <a:schemeClr val="accent1"/>
+          </a:fillRef>
+          <a:effectRef idx="2">
+            <a:schemeClr val="accent1"/>
+          </a:effectRef>
+          <a:fontRef idx="minor">
+            <a:schemeClr val="lt1"/>
+          </a:fontRef>
+        </p:style>
+        <p:txBody>
+          <a:bodyPr rtlCol="0" anchor="ctr" wrap="none" lIns="0" rIns="0" tIns="0" bIns="0"/>
+          <a:lstStyle/>
+          <a:p>
+            <a:pPr algn="ctr"/>
+            <a:r>
+              <a:rPr sz="1200" b="1">
+                <a:solidFill>
+                  <a:srgbClr val="0F1419"/>
+                </a:solidFill>
+                <a:latin typeface="Calibri"/>
+              </a:rPr>
+              <a:t>3×</a:t>
+            </a:r>
+          </a:p>
+        </p:txBody>
+      </p:sp>
+      <p:sp>
+        <p:nvSpPr>
+          <p:cNvPr id="14" name="TextBox 13"/>
+          <p:cNvSpPr txBox="1"/>
+          <p:nvPr/>
+        </p:nvSpPr>
+        <p:spPr>
+          <a:xfrm>
+            <a:off x="1005840" y="4736592"/>
+            <a:ext cx="4754880" cy="411480"/>
+          </a:xfrm>
+          <a:prstGeom prst="rect">
+            <a:avLst/>
+          </a:prstGeom>
+          <a:noFill/>
+        </p:spPr>
+        <p:txBody>
+          <a:bodyPr wrap="square" anchor="ctr" lIns="0" rIns="0" tIns="0" bIns="0">
+            <a:noAutofit/>
+          </a:bodyPr>
+          <a:lstStyle/>
+          <a:p>
+            <a:pPr algn="l">
+              <a:lnSpc>
+                <a:spcPct val="100000"/>
+              </a:lnSpc>
+            </a:pPr>
+            <a:r>
+              <a:rPr sz="1500" b="0" i="0">
+                <a:solidFill>
+                  <a:srgbClr val="E6EDF3"/>
+                </a:solidFill>
+                <a:latin typeface="Calibri"/>
+              </a:rPr>
+              <a:t>Surge / ESD on power input</a:t>
+            </a:r>
+          </a:p>
+        </p:txBody>
+      </p:sp>
+      <p:sp>
+        <p:nvSpPr>
+          <p:cNvPr id="15" name="Oval 14"/>
+          <p:cNvSpPr/>
+          <p:nvPr/>
+        </p:nvSpPr>
+        <p:spPr>
+          <a:xfrm>
+            <a:off x="6172200" y="4754880"/>
+            <a:ext cx="402336" cy="402336"/>
+          </a:xfrm>
+          <a:prstGeom prst="ellipse">
+            <a:avLst/>
+          </a:prstGeom>
+          <a:solidFill>
+            <a:srgbClr val="D29922"/>
+          </a:solidFill>
+          <a:ln>
+            <a:noFill/>
+          </a:ln>
+          <a:effectLst/>
+        </p:spPr>
+        <p:style>
+          <a:lnRef idx="1">
+            <a:schemeClr val="accent1"/>
+          </a:lnRef>
+          <a:fillRef idx="3">
+            <a:schemeClr val="accent1"/>
+          </a:fillRef>
+          <a:effectRef idx="2">
+            <a:schemeClr val="accent1"/>
+          </a:effectRef>
+          <a:fontRef idx="minor">
+            <a:schemeClr val="lt1"/>
+          </a:fontRef>
+        </p:style>
+        <p:txBody>
+          <a:bodyPr rtlCol="0" anchor="ctr" wrap="none" lIns="0" rIns="0" tIns="0" bIns="0"/>
+          <a:lstStyle/>
+          <a:p>
+            <a:pPr algn="ctr"/>
+            <a:r>
+              <a:rPr sz="1200" b="1">
+                <a:solidFill>
+                  <a:srgbClr val="0F1419"/>
+                </a:solidFill>
+                <a:latin typeface="Calibri"/>
+              </a:rPr>
+              <a:t>2×</a:t>
+            </a:r>
+          </a:p>
+        </p:txBody>
+      </p:sp>
+      <p:sp>
+        <p:nvSpPr>
+          <p:cNvPr id="16" name="TextBox 15"/>
+          <p:cNvSpPr txBox="1"/>
+          <p:nvPr/>
+        </p:nvSpPr>
+        <p:spPr>
+          <a:xfrm>
+            <a:off x="1005840" y="5248656"/>
+            <a:ext cx="4754880" cy="411480"/>
+          </a:xfrm>
+          <a:prstGeom prst="rect">
+            <a:avLst/>
+          </a:prstGeom>
+          <a:noFill/>
+        </p:spPr>
+        <p:txBody>
+          <a:bodyPr wrap="square" anchor="ctr" lIns="0" rIns="0" tIns="0" bIns="0">
+            <a:noAutofit/>
+          </a:bodyPr>
+          <a:lstStyle/>
+          <a:p>
+            <a:pPr algn="l">
+              <a:lnSpc>
+                <a:spcPct val="100000"/>
+              </a:lnSpc>
+            </a:pPr>
+            <a:r>
+              <a:rPr sz="1500" b="0" i="0">
+                <a:solidFill>
+                  <a:srgbClr val="E6EDF3"/>
+                </a:solidFill>
+                <a:latin typeface="Calibri"/>
+              </a:rPr>
+              <a:t>Clock source</a:t>
+            </a:r>
+          </a:p>
+        </p:txBody>
+      </p:sp>
+      <p:sp>
+        <p:nvSpPr>
+          <p:cNvPr id="17" name="Oval 16"/>
+          <p:cNvSpPr/>
+          <p:nvPr/>
+        </p:nvSpPr>
+        <p:spPr>
+          <a:xfrm>
+            <a:off x="6172200" y="5266944"/>
+            <a:ext cx="402336" cy="402336"/>
+          </a:xfrm>
+          <a:prstGeom prst="ellipse">
+            <a:avLst/>
+          </a:prstGeom>
+          <a:solidFill>
+            <a:srgbClr val="D29922"/>
+          </a:solidFill>
+          <a:ln>
+            <a:noFill/>
+          </a:ln>
+          <a:effectLst/>
+        </p:spPr>
+        <p:style>
+          <a:lnRef idx="1">
+            <a:schemeClr val="accent1"/>
+          </a:lnRef>
+          <a:fillRef idx="3">
+            <a:schemeClr val="accent1"/>
+          </a:fillRef>
+          <a:effectRef idx="2">
+            <a:schemeClr val="accent1"/>
+          </a:effectRef>
+          <a:fontRef idx="minor">
+            <a:schemeClr val="lt1"/>
+          </a:fontRef>
+        </p:style>
+        <p:txBody>
+          <a:bodyPr rtlCol="0" anchor="ctr" wrap="none" lIns="0" rIns="0" tIns="0" bIns="0"/>
+          <a:lstStyle/>
+          <a:p>
+            <a:pPr algn="ctr"/>
+            <a:r>
+              <a:rPr sz="1200" b="1">
+                <a:solidFill>
+                  <a:srgbClr val="0F1419"/>
+                </a:solidFill>
+                <a:latin typeface="Calibri"/>
+              </a:rPr>
+              <a:t>2×</a:t>
+            </a:r>
+          </a:p>
+        </p:txBody>
+      </p:sp>
+      <p:sp>
+        <p:nvSpPr>
+          <p:cNvPr id="18" name="Rounded Rectangle 17"/>
+          <p:cNvSpPr/>
+          <p:nvPr/>
+        </p:nvSpPr>
+        <p:spPr>
+          <a:xfrm>
+            <a:off x="7543800" y="2011680"/>
+            <a:ext cx="4023360" cy="3886200"/>
+          </a:xfrm>
+          <a:prstGeom prst="roundRect">
+            <a:avLst>
+              <a:gd name="adj" fmla="val 8000"/>
+            </a:avLst>
+          </a:prstGeom>
+          <a:solidFill>
+            <a:srgbClr val="222C38"/>
+          </a:solidFill>
+          <a:ln w="12700">
+            <a:solidFill>
+              <a:srgbClr val="2D3A48"/>
+            </a:solidFill>
+          </a:ln>
+          <a:effectLst/>
+        </p:spPr>
+        <p:style>
+          <a:lnRef idx="1">
+            <a:schemeClr val="accent1"/>
+          </a:lnRef>
+          <a:fillRef idx="3">
+            <a:schemeClr val="accent1"/>
+          </a:fillRef>
+          <a:effectRef idx="2">
+            <a:schemeClr val="accent1"/>
+          </a:effectRef>
+          <a:fontRef idx="minor">
+            <a:schemeClr val="lt1"/>
+          </a:fontRef>
+        </p:style>
+        <p:txBody>
+          <a:bodyPr rtlCol="0" anchor="ctr"/>
+          <a:lstStyle/>
+          <a:p>
+            <a:pPr algn="ctr"/>
+          </a:p>
+        </p:txBody>
+      </p:sp>
+      <p:sp>
+        <p:nvSpPr>
+          <p:cNvPr id="19" name="TextBox 18"/>
+          <p:cNvSpPr txBox="1"/>
+          <p:nvPr/>
+        </p:nvSpPr>
+        <p:spPr>
+          <a:xfrm>
+            <a:off x="7909560" y="2286000"/>
+            <a:ext cx="3291840" cy="457200"/>
+          </a:xfrm>
+          <a:prstGeom prst="rect">
+            <a:avLst/>
+          </a:prstGeom>
+          <a:noFill/>
+        </p:spPr>
+        <p:txBody>
+          <a:bodyPr wrap="square" anchor="t" lIns="0" rIns="0" tIns="0" bIns="0">
+            <a:noAutofit/>
+          </a:bodyPr>
+          <a:lstStyle/>
+          <a:p>
+            <a:pPr algn="l">
+              <a:lnSpc>
+                <a:spcPct val="100000"/>
+              </a:lnSpc>
+            </a:pPr>
+            <a:r>
+              <a:rPr sz="1500" b="1" i="0">
+                <a:solidFill>
+                  <a:srgbClr val="E6EDF3"/>
+                </a:solidFill>
+                <a:latin typeface="Calibri"/>
+              </a:rPr>
+              <a:t>Average coverage</a:t>
+            </a:r>
+          </a:p>
+        </p:txBody>
+      </p:sp>
+      <p:sp>
+        <p:nvSpPr>
+          <p:cNvPr id="20" name="TextBox 19"/>
+          <p:cNvSpPr txBox="1"/>
+          <p:nvPr/>
+        </p:nvSpPr>
+        <p:spPr>
+          <a:xfrm>
+            <a:off x="7909560" y="2880360"/>
+            <a:ext cx="3291840" cy="822960"/>
+          </a:xfrm>
+          <a:prstGeom prst="rect">
+            <a:avLst/>
+          </a:prstGeom>
+          <a:noFill/>
+        </p:spPr>
+        <p:txBody>
+          <a:bodyPr wrap="square" anchor="t" lIns="0" rIns="0" tIns="0" bIns="0">
+            <a:noAutofit/>
+          </a:bodyPr>
+          <a:lstStyle/>
+          <a:p>
+            <a:pPr algn="l">
+              <a:lnSpc>
+                <a:spcPct val="100000"/>
+              </a:lnSpc>
+            </a:pPr>
+            <a:r>
+              <a:rPr sz="4000" b="1" i="0">
+                <a:solidFill>
+                  <a:srgbClr val="4F9CF9"/>
+                </a:solidFill>
+                <a:latin typeface="Calibri"/>
+              </a:rPr>
+              <a:t>11.6</a:t>
+            </a:r>
+            <a:r>
+              <a:rPr sz="1600" b="0" i="0">
+                <a:solidFill>
+                  <a:srgbClr val="8B98A5"/>
+                </a:solidFill>
+                <a:latin typeface="Calibri"/>
+              </a:rPr>
+              <a:t> / 12   multi</a:t>
+            </a:r>
+          </a:p>
+        </p:txBody>
+      </p:sp>
+      <p:sp>
+        <p:nvSpPr>
+          <p:cNvPr id="21" name="TextBox 20"/>
+          <p:cNvSpPr txBox="1"/>
+          <p:nvPr/>
+        </p:nvSpPr>
+        <p:spPr>
+          <a:xfrm>
+            <a:off x="7909560" y="3703320"/>
+            <a:ext cx="3291840" cy="822960"/>
+          </a:xfrm>
+          <a:prstGeom prst="rect">
+            <a:avLst/>
+          </a:prstGeom>
+          <a:noFill/>
+        </p:spPr>
+        <p:txBody>
+          <a:bodyPr wrap="square" anchor="t" lIns="0" rIns="0" tIns="0" bIns="0">
+            <a:noAutofit/>
+          </a:bodyPr>
+          <a:lstStyle/>
+          <a:p>
+            <a:pPr algn="l">
+              <a:lnSpc>
+                <a:spcPct val="100000"/>
+              </a:lnSpc>
+            </a:pPr>
+            <a:r>
+              <a:rPr sz="4000" b="1" i="0">
+                <a:solidFill>
+                  <a:srgbClr val="8B98A5"/>
+                </a:solidFill>
+                <a:latin typeface="Calibri"/>
+              </a:rPr>
+              <a:t>8.4</a:t>
+            </a:r>
+            <a:r>
+              <a:rPr sz="1600" b="0" i="0">
+                <a:solidFill>
+                  <a:srgbClr val="8B98A5"/>
+                </a:solidFill>
+                <a:latin typeface="Calibri"/>
+              </a:rPr>
+              <a:t> / 12   single</a:t>
+            </a:r>
+          </a:p>
+        </p:txBody>
+      </p:sp>
+      <p:sp>
+        <p:nvSpPr>
+          <p:cNvPr id="22" name="TextBox 21"/>
+          <p:cNvSpPr txBox="1"/>
+          <p:nvPr/>
+        </p:nvSpPr>
+        <p:spPr>
+          <a:xfrm>
+            <a:off x="7909560" y="4663440"/>
+            <a:ext cx="3383280" cy="1005840"/>
+          </a:xfrm>
+          <a:prstGeom prst="rect">
+            <a:avLst/>
+          </a:prstGeom>
+          <a:noFill/>
+        </p:spPr>
+        <p:txBody>
+          <a:bodyPr wrap="square" anchor="t" lIns="0" rIns="0" tIns="0" bIns="0">
+            <a:noAutofit/>
+          </a:bodyPr>
+          <a:lstStyle/>
+          <a:p>
+            <a:pPr algn="l">
+              <a:lnSpc>
+                <a:spcPct val="112000"/>
+              </a:lnSpc>
+            </a:pPr>
+            <a:r>
+              <a:rPr sz="1300" b="0" i="0">
+                <a:solidFill>
+                  <a:srgbClr val="E6EDF3"/>
+                </a:solidFill>
+                <a:latin typeface="Calibri"/>
+              </a:rPr>
+              <a:t>The team's edge isn't cleverness — it's the review step that refuses to forget the unglamorous essentials.</a:t>
+            </a:r>
+          </a:p>
+        </p:txBody>
+      </p:sp>
+      <p:sp>
+        <p:nvSpPr>
+          <p:cNvPr id="23" name="TextBox 22"/>
+          <p:cNvSpPr txBox="1"/>
+          <p:nvPr/>
+        </p:nvSpPr>
+        <p:spPr>
+          <a:xfrm>
+            <a:off x="640080" y="6437376"/>
+            <a:ext cx="4572000" cy="274320"/>
+          </a:xfrm>
+          <a:prstGeom prst="rect">
+            <a:avLst/>
+          </a:prstGeom>
+          <a:noFill/>
+        </p:spPr>
+        <p:txBody>
+          <a:bodyPr wrap="square" anchor="t" lIns="0" rIns="0" tIns="0" bIns="0">
+            <a:noAutofit/>
+          </a:bodyPr>
+          <a:lstStyle/>
+          <a:p>
+            <a:pPr algn="l">
+              <a:lnSpc>
+                <a:spcPct val="100000"/>
+              </a:lnSpc>
+            </a:pPr>
+            <a:r>
+              <a:rPr sz="1000" b="0" i="0">
+                <a:solidFill>
+                  <a:srgbClr val="8B98A5"/>
+                </a:solidFill>
+                <a:latin typeface="Calibri"/>
+              </a:rPr>
+              <a:t>AI Circuit Architect</a:t>
+            </a:r>
+          </a:p>
+        </p:txBody>
+      </p:sp>
+      <p:sp>
+        <p:nvSpPr>
+          <p:cNvPr id="24" name="TextBox 23"/>
+          <p:cNvSpPr txBox="1"/>
+          <p:nvPr/>
+        </p:nvSpPr>
+        <p:spPr>
+          <a:xfrm>
+            <a:off x="10607040" y="6437376"/>
+            <a:ext cx="1097280" cy="274320"/>
+          </a:xfrm>
+          <a:prstGeom prst="rect">
+            <a:avLst/>
+          </a:prstGeom>
+          <a:noFill/>
+        </p:spPr>
+        <p:txBody>
+          <a:bodyPr wrap="square" anchor="t" lIns="0" rIns="0" tIns="0" bIns="0">
+            <a:noAutofit/>
+          </a:bodyPr>
+          <a:lstStyle/>
+          <a:p>
+            <a:pPr algn="r">
+              <a:lnSpc>
+                <a:spcPct val="100000"/>
+              </a:lnSpc>
+            </a:pPr>
+            <a:r>
+              <a:rPr sz="1000" b="0" i="0">
+                <a:solidFill>
+                  <a:srgbClr val="8B98A5"/>
+                </a:solidFill>
+                <a:latin typeface="Calibri"/>
+              </a:rPr>
+              <a:t>6 / 9</a:t>
+            </a:r>
+          </a:p>
+        </p:txBody>
+      </p:sp>
+    </p:spTree>
+  </p:cSld>
+  <p:clrMapOvr>
+    <a:masterClrMapping/>
+  </p:clrMapOvr>
+</p:sld>
+</file>
+
+<file path=ppt/slides/slide7.xml><?xml version="1.0" encoding="utf-8"?>
+<p:sld xmlns:a="http://schemas.openxmlformats.org/drawingml/2006/main" xmlns:p="http://schemas.openxmlformats.org/presentationml/2006/main" xmlns:r="http://schemas.openxmlformats.org/officeDocument/2006/relationships">
+  <p:cSld>
+    <p:spTree>
+      <p:nvGrpSpPr>
+        <p:cNvPr id="1" name=""/>
+        <p:cNvGrpSpPr/>
+        <p:nvPr/>
+      </p:nvGrpSpPr>
+      <p:grpSpPr/>
+      <p:sp>
+        <p:nvSpPr>
+          <p:cNvPr id="2" name="Rectangle 1"/>
+          <p:cNvSpPr/>
+          <p:nvPr/>
+        </p:nvSpPr>
+        <p:spPr>
+          <a:xfrm>
+            <a:off x="0" y="0"/>
+            <a:ext cx="12191695" cy="6858000"/>
+          </a:xfrm>
+          <a:prstGeom prst="rect">
+            <a:avLst/>
+          </a:prstGeom>
+          <a:solidFill>
+            <a:srgbClr val="0F1419"/>
+          </a:solidFill>
+          <a:ln>
+            <a:noFill/>
+          </a:ln>
+          <a:effectLst/>
+        </p:spPr>
+        <p:style>
+          <a:lnRef idx="1">
+            <a:schemeClr val="accent1"/>
+          </a:lnRef>
+          <a:fillRef idx="3">
+            <a:schemeClr val="accent1"/>
+          </a:fillRef>
+          <a:effectRef idx="2">
+            <a:schemeClr val="accent1"/>
+          </a:effectRef>
+          <a:fontRef idx="minor">
+            <a:schemeClr val="lt1"/>
+          </a:fontRef>
+        </p:style>
+        <p:txBody>
+          <a:bodyPr rtlCol="0" anchor="ctr"/>
+          <a:lstStyle/>
+          <a:p>
+            <a:pPr algn="ctr"/>
+          </a:p>
+        </p:txBody>
+      </p:sp>
+      <p:sp>
+        <p:nvSpPr>
+          <p:cNvPr id="3" name="TextBox 2"/>
+          <p:cNvSpPr txBox="1"/>
+          <p:nvPr/>
+        </p:nvSpPr>
+        <p:spPr>
+          <a:xfrm>
+            <a:off x="640080" y="502920"/>
+            <a:ext cx="10881360" cy="914400"/>
+          </a:xfrm>
+          <a:prstGeom prst="rect">
+            <a:avLst/>
+          </a:prstGeom>
+          <a:noFill/>
+        </p:spPr>
+        <p:txBody>
+          <a:bodyPr wrap="square" anchor="t" lIns="0" rIns="0" tIns="0" bIns="0">
+            <a:noAutofit/>
+          </a:bodyPr>
+          <a:lstStyle/>
+          <a:p>
+            <a:pPr algn="l">
+              <a:lnSpc>
+                <a:spcPct val="100000"/>
+              </a:lnSpc>
+            </a:pPr>
+            <a:r>
+              <a:rPr sz="3400" b="1" i="0">
+                <a:solidFill>
+                  <a:srgbClr val="E6EDF3"/>
+                </a:solidFill>
+                <a:latin typeface="Calibri"/>
+              </a:rPr>
+              <a:t>What you actually get — a structured KiCad start</a:t>
+            </a:r>
+          </a:p>
+        </p:txBody>
+      </p:sp>
+      <p:sp>
+        <p:nvSpPr>
+          <p:cNvPr id="4" name="Rounded Rectangle 3"/>
+          <p:cNvSpPr/>
+          <p:nvPr/>
+        </p:nvSpPr>
+        <p:spPr>
+          <a:xfrm>
+            <a:off x="640080" y="1508760"/>
+            <a:ext cx="5806440" cy="4343400"/>
+          </a:xfrm>
+          <a:prstGeom prst="roundRect">
+            <a:avLst>
+              <a:gd name="adj" fmla="val 8000"/>
+            </a:avLst>
+          </a:prstGeom>
+          <a:solidFill>
+            <a:srgbClr val="222C38"/>
+          </a:solidFill>
+          <a:ln w="12700">
+            <a:solidFill>
+              <a:srgbClr val="2D3A48"/>
+            </a:solidFill>
+          </a:ln>
+          <a:effectLst/>
+        </p:spPr>
+        <p:style>
+          <a:lnRef idx="1">
+            <a:schemeClr val="accent1"/>
+          </a:lnRef>
+          <a:fillRef idx="3">
+            <a:schemeClr val="accent1"/>
+          </a:fillRef>
+          <a:effectRef idx="2">
+            <a:schemeClr val="accent1"/>
+          </a:effectRef>
+          <a:fontRef idx="minor">
+            <a:schemeClr val="lt1"/>
+          </a:fontRef>
+        </p:style>
+        <p:txBody>
+          <a:bodyPr rtlCol="0" anchor="ctr"/>
+          <a:lstStyle/>
+          <a:p>
+            <a:pPr algn="ctr"/>
+          </a:p>
+        </p:txBody>
+      </p:sp>
+      <p:pic>
+        <p:nvPicPr>
+          <p:cNvPr id="5" name="Picture 4" descr="schematic.png"/>
+          <p:cNvPicPr>
+            <a:picLocks noChangeAspect="1"/>
+          </p:cNvPicPr>
+          <p:nvPr/>
+        </p:nvPicPr>
+        <p:blipFill>
+          <a:blip r:embed="rId2"/>
+          <a:srcRect l="3000" t="2000" r="3000" b="3000"/>
+          <a:stretch>
+            <a:fillRect/>
+          </a:stretch>
+        </p:blipFill>
+        <p:spPr>
+          <a:xfrm>
+            <a:off x="640080" y="1508760"/>
+            <a:ext cx="5806440" cy="4343400"/>
+          </a:xfrm>
+          <a:prstGeom prst="rect">
+            <a:avLst/>
+          </a:prstGeom>
+        </p:spPr>
+      </p:pic>
+      <p:sp>
+        <p:nvSpPr>
+          <p:cNvPr id="6" name="Rounded Rectangle 5"/>
+          <p:cNvSpPr/>
+          <p:nvPr/>
+        </p:nvSpPr>
+        <p:spPr>
+          <a:xfrm>
+            <a:off x="822960" y="1691640"/>
+            <a:ext cx="2926080" cy="457200"/>
+          </a:xfrm>
+          <a:prstGeom prst="roundRect">
+            <a:avLst>
+              <a:gd name="adj" fmla="val 50000"/>
+            </a:avLst>
+          </a:prstGeom>
+          <a:solidFill>
+            <a:srgbClr val="1A212B"/>
+          </a:solidFill>
+          <a:ln w="12700">
+            <a:solidFill>
+              <a:srgbClr val="3FB950"/>
+            </a:solidFill>
+          </a:ln>
+          <a:effectLst/>
+        </p:spPr>
+        <p:style>
+          <a:lnRef idx="1">
+            <a:schemeClr val="accent1"/>
+          </a:lnRef>
+          <a:fillRef idx="3">
+            <a:schemeClr val="accent1"/>
+          </a:fillRef>
+          <a:effectRef idx="2">
+            <a:schemeClr val="accent1"/>
+          </a:effectRef>
+          <a:fontRef idx="minor">
+            <a:schemeClr val="lt1"/>
+          </a:fontRef>
+        </p:style>
+        <p:txBody>
+          <a:bodyPr rtlCol="0" anchor="ctr"/>
+          <a:lstStyle/>
+          <a:p>
+            <a:pPr algn="ctr"/>
+          </a:p>
+        </p:txBody>
+      </p:sp>
+      <p:sp>
+        <p:nvSpPr>
+          <p:cNvPr id="7" name="TextBox 6"/>
+          <p:cNvSpPr txBox="1"/>
+          <p:nvPr/>
+        </p:nvSpPr>
+        <p:spPr>
+          <a:xfrm>
+            <a:off x="822960" y="1691640"/>
+            <a:ext cx="2926080" cy="457200"/>
+          </a:xfrm>
+          <a:prstGeom prst="rect">
+            <a:avLst/>
+          </a:prstGeom>
+          <a:noFill/>
+        </p:spPr>
+        <p:txBody>
+          <a:bodyPr wrap="square" anchor="ctr" lIns="0" rIns="0" tIns="0" bIns="0">
+            <a:noAutofit/>
+          </a:bodyPr>
+          <a:lstStyle/>
+          <a:p>
+            <a:pPr algn="ctr">
+              <a:lnSpc>
+                <a:spcPct val="100000"/>
+              </a:lnSpc>
+            </a:pPr>
+            <a:r>
+              <a:rPr sz="1150" b="1" i="0">
+                <a:solidFill>
+                  <a:srgbClr val="3FB950"/>
+                </a:solidFill>
+                <a:latin typeface="Calibri"/>
+              </a:rPr>
+              <a:t>✓  Opens in KiCad 10 · structural ERC clean</a:t>
+            </a:r>
+          </a:p>
+        </p:txBody>
+      </p:sp>
+      <p:sp>
+        <p:nvSpPr>
+          <p:cNvPr id="8" name="Oval 7"/>
+          <p:cNvSpPr/>
+          <p:nvPr/>
+        </p:nvSpPr>
+        <p:spPr>
+          <a:xfrm>
+            <a:off x="6766560" y="1837944"/>
+            <a:ext cx="164592" cy="164592"/>
+          </a:xfrm>
+          <a:prstGeom prst="ellipse">
+            <a:avLst/>
+          </a:prstGeom>
+          <a:solidFill>
+            <a:srgbClr val="4F9CF9"/>
+          </a:solidFill>
+          <a:ln>
+            <a:noFill/>
+          </a:ln>
+          <a:effectLst/>
+        </p:spPr>
+        <p:style>
+          <a:lnRef idx="1">
+            <a:schemeClr val="accent1"/>
+          </a:lnRef>
+          <a:fillRef idx="3">
+            <a:schemeClr val="accent1"/>
+          </a:fillRef>
+          <a:effectRef idx="2">
+            <a:schemeClr val="accent1"/>
+          </a:effectRef>
+          <a:fontRef idx="minor">
+            <a:schemeClr val="lt1"/>
+          </a:fontRef>
+        </p:style>
+        <p:txBody>
+          <a:bodyPr rtlCol="0" anchor="ctr" wrap="none" lIns="0" rIns="0" tIns="0" bIns="0"/>
+          <a:lstStyle/>
+          <a:p>
+            <a:pPr algn="ctr"/>
+            <a:r>
+              <a:rPr sz="1400" b="1">
+                <a:solidFill>
+                  <a:srgbClr val="E6EDF3"/>
+                </a:solidFill>
+                <a:latin typeface="Calibri"/>
+              </a:rPr>
+              <a:t/>
+            </a:r>
+          </a:p>
+        </p:txBody>
+      </p:sp>
+      <p:sp>
+        <p:nvSpPr>
+          <p:cNvPr id="9" name="TextBox 8"/>
+          <p:cNvSpPr txBox="1"/>
+          <p:nvPr/>
+        </p:nvSpPr>
+        <p:spPr>
+          <a:xfrm>
+            <a:off x="7095744" y="1746504"/>
+            <a:ext cx="4471416" cy="365760"/>
+          </a:xfrm>
+          <a:prstGeom prst="rect">
+            <a:avLst/>
+          </a:prstGeom>
+          <a:noFill/>
+        </p:spPr>
+        <p:txBody>
+          <a:bodyPr wrap="square" anchor="t" lIns="0" rIns="0" tIns="0" bIns="0">
+            <a:noAutofit/>
+          </a:bodyPr>
+          <a:lstStyle/>
+          <a:p>
+            <a:pPr algn="l">
+              <a:lnSpc>
+                <a:spcPct val="100000"/>
+              </a:lnSpc>
+            </a:pPr>
+            <a:r>
+              <a:rPr sz="1650" b="1" i="0">
+                <a:solidFill>
+                  <a:srgbClr val="E6EDF3"/>
+                </a:solidFill>
+                <a:latin typeface="Calibri"/>
+              </a:rPr>
+              <a:t>Hierarchical KiCad scaffold</a:t>
+            </a:r>
+          </a:p>
+        </p:txBody>
+      </p:sp>
+      <p:sp>
+        <p:nvSpPr>
+          <p:cNvPr id="10" name="TextBox 9"/>
+          <p:cNvSpPr txBox="1"/>
+          <p:nvPr/>
+        </p:nvSpPr>
+        <p:spPr>
+          <a:xfrm>
+            <a:off x="7095744" y="2112264"/>
+            <a:ext cx="4471416" cy="731520"/>
+          </a:xfrm>
+          <a:prstGeom prst="rect">
+            <a:avLst/>
+          </a:prstGeom>
+          <a:noFill/>
+        </p:spPr>
+        <p:txBody>
+          <a:bodyPr wrap="square" anchor="t" lIns="0" rIns="0" tIns="0" bIns="0">
+            <a:noAutofit/>
+          </a:bodyPr>
+          <a:lstStyle/>
+          <a:p>
+            <a:pPr algn="l">
+              <a:lnSpc>
+                <a:spcPct val="110000"/>
+              </a:lnSpc>
+            </a:pPr>
+            <a:r>
+              <a:rPr sz="1350" b="0" i="0">
+                <a:solidFill>
+                  <a:srgbClr val="8B98A5"/>
+                </a:solidFill>
+                <a:latin typeface="Calibri"/>
+              </a:rPr>
+              <a:t>Sheets, power-port symbols, sheet pins and an embedded block diagram — opens &amp; passes structural checks.</a:t>
+            </a:r>
+          </a:p>
+        </p:txBody>
+      </p:sp>
+      <p:sp>
+        <p:nvSpPr>
+          <p:cNvPr id="11" name="Oval 10"/>
+          <p:cNvSpPr/>
+          <p:nvPr/>
+        </p:nvSpPr>
+        <p:spPr>
+          <a:xfrm>
+            <a:off x="6766560" y="3008376"/>
+            <a:ext cx="164592" cy="164592"/>
+          </a:xfrm>
+          <a:prstGeom prst="ellipse">
+            <a:avLst/>
+          </a:prstGeom>
+          <a:solidFill>
+            <a:srgbClr val="4F9CF9"/>
+          </a:solidFill>
+          <a:ln>
+            <a:noFill/>
+          </a:ln>
+          <a:effectLst/>
+        </p:spPr>
+        <p:style>
+          <a:lnRef idx="1">
+            <a:schemeClr val="accent1"/>
+          </a:lnRef>
+          <a:fillRef idx="3">
+            <a:schemeClr val="accent1"/>
+          </a:fillRef>
+          <a:effectRef idx="2">
+            <a:schemeClr val="accent1"/>
+          </a:effectRef>
+          <a:fontRef idx="minor">
+            <a:schemeClr val="lt1"/>
+          </a:fontRef>
+        </p:style>
+        <p:txBody>
+          <a:bodyPr rtlCol="0" anchor="ctr" wrap="none" lIns="0" rIns="0" tIns="0" bIns="0"/>
+          <a:lstStyle/>
+          <a:p>
+            <a:pPr algn="ctr"/>
+            <a:r>
+              <a:rPr sz="1400" b="1">
+                <a:solidFill>
+                  <a:srgbClr val="E6EDF3"/>
+                </a:solidFill>
+                <a:latin typeface="Calibri"/>
+              </a:rPr>
+              <a:t/>
+            </a:r>
+          </a:p>
+        </p:txBody>
+      </p:sp>
+      <p:sp>
+        <p:nvSpPr>
+          <p:cNvPr id="12" name="TextBox 11"/>
+          <p:cNvSpPr txBox="1"/>
+          <p:nvPr/>
+        </p:nvSpPr>
+        <p:spPr>
+          <a:xfrm>
+            <a:off x="7095744" y="2916936"/>
+            <a:ext cx="4471416" cy="365760"/>
+          </a:xfrm>
+          <a:prstGeom prst="rect">
+            <a:avLst/>
+          </a:prstGeom>
+          <a:noFill/>
+        </p:spPr>
+        <p:txBody>
+          <a:bodyPr wrap="square" anchor="t" lIns="0" rIns="0" tIns="0" bIns="0">
+            <a:noAutofit/>
+          </a:bodyPr>
+          <a:lstStyle/>
+          <a:p>
+            <a:pPr algn="l">
+              <a:lnSpc>
+                <a:spcPct val="100000"/>
+              </a:lnSpc>
+            </a:pPr>
+            <a:r>
+              <a:rPr sz="1650" b="1" i="0">
+                <a:solidFill>
+                  <a:srgbClr val="E6EDF3"/>
+                </a:solidFill>
+                <a:latin typeface="Calibri"/>
+              </a:rPr>
+              <a:t>PCB-readiness pack (prep)</a:t>
+            </a:r>
+          </a:p>
+        </p:txBody>
+      </p:sp>
+      <p:sp>
+        <p:nvSpPr>
+          <p:cNvPr id="13" name="TextBox 12"/>
+          <p:cNvSpPr txBox="1"/>
+          <p:nvPr/>
+        </p:nvSpPr>
+        <p:spPr>
+          <a:xfrm>
+            <a:off x="7095744" y="3282696"/>
+            <a:ext cx="4471416" cy="731520"/>
+          </a:xfrm>
+          <a:prstGeom prst="rect">
+            <a:avLst/>
+          </a:prstGeom>
+          <a:noFill/>
+        </p:spPr>
+        <p:txBody>
+          <a:bodyPr wrap="square" anchor="t" lIns="0" rIns="0" tIns="0" bIns="0">
+            <a:noAutofit/>
+          </a:bodyPr>
+          <a:lstStyle/>
+          <a:p>
+            <a:pPr algn="l">
+              <a:lnSpc>
+                <a:spcPct val="110000"/>
+              </a:lnSpc>
+            </a:pPr>
+            <a:r>
+              <a:rPr sz="1350" b="0" i="0">
+                <a:solidFill>
+                  <a:srgbClr val="8B98A5"/>
+                </a:solidFill>
+                <a:latin typeface="Calibri"/>
+              </a:rPr>
+              <a:t>Net classes, constraints (.kicad_dru), candidate parts, floorplan zones, a DFT/DFM checklist.</a:t>
+            </a:r>
+          </a:p>
+        </p:txBody>
+      </p:sp>
+      <p:sp>
+        <p:nvSpPr>
+          <p:cNvPr id="14" name="Oval 13"/>
+          <p:cNvSpPr/>
+          <p:nvPr/>
+        </p:nvSpPr>
+        <p:spPr>
+          <a:xfrm>
+            <a:off x="6766560" y="4178808"/>
+            <a:ext cx="164592" cy="164592"/>
+          </a:xfrm>
+          <a:prstGeom prst="ellipse">
+            <a:avLst/>
+          </a:prstGeom>
+          <a:solidFill>
+            <a:srgbClr val="4F9CF9"/>
+          </a:solidFill>
+          <a:ln>
+            <a:noFill/>
+          </a:ln>
+          <a:effectLst/>
+        </p:spPr>
+        <p:style>
+          <a:lnRef idx="1">
+            <a:schemeClr val="accent1"/>
+          </a:lnRef>
+          <a:fillRef idx="3">
+            <a:schemeClr val="accent1"/>
+          </a:fillRef>
+          <a:effectRef idx="2">
+            <a:schemeClr val="accent1"/>
+          </a:effectRef>
+          <a:fontRef idx="minor">
+            <a:schemeClr val="lt1"/>
+          </a:fontRef>
+        </p:style>
+        <p:txBody>
+          <a:bodyPr rtlCol="0" anchor="ctr" wrap="none" lIns="0" rIns="0" tIns="0" bIns="0"/>
+          <a:lstStyle/>
+          <a:p>
+            <a:pPr algn="ctr"/>
+            <a:r>
+              <a:rPr sz="1400" b="1">
+                <a:solidFill>
+                  <a:srgbClr val="E6EDF3"/>
+                </a:solidFill>
+                <a:latin typeface="Calibri"/>
+              </a:rPr>
+              <a:t/>
+            </a:r>
+          </a:p>
+        </p:txBody>
+      </p:sp>
+      <p:sp>
+        <p:nvSpPr>
+          <p:cNvPr id="15" name="TextBox 14"/>
+          <p:cNvSpPr txBox="1"/>
+          <p:nvPr/>
+        </p:nvSpPr>
+        <p:spPr>
+          <a:xfrm>
+            <a:off x="7095744" y="4087368"/>
+            <a:ext cx="4471416" cy="365760"/>
+          </a:xfrm>
+          <a:prstGeom prst="rect">
+            <a:avLst/>
+          </a:prstGeom>
+          <a:noFill/>
+        </p:spPr>
+        <p:txBody>
+          <a:bodyPr wrap="square" anchor="t" lIns="0" rIns="0" tIns="0" bIns="0">
+            <a:noAutofit/>
+          </a:bodyPr>
+          <a:lstStyle/>
+          <a:p>
+            <a:pPr algn="l">
+              <a:lnSpc>
+                <a:spcPct val="100000"/>
+              </a:lnSpc>
+            </a:pPr>
+            <a:r>
+              <a:rPr sz="1650" b="1" i="0">
+                <a:solidFill>
+                  <a:srgbClr val="E6EDF3"/>
+                </a:solidFill>
+                <a:latin typeface="Calibri"/>
+              </a:rPr>
+              <a:t>PDF report + KiCad ZIP</a:t>
+            </a:r>
+          </a:p>
+        </p:txBody>
+      </p:sp>
+      <p:sp>
+        <p:nvSpPr>
+          <p:cNvPr id="16" name="TextBox 15"/>
+          <p:cNvSpPr txBox="1"/>
+          <p:nvPr/>
+        </p:nvSpPr>
+        <p:spPr>
+          <a:xfrm>
+            <a:off x="7095744" y="4453128"/>
+            <a:ext cx="4471416" cy="731520"/>
+          </a:xfrm>
+          <a:prstGeom prst="rect">
+            <a:avLst/>
+          </a:prstGeom>
+          <a:noFill/>
+        </p:spPr>
+        <p:txBody>
+          <a:bodyPr wrap="square" anchor="t" lIns="0" rIns="0" tIns="0" bIns="0">
+            <a:noAutofit/>
+          </a:bodyPr>
+          <a:lstStyle/>
+          <a:p>
+            <a:pPr algn="l">
+              <a:lnSpc>
+                <a:spcPct val="110000"/>
+              </a:lnSpc>
+            </a:pPr>
+            <a:r>
+              <a:rPr sz="1350" b="0" i="0">
+                <a:solidFill>
+                  <a:srgbClr val="8B98A5"/>
+                </a:solidFill>
+                <a:latin typeface="Calibri"/>
+              </a:rPr>
+              <a:t>A shareable report and the full project, downloadable in one click.</a:t>
+            </a:r>
+          </a:p>
+        </p:txBody>
+      </p:sp>
+      <p:sp>
+        <p:nvSpPr>
+          <p:cNvPr id="17" name="Rounded Rectangle 16"/>
+          <p:cNvSpPr/>
+          <p:nvPr/>
+        </p:nvSpPr>
+        <p:spPr>
+          <a:xfrm>
+            <a:off x="6766560" y="5212080"/>
+            <a:ext cx="4800600" cy="868680"/>
+          </a:xfrm>
+          <a:prstGeom prst="roundRect">
+            <a:avLst>
+              <a:gd name="adj" fmla="val 8000"/>
+            </a:avLst>
+          </a:prstGeom>
+          <a:solidFill>
+            <a:srgbClr val="1A212B"/>
+          </a:solidFill>
+          <a:ln w="12700">
+            <a:solidFill>
+              <a:srgbClr val="2D3A48"/>
+            </a:solidFill>
+          </a:ln>
+          <a:effectLst/>
+        </p:spPr>
+        <p:style>
+          <a:lnRef idx="1">
+            <a:schemeClr val="accent1"/>
+          </a:lnRef>
+          <a:fillRef idx="3">
+            <a:schemeClr val="accent1"/>
+          </a:fillRef>
+          <a:effectRef idx="2">
+            <a:schemeClr val="accent1"/>
+          </a:effectRef>
+          <a:fontRef idx="minor">
+            <a:schemeClr val="lt1"/>
+          </a:fontRef>
+        </p:style>
+        <p:txBody>
+          <a:bodyPr rtlCol="0" anchor="ctr"/>
+          <a:lstStyle/>
+          <a:p>
+            <a:pPr algn="ctr"/>
+          </a:p>
+        </p:txBody>
+      </p:sp>
+      <p:sp>
+        <p:nvSpPr>
+          <p:cNvPr id="18" name="TextBox 17"/>
+          <p:cNvSpPr txBox="1"/>
+          <p:nvPr/>
+        </p:nvSpPr>
+        <p:spPr>
+          <a:xfrm>
+            <a:off x="7040880" y="5212080"/>
+            <a:ext cx="4251960" cy="868680"/>
+          </a:xfrm>
+          <a:prstGeom prst="rect">
+            <a:avLst/>
+          </a:prstGeom>
+          <a:noFill/>
+        </p:spPr>
+        <p:txBody>
+          <a:bodyPr wrap="square" anchor="ctr" lIns="0" rIns="0" tIns="0" bIns="0">
+            <a:noAutofit/>
+          </a:bodyPr>
+          <a:lstStyle/>
+          <a:p>
+            <a:pPr algn="l">
+              <a:lnSpc>
+                <a:spcPct val="110000"/>
+              </a:lnSpc>
+            </a:pPr>
+            <a:r>
+              <a:rPr sz="1300" b="0" i="0">
+                <a:solidFill>
+                  <a:srgbClr val="8B98A5"/>
+                </a:solidFill>
+                <a:latin typeface="Calibri"/>
+              </a:rPr>
+              <a:t>An engineering </a:t>
+            </a:r>
+            <a:r>
+              <a:rPr sz="1300" b="1" i="0">
+                <a:solidFill>
+                  <a:srgbClr val="E6EDF3"/>
+                </a:solidFill>
+                <a:latin typeface="Calibri"/>
+              </a:rPr>
+              <a:t>scaffold, not a finished design</a:t>
+            </a:r>
+            <a:r>
+              <a:rPr sz="1300" b="0" i="0">
+                <a:solidFill>
+                  <a:srgbClr val="8B98A5"/>
+                </a:solidFill>
+                <a:latin typeface="Calibri"/>
+              </a:rPr>
+              <a:t> — placeholder blocks the engineer completes. No production claims; a human stays responsible.</a:t>
+            </a:r>
+          </a:p>
+        </p:txBody>
+      </p:sp>
+      <p:sp>
+        <p:nvSpPr>
+          <p:cNvPr id="19" name="TextBox 18"/>
+          <p:cNvSpPr txBox="1"/>
+          <p:nvPr/>
+        </p:nvSpPr>
+        <p:spPr>
+          <a:xfrm>
+            <a:off x="640080" y="6437376"/>
+            <a:ext cx="4572000" cy="274320"/>
+          </a:xfrm>
+          <a:prstGeom prst="rect">
+            <a:avLst/>
+          </a:prstGeom>
+          <a:noFill/>
+        </p:spPr>
+        <p:txBody>
+          <a:bodyPr wrap="square" anchor="t" lIns="0" rIns="0" tIns="0" bIns="0">
+            <a:noAutofit/>
+          </a:bodyPr>
+          <a:lstStyle/>
+          <a:p>
+            <a:pPr algn="l">
+              <a:lnSpc>
+                <a:spcPct val="100000"/>
+              </a:lnSpc>
+            </a:pPr>
+            <a:r>
+              <a:rPr sz="1000" b="0" i="0">
+                <a:solidFill>
+                  <a:srgbClr val="8B98A5"/>
+                </a:solidFill>
+                <a:latin typeface="Calibri"/>
+              </a:rPr>
+              <a:t>AI Circuit Architect</a:t>
+            </a:r>
+          </a:p>
+        </p:txBody>
+      </p:sp>
+      <p:sp>
+        <p:nvSpPr>
+          <p:cNvPr id="20" name="TextBox 19"/>
+          <p:cNvSpPr txBox="1"/>
+          <p:nvPr/>
+        </p:nvSpPr>
+        <p:spPr>
+          <a:xfrm>
+            <a:off x="10607040" y="6437376"/>
+            <a:ext cx="1097280" cy="274320"/>
+          </a:xfrm>
+          <a:prstGeom prst="rect">
+            <a:avLst/>
+          </a:prstGeom>
+          <a:noFill/>
+        </p:spPr>
+        <p:txBody>
+          <a:bodyPr wrap="square" anchor="t" lIns="0" rIns="0" tIns="0" bIns="0">
+            <a:noAutofit/>
+          </a:bodyPr>
+          <a:lstStyle/>
+          <a:p>
+            <a:pPr algn="r">
+              <a:lnSpc>
+                <a:spcPct val="100000"/>
+              </a:lnSpc>
+            </a:pPr>
+            <a:r>
+              <a:rPr sz="1000" b="0" i="0">
+                <a:solidFill>
+                  <a:srgbClr val="8B98A5"/>
+                </a:solidFill>
+                <a:latin typeface="Calibri"/>
+              </a:rPr>
+              <a:t>7 / 9</a:t>
+            </a:r>
+          </a:p>
+        </p:txBody>
+      </p:sp>
+    </p:spTree>
+  </p:cSld>
+  <p:clrMapOvr>
+    <a:masterClrMapping/>
+  </p:clrMapOvr>
+</p:sld>
+</file>
+
+<file path=ppt/slides/slide8.xml><?xml version="1.0" encoding="utf-8"?>
+<p:sld xmlns:a="http://schemas.openxmlformats.org/drawingml/2006/main" xmlns:p="http://schemas.openxmlformats.org/presentationml/2006/main" xmlns:r="http://schemas.openxmlformats.org/officeDocument/2006/relationships">
+  <p:cSld>
+    <p:spTree>
+      <p:nvGrpSpPr>
+        <p:cNvPr id="1" name=""/>
+        <p:cNvGrpSpPr/>
+        <p:nvPr/>
+      </p:nvGrpSpPr>
+      <p:grpSpPr/>
+      <p:sp>
+        <p:nvSpPr>
+          <p:cNvPr id="2" name="Rectangle 1"/>
+          <p:cNvSpPr/>
+          <p:nvPr/>
+        </p:nvSpPr>
+        <p:spPr>
+          <a:xfrm>
+            <a:off x="0" y="0"/>
+            <a:ext cx="12191695" cy="6858000"/>
+          </a:xfrm>
+          <a:prstGeom prst="rect">
+            <a:avLst/>
+          </a:prstGeom>
+          <a:solidFill>
+            <a:srgbClr val="0F1419"/>
+          </a:solidFill>
+          <a:ln>
+            <a:noFill/>
+          </a:ln>
+          <a:effectLst/>
+        </p:spPr>
+        <p:style>
+          <a:lnRef idx="1">
+            <a:schemeClr val="accent1"/>
+          </a:lnRef>
+          <a:fillRef idx="3">
+            <a:schemeClr val="accent1"/>
+          </a:fillRef>
+          <a:effectRef idx="2">
+            <a:schemeClr val="accent1"/>
+          </a:effectRef>
+          <a:fontRef idx="minor">
+            <a:schemeClr val="lt1"/>
+          </a:fontRef>
+        </p:style>
+        <p:txBody>
+          <a:bodyPr rtlCol="0" anchor="ctr"/>
+          <a:lstStyle/>
+          <a:p>
+            <a:pPr algn="ctr"/>
+          </a:p>
+        </p:txBody>
+      </p:sp>
+      <p:sp>
+        <p:nvSpPr>
+          <p:cNvPr id="3" name="TextBox 2"/>
+          <p:cNvSpPr txBox="1"/>
+          <p:nvPr/>
+        </p:nvSpPr>
+        <p:spPr>
+          <a:xfrm>
+            <a:off x="640080" y="502920"/>
+            <a:ext cx="10881360" cy="914400"/>
+          </a:xfrm>
+          <a:prstGeom prst="rect">
+            <a:avLst/>
+          </a:prstGeom>
+          <a:noFill/>
+        </p:spPr>
+        <p:txBody>
+          <a:bodyPr wrap="square" anchor="t" lIns="0" rIns="0" tIns="0" bIns="0">
+            <a:noAutofit/>
+          </a:bodyPr>
+          <a:lstStyle/>
+          <a:p>
+            <a:pPr algn="l">
+              <a:lnSpc>
+                <a:spcPct val="100000"/>
+              </a:lnSpc>
+            </a:pPr>
+            <a:r>
+              <a:rPr sz="3400" b="1" i="0">
+                <a:solidFill>
+                  <a:srgbClr val="E6EDF3"/>
+                </a:solidFill>
+                <a:latin typeface="Calibri"/>
+              </a:rPr>
+              <a:t>AI prepares, the human decides</a:t>
+            </a:r>
+          </a:p>
+        </p:txBody>
+      </p:sp>
+      <p:sp>
+        <p:nvSpPr>
+          <p:cNvPr id="4" name="TextBox 3"/>
+          <p:cNvSpPr txBox="1"/>
+          <p:nvPr/>
+        </p:nvSpPr>
+        <p:spPr>
+          <a:xfrm>
+            <a:off x="640080" y="1417320"/>
+            <a:ext cx="5212080" cy="457200"/>
+          </a:xfrm>
+          <a:prstGeom prst="rect">
+            <a:avLst/>
+          </a:prstGeom>
+          <a:noFill/>
+        </p:spPr>
+        <p:txBody>
+          <a:bodyPr wrap="square" anchor="t" lIns="0" rIns="0" tIns="0" bIns="0">
+            <a:noAutofit/>
+          </a:bodyPr>
+          <a:lstStyle/>
+          <a:p>
+            <a:pPr algn="l">
+              <a:lnSpc>
+                <a:spcPct val="100000"/>
+              </a:lnSpc>
+            </a:pPr>
+            <a:r>
+              <a:rPr sz="1700" b="1" i="0">
+                <a:solidFill>
+                  <a:srgbClr val="4F9CF9"/>
+                </a:solidFill>
+                <a:latin typeface="Calibri"/>
+              </a:rPr>
+              <a:t>You stay in control</a:t>
+            </a:r>
+          </a:p>
+        </p:txBody>
+      </p:sp>
+      <p:sp>
+        <p:nvSpPr>
+          <p:cNvPr id="5" name="Oval 4"/>
+          <p:cNvSpPr/>
+          <p:nvPr/>
+        </p:nvSpPr>
+        <p:spPr>
+          <a:xfrm>
+            <a:off x="640080" y="2057400"/>
+            <a:ext cx="146304" cy="146304"/>
+          </a:xfrm>
+          <a:prstGeom prst="ellipse">
+            <a:avLst/>
+          </a:prstGeom>
+          <a:solidFill>
+            <a:srgbClr val="4F9CF9"/>
+          </a:solidFill>
+          <a:ln>
+            <a:noFill/>
+          </a:ln>
+          <a:effectLst/>
+        </p:spPr>
+        <p:style>
+          <a:lnRef idx="1">
+            <a:schemeClr val="accent1"/>
+          </a:lnRef>
+          <a:fillRef idx="3">
+            <a:schemeClr val="accent1"/>
+          </a:fillRef>
+          <a:effectRef idx="2">
+            <a:schemeClr val="accent1"/>
+          </a:effectRef>
+          <a:fontRef idx="minor">
+            <a:schemeClr val="lt1"/>
+          </a:fontRef>
+        </p:style>
+        <p:txBody>
+          <a:bodyPr rtlCol="0" anchor="ctr" wrap="none" lIns="0" rIns="0" tIns="0" bIns="0"/>
+          <a:lstStyle/>
+          <a:p>
+            <a:pPr algn="ctr"/>
+            <a:r>
+              <a:rPr sz="1400" b="1">
+                <a:solidFill>
+                  <a:srgbClr val="E6EDF3"/>
+                </a:solidFill>
+                <a:latin typeface="Calibri"/>
+              </a:rPr>
+              <a:t/>
+            </a:r>
+          </a:p>
+        </p:txBody>
+      </p:sp>
+      <p:sp>
+        <p:nvSpPr>
+          <p:cNvPr id="6" name="TextBox 5"/>
+          <p:cNvSpPr txBox="1"/>
+          <p:nvPr/>
+        </p:nvSpPr>
+        <p:spPr>
+          <a:xfrm>
+            <a:off x="932688" y="1975104"/>
+            <a:ext cx="4919472" cy="365760"/>
+          </a:xfrm>
+          <a:prstGeom prst="rect">
+            <a:avLst/>
+          </a:prstGeom>
+          <a:noFill/>
+        </p:spPr>
+        <p:txBody>
+          <a:bodyPr wrap="square" anchor="t" lIns="0" rIns="0" tIns="0" bIns="0">
+            <a:noAutofit/>
+          </a:bodyPr>
+          <a:lstStyle/>
+          <a:p>
+            <a:pPr algn="l">
+              <a:lnSpc>
+                <a:spcPct val="100000"/>
+              </a:lnSpc>
+            </a:pPr>
+            <a:r>
+              <a:rPr sz="1500" b="1" i="0">
+                <a:solidFill>
+                  <a:srgbClr val="E6EDF3"/>
+                </a:solidFill>
+                <a:latin typeface="Calibri"/>
+              </a:rPr>
+              <a:t>Approve, re-run or stop — per agent</a:t>
+            </a:r>
+          </a:p>
+        </p:txBody>
+      </p:sp>
+      <p:sp>
+        <p:nvSpPr>
+          <p:cNvPr id="7" name="TextBox 6"/>
+          <p:cNvSpPr txBox="1"/>
+          <p:nvPr/>
+        </p:nvSpPr>
+        <p:spPr>
+          <a:xfrm>
+            <a:off x="932688" y="2304288"/>
+            <a:ext cx="4919472" cy="640080"/>
+          </a:xfrm>
+          <a:prstGeom prst="rect">
+            <a:avLst/>
+          </a:prstGeom>
+          <a:noFill/>
+        </p:spPr>
+        <p:txBody>
+          <a:bodyPr wrap="square" anchor="t" lIns="0" rIns="0" tIns="0" bIns="0">
+            <a:noAutofit/>
+          </a:bodyPr>
+          <a:lstStyle/>
+          <a:p>
+            <a:pPr algn="l">
+              <a:lnSpc>
+                <a:spcPct val="108000"/>
+              </a:lnSpc>
+            </a:pPr>
+            <a:r>
+              <a:rPr sz="1300" b="0" i="0">
+                <a:solidFill>
+                  <a:srgbClr val="8B98A5"/>
+                </a:solidFill>
+                <a:latin typeface="Calibri"/>
+              </a:rPr>
+              <a:t>Every stage is shown before the next one runs.</a:t>
+            </a:r>
+          </a:p>
+        </p:txBody>
+      </p:sp>
+      <p:sp>
+        <p:nvSpPr>
+          <p:cNvPr id="8" name="Oval 7"/>
+          <p:cNvSpPr/>
+          <p:nvPr/>
+        </p:nvSpPr>
+        <p:spPr>
+          <a:xfrm>
+            <a:off x="640080" y="3108960"/>
+            <a:ext cx="146304" cy="146304"/>
+          </a:xfrm>
+          <a:prstGeom prst="ellipse">
+            <a:avLst/>
+          </a:prstGeom>
+          <a:solidFill>
+            <a:srgbClr val="4F9CF9"/>
+          </a:solidFill>
+          <a:ln>
+            <a:noFill/>
+          </a:ln>
+          <a:effectLst/>
+        </p:spPr>
+        <p:style>
+          <a:lnRef idx="1">
+            <a:schemeClr val="accent1"/>
+          </a:lnRef>
+          <a:fillRef idx="3">
+            <a:schemeClr val="accent1"/>
+          </a:fillRef>
+          <a:effectRef idx="2">
+            <a:schemeClr val="accent1"/>
+          </a:effectRef>
+          <a:fontRef idx="minor">
+            <a:schemeClr val="lt1"/>
+          </a:fontRef>
+        </p:style>
+        <p:txBody>
+          <a:bodyPr rtlCol="0" anchor="ctr" wrap="none" lIns="0" rIns="0" tIns="0" bIns="0"/>
+          <a:lstStyle/>
+          <a:p>
+            <a:pPr algn="ctr"/>
+            <a:r>
+              <a:rPr sz="1400" b="1">
+                <a:solidFill>
+                  <a:srgbClr val="E6EDF3"/>
+                </a:solidFill>
+                <a:latin typeface="Calibri"/>
+              </a:rPr>
+              <a:t/>
+            </a:r>
+          </a:p>
+        </p:txBody>
+      </p:sp>
+      <p:sp>
+        <p:nvSpPr>
+          <p:cNvPr id="9" name="TextBox 8"/>
+          <p:cNvSpPr txBox="1"/>
+          <p:nvPr/>
+        </p:nvSpPr>
+        <p:spPr>
+          <a:xfrm>
+            <a:off x="932688" y="3026664"/>
+            <a:ext cx="4919472" cy="365760"/>
+          </a:xfrm>
+          <a:prstGeom prst="rect">
+            <a:avLst/>
+          </a:prstGeom>
+          <a:noFill/>
+        </p:spPr>
+        <p:txBody>
+          <a:bodyPr wrap="square" anchor="t" lIns="0" rIns="0" tIns="0" bIns="0">
+            <a:noAutofit/>
+          </a:bodyPr>
+          <a:lstStyle/>
+          <a:p>
+            <a:pPr algn="l">
+              <a:lnSpc>
+                <a:spcPct val="100000"/>
+              </a:lnSpc>
+            </a:pPr>
+            <a:r>
+              <a:rPr sz="1500" b="1" i="0">
+                <a:solidFill>
+                  <a:srgbClr val="E6EDF3"/>
+                </a:solidFill>
+                <a:latin typeface="Calibri"/>
+              </a:rPr>
+              <a:t>One-click or step-by-step</a:t>
+            </a:r>
+          </a:p>
+        </p:txBody>
+      </p:sp>
+      <p:sp>
+        <p:nvSpPr>
+          <p:cNvPr id="10" name="TextBox 9"/>
+          <p:cNvSpPr txBox="1"/>
+          <p:nvPr/>
+        </p:nvSpPr>
+        <p:spPr>
+          <a:xfrm>
+            <a:off x="932688" y="3355848"/>
+            <a:ext cx="4919472" cy="640080"/>
+          </a:xfrm>
+          <a:prstGeom prst="rect">
+            <a:avLst/>
+          </a:prstGeom>
+          <a:noFill/>
+        </p:spPr>
+        <p:txBody>
+          <a:bodyPr wrap="square" anchor="t" lIns="0" rIns="0" tIns="0" bIns="0">
+            <a:noAutofit/>
+          </a:bodyPr>
+          <a:lstStyle/>
+          <a:p>
+            <a:pPr algn="l">
+              <a:lnSpc>
+                <a:spcPct val="108000"/>
+              </a:lnSpc>
+            </a:pPr>
+            <a:r>
+              <a:rPr sz="1300" b="0" i="0">
+                <a:solidFill>
+                  <a:srgbClr val="8B98A5"/>
+                </a:solidFill>
+                <a:latin typeface="Calibri"/>
+              </a:rPr>
+              <a:t>Auto-run to watch the team, or sign off each stage yourself.</a:t>
+            </a:r>
+          </a:p>
+        </p:txBody>
+      </p:sp>
+      <p:sp>
+        <p:nvSpPr>
+          <p:cNvPr id="11" name="Oval 10"/>
+          <p:cNvSpPr/>
+          <p:nvPr/>
+        </p:nvSpPr>
+        <p:spPr>
+          <a:xfrm>
+            <a:off x="640080" y="4160520"/>
+            <a:ext cx="146304" cy="146304"/>
+          </a:xfrm>
+          <a:prstGeom prst="ellipse">
+            <a:avLst/>
+          </a:prstGeom>
+          <a:solidFill>
+            <a:srgbClr val="4F9CF9"/>
+          </a:solidFill>
+          <a:ln>
+            <a:noFill/>
+          </a:ln>
+          <a:effectLst/>
+        </p:spPr>
+        <p:style>
+          <a:lnRef idx="1">
+            <a:schemeClr val="accent1"/>
+          </a:lnRef>
+          <a:fillRef idx="3">
+            <a:schemeClr val="accent1"/>
+          </a:fillRef>
+          <a:effectRef idx="2">
+            <a:schemeClr val="accent1"/>
+          </a:effectRef>
+          <a:fontRef idx="minor">
+            <a:schemeClr val="lt1"/>
+          </a:fontRef>
+        </p:style>
+        <p:txBody>
+          <a:bodyPr rtlCol="0" anchor="ctr" wrap="none" lIns="0" rIns="0" tIns="0" bIns="0"/>
+          <a:lstStyle/>
+          <a:p>
+            <a:pPr algn="ctr"/>
+            <a:r>
+              <a:rPr sz="1400" b="1">
+                <a:solidFill>
+                  <a:srgbClr val="E6EDF3"/>
+                </a:solidFill>
+                <a:latin typeface="Calibri"/>
+              </a:rPr>
+              <a:t/>
+            </a:r>
+          </a:p>
+        </p:txBody>
+      </p:sp>
+      <p:sp>
+        <p:nvSpPr>
+          <p:cNvPr id="12" name="TextBox 11"/>
+          <p:cNvSpPr txBox="1"/>
+          <p:nvPr/>
+        </p:nvSpPr>
+        <p:spPr>
+          <a:xfrm>
+            <a:off x="932688" y="4078224"/>
+            <a:ext cx="4919472" cy="365760"/>
+          </a:xfrm>
+          <a:prstGeom prst="rect">
+            <a:avLst/>
+          </a:prstGeom>
+          <a:noFill/>
+        </p:spPr>
+        <p:txBody>
+          <a:bodyPr wrap="square" anchor="t" lIns="0" rIns="0" tIns="0" bIns="0">
+            <a:noAutofit/>
+          </a:bodyPr>
+          <a:lstStyle/>
+          <a:p>
+            <a:pPr algn="l">
+              <a:lnSpc>
+                <a:spcPct val="100000"/>
+              </a:lnSpc>
+            </a:pPr>
+            <a:r>
+              <a:rPr sz="1500" b="1" i="0">
+                <a:solidFill>
+                  <a:srgbClr val="E6EDF3"/>
+                </a:solidFill>
+                <a:latin typeface="Calibri"/>
+              </a:rPr>
+              <a:t>Audience personas</a:t>
+            </a:r>
+          </a:p>
+        </p:txBody>
+      </p:sp>
+      <p:sp>
+        <p:nvSpPr>
+          <p:cNvPr id="13" name="TextBox 12"/>
+          <p:cNvSpPr txBox="1"/>
+          <p:nvPr/>
+        </p:nvSpPr>
+        <p:spPr>
+          <a:xfrm>
+            <a:off x="932688" y="4407408"/>
+            <a:ext cx="4919472" cy="640080"/>
+          </a:xfrm>
+          <a:prstGeom prst="rect">
+            <a:avLst/>
+          </a:prstGeom>
+          <a:noFill/>
+        </p:spPr>
+        <p:txBody>
+          <a:bodyPr wrap="square" anchor="t" lIns="0" rIns="0" tIns="0" bIns="0">
+            <a:noAutofit/>
+          </a:bodyPr>
+          <a:lstStyle/>
+          <a:p>
+            <a:pPr algn="l">
+              <a:lnSpc>
+                <a:spcPct val="108000"/>
+              </a:lnSpc>
+            </a:pPr>
+            <a:r>
+              <a:rPr sz="1300" b="0" i="0">
+                <a:solidFill>
+                  <a:srgbClr val="8B98A5"/>
+                </a:solidFill>
+                <a:latin typeface="Calibri"/>
+              </a:rPr>
+              <a:t>Professional / Student / Maker re-tones every explanation.</a:t>
+            </a:r>
+          </a:p>
+        </p:txBody>
+      </p:sp>
+      <p:sp>
+        <p:nvSpPr>
+          <p:cNvPr id="14" name="TextBox 13"/>
+          <p:cNvSpPr txBox="1"/>
+          <p:nvPr/>
+        </p:nvSpPr>
+        <p:spPr>
+          <a:xfrm>
+            <a:off x="6400800" y="1417320"/>
+            <a:ext cx="5212080" cy="457200"/>
+          </a:xfrm>
+          <a:prstGeom prst="rect">
+            <a:avLst/>
+          </a:prstGeom>
+          <a:noFill/>
+        </p:spPr>
+        <p:txBody>
+          <a:bodyPr wrap="square" anchor="t" lIns="0" rIns="0" tIns="0" bIns="0">
+            <a:noAutofit/>
+          </a:bodyPr>
+          <a:lstStyle/>
+          <a:p>
+            <a:pPr algn="l">
+              <a:lnSpc>
+                <a:spcPct val="100000"/>
+              </a:lnSpc>
+            </a:pPr>
+            <a:r>
+              <a:rPr sz="1700" b="1" i="0">
+                <a:solidFill>
+                  <a:srgbClr val="E6EDF3"/>
+                </a:solidFill>
+                <a:latin typeface="Calibri"/>
+              </a:rPr>
+              <a:t>Built with</a:t>
+            </a:r>
+          </a:p>
+        </p:txBody>
+      </p:sp>
+      <p:sp>
+        <p:nvSpPr>
+          <p:cNvPr id="15" name="Rounded Rectangle 14"/>
+          <p:cNvSpPr/>
+          <p:nvPr/>
+        </p:nvSpPr>
+        <p:spPr>
+          <a:xfrm>
+            <a:off x="6400800" y="2011680"/>
+            <a:ext cx="5212080" cy="841248"/>
+          </a:xfrm>
+          <a:prstGeom prst="roundRect">
+            <a:avLst>
+              <a:gd name="adj" fmla="val 8000"/>
+            </a:avLst>
+          </a:prstGeom>
+          <a:solidFill>
+            <a:srgbClr val="1A212B"/>
+          </a:solidFill>
+          <a:ln w="12700">
+            <a:solidFill>
+              <a:srgbClr val="2D3A48"/>
+            </a:solidFill>
+          </a:ln>
+          <a:effectLst/>
+        </p:spPr>
+        <p:style>
+          <a:lnRef idx="1">
+            <a:schemeClr val="accent1"/>
+          </a:lnRef>
+          <a:fillRef idx="3">
+            <a:schemeClr val="accent1"/>
+          </a:fillRef>
+          <a:effectRef idx="2">
+            <a:schemeClr val="accent1"/>
+          </a:effectRef>
+          <a:fontRef idx="minor">
+            <a:schemeClr val="lt1"/>
+          </a:fontRef>
+        </p:style>
+        <p:txBody>
+          <a:bodyPr rtlCol="0" anchor="ctr"/>
+          <a:lstStyle/>
+          <a:p>
+            <a:pPr algn="ctr"/>
+          </a:p>
+        </p:txBody>
+      </p:sp>
+      <p:sp>
+        <p:nvSpPr>
+          <p:cNvPr id="16" name="TextBox 15"/>
+          <p:cNvSpPr txBox="1"/>
+          <p:nvPr/>
+        </p:nvSpPr>
+        <p:spPr>
+          <a:xfrm>
+            <a:off x="6675120" y="2130552"/>
+            <a:ext cx="4663440" cy="365760"/>
+          </a:xfrm>
+          <a:prstGeom prst="rect">
+            <a:avLst/>
+          </a:prstGeom>
+          <a:noFill/>
+        </p:spPr>
+        <p:txBody>
+          <a:bodyPr wrap="square" anchor="t" lIns="0" rIns="0" tIns="0" bIns="0">
+            <a:noAutofit/>
+          </a:bodyPr>
+          <a:lstStyle/>
+          <a:p>
+            <a:pPr algn="l">
+              <a:lnSpc>
+                <a:spcPct val="100000"/>
+              </a:lnSpc>
+            </a:pPr>
+            <a:r>
+              <a:rPr sz="1500" b="1" i="0">
+                <a:solidFill>
+                  <a:srgbClr val="E6EDF3"/>
+                </a:solidFill>
+                <a:latin typeface="Calibri"/>
+              </a:rPr>
+              <a:t>Qwen</a:t>
+            </a:r>
+          </a:p>
+        </p:txBody>
+      </p:sp>
+      <p:sp>
+        <p:nvSpPr>
+          <p:cNvPr id="17" name="TextBox 16"/>
+          <p:cNvSpPr txBox="1"/>
+          <p:nvPr/>
+        </p:nvSpPr>
+        <p:spPr>
+          <a:xfrm>
+            <a:off x="6675120" y="2468880"/>
+            <a:ext cx="4663440" cy="329184"/>
+          </a:xfrm>
+          <a:prstGeom prst="rect">
+            <a:avLst/>
+          </a:prstGeom>
+          <a:noFill/>
+        </p:spPr>
+        <p:txBody>
+          <a:bodyPr wrap="square" anchor="t" lIns="0" rIns="0" tIns="0" bIns="0">
+            <a:noAutofit/>
+          </a:bodyPr>
+          <a:lstStyle/>
+          <a:p>
+            <a:pPr algn="l">
+              <a:lnSpc>
+                <a:spcPct val="100000"/>
+              </a:lnSpc>
+            </a:pPr>
+            <a:r>
+              <a:rPr sz="1200" b="0" i="0">
+                <a:solidFill>
+                  <a:srgbClr val="8B98A5"/>
+                </a:solidFill>
+                <a:latin typeface="Calibri"/>
+              </a:rPr>
+              <a:t>qwen-plus / qwen-max, OpenAI-compatible API</a:t>
+            </a:r>
+          </a:p>
+        </p:txBody>
+      </p:sp>
+      <p:sp>
+        <p:nvSpPr>
+          <p:cNvPr id="18" name="Rounded Rectangle 17"/>
+          <p:cNvSpPr/>
+          <p:nvPr/>
+        </p:nvSpPr>
+        <p:spPr>
+          <a:xfrm>
+            <a:off x="6400800" y="2990088"/>
+            <a:ext cx="5212080" cy="841248"/>
+          </a:xfrm>
+          <a:prstGeom prst="roundRect">
+            <a:avLst>
+              <a:gd name="adj" fmla="val 8000"/>
+            </a:avLst>
+          </a:prstGeom>
+          <a:solidFill>
+            <a:srgbClr val="1A212B"/>
+          </a:solidFill>
+          <a:ln w="12700">
+            <a:solidFill>
+              <a:srgbClr val="2D3A48"/>
+            </a:solidFill>
+          </a:ln>
+          <a:effectLst/>
+        </p:spPr>
+        <p:style>
+          <a:lnRef idx="1">
+            <a:schemeClr val="accent1"/>
+          </a:lnRef>
+          <a:fillRef idx="3">
+            <a:schemeClr val="accent1"/>
+          </a:fillRef>
+          <a:effectRef idx="2">
+            <a:schemeClr val="accent1"/>
+          </a:effectRef>
+          <a:fontRef idx="minor">
+            <a:schemeClr val="lt1"/>
+          </a:fontRef>
+        </p:style>
+        <p:txBody>
+          <a:bodyPr rtlCol="0" anchor="ctr"/>
+          <a:lstStyle/>
+          <a:p>
+            <a:pPr algn="ctr"/>
+          </a:p>
+        </p:txBody>
+      </p:sp>
+      <p:sp>
+        <p:nvSpPr>
+          <p:cNvPr id="19" name="TextBox 18"/>
+          <p:cNvSpPr txBox="1"/>
+          <p:nvPr/>
+        </p:nvSpPr>
+        <p:spPr>
+          <a:xfrm>
+            <a:off x="6675120" y="3108960"/>
+            <a:ext cx="4663440" cy="365760"/>
+          </a:xfrm>
+          <a:prstGeom prst="rect">
+            <a:avLst/>
+          </a:prstGeom>
+          <a:noFill/>
+        </p:spPr>
+        <p:txBody>
+          <a:bodyPr wrap="square" anchor="t" lIns="0" rIns="0" tIns="0" bIns="0">
+            <a:noAutofit/>
+          </a:bodyPr>
+          <a:lstStyle/>
+          <a:p>
+            <a:pPr algn="l">
+              <a:lnSpc>
+                <a:spcPct val="100000"/>
+              </a:lnSpc>
+            </a:pPr>
+            <a:r>
+              <a:rPr sz="1500" b="1" i="0">
+                <a:solidFill>
+                  <a:srgbClr val="E6EDF3"/>
+                </a:solidFill>
+                <a:latin typeface="Calibri"/>
+              </a:rPr>
+              <a:t>FastAPI + Alpine.js</a:t>
+            </a:r>
+          </a:p>
+        </p:txBody>
+      </p:sp>
+      <p:sp>
+        <p:nvSpPr>
+          <p:cNvPr id="20" name="TextBox 19"/>
+          <p:cNvSpPr txBox="1"/>
+          <p:nvPr/>
+        </p:nvSpPr>
+        <p:spPr>
+          <a:xfrm>
+            <a:off x="6675120" y="3447288"/>
+            <a:ext cx="4663440" cy="329184"/>
+          </a:xfrm>
+          <a:prstGeom prst="rect">
+            <a:avLst/>
+          </a:prstGeom>
+          <a:noFill/>
+        </p:spPr>
+        <p:txBody>
+          <a:bodyPr wrap="square" anchor="t" lIns="0" rIns="0" tIns="0" bIns="0">
+            <a:noAutofit/>
+          </a:bodyPr>
+          <a:lstStyle/>
+          <a:p>
+            <a:pPr algn="l">
+              <a:lnSpc>
+                <a:spcPct val="100000"/>
+              </a:lnSpc>
+            </a:pPr>
+            <a:r>
+              <a:rPr sz="1200" b="0" i="0">
+                <a:solidFill>
+                  <a:srgbClr val="8B98A5"/>
+                </a:solidFill>
+                <a:latin typeface="Calibri"/>
+              </a:rPr>
+              <a:t>Python backend, live single-page UI (ELK diagrams)</a:t>
+            </a:r>
+          </a:p>
+        </p:txBody>
+      </p:sp>
+      <p:sp>
+        <p:nvSpPr>
+          <p:cNvPr id="21" name="Rounded Rectangle 20"/>
+          <p:cNvSpPr/>
+          <p:nvPr/>
+        </p:nvSpPr>
+        <p:spPr>
+          <a:xfrm>
+            <a:off x="6400800" y="3968496"/>
+            <a:ext cx="5212080" cy="841248"/>
+          </a:xfrm>
+          <a:prstGeom prst="roundRect">
+            <a:avLst>
+              <a:gd name="adj" fmla="val 8000"/>
+            </a:avLst>
+          </a:prstGeom>
+          <a:solidFill>
+            <a:srgbClr val="1A212B"/>
+          </a:solidFill>
+          <a:ln w="12700">
+            <a:solidFill>
+              <a:srgbClr val="2D3A48"/>
+            </a:solidFill>
+          </a:ln>
+          <a:effectLst/>
+        </p:spPr>
+        <p:style>
+          <a:lnRef idx="1">
+            <a:schemeClr val="accent1"/>
+          </a:lnRef>
+          <a:fillRef idx="3">
+            <a:schemeClr val="accent1"/>
+          </a:fillRef>
+          <a:effectRef idx="2">
+            <a:schemeClr val="accent1"/>
+          </a:effectRef>
+          <a:fontRef idx="minor">
+            <a:schemeClr val="lt1"/>
+          </a:fontRef>
+        </p:style>
+        <p:txBody>
+          <a:bodyPr rtlCol="0" anchor="ctr"/>
+          <a:lstStyle/>
+          <a:p>
+            <a:pPr algn="ctr"/>
+          </a:p>
+        </p:txBody>
+      </p:sp>
+      <p:sp>
+        <p:nvSpPr>
+          <p:cNvPr id="22" name="TextBox 21"/>
+          <p:cNvSpPr txBox="1"/>
+          <p:nvPr/>
+        </p:nvSpPr>
+        <p:spPr>
+          <a:xfrm>
+            <a:off x="6675120" y="4087368"/>
+            <a:ext cx="4663440" cy="365760"/>
+          </a:xfrm>
+          <a:prstGeom prst="rect">
+            <a:avLst/>
+          </a:prstGeom>
+          <a:noFill/>
+        </p:spPr>
+        <p:txBody>
+          <a:bodyPr wrap="square" anchor="t" lIns="0" rIns="0" tIns="0" bIns="0">
+            <a:noAutofit/>
+          </a:bodyPr>
+          <a:lstStyle/>
+          <a:p>
+            <a:pPr algn="l">
+              <a:lnSpc>
+                <a:spcPct val="100000"/>
+              </a:lnSpc>
+            </a:pPr>
+            <a:r>
+              <a:rPr sz="1500" b="1" i="0">
+                <a:solidFill>
+                  <a:srgbClr val="E6EDF3"/>
+                </a:solidFill>
+                <a:latin typeface="Calibri"/>
+              </a:rPr>
+              <a:t>KiCad-CLI 10</a:t>
+            </a:r>
+          </a:p>
+        </p:txBody>
+      </p:sp>
+      <p:sp>
+        <p:nvSpPr>
+          <p:cNvPr id="23" name="TextBox 22"/>
+          <p:cNvSpPr txBox="1"/>
+          <p:nvPr/>
+        </p:nvSpPr>
+        <p:spPr>
+          <a:xfrm>
+            <a:off x="6675120" y="4425696"/>
+            <a:ext cx="4663440" cy="329184"/>
+          </a:xfrm>
+          <a:prstGeom prst="rect">
+            <a:avLst/>
+          </a:prstGeom>
+          <a:noFill/>
+        </p:spPr>
+        <p:txBody>
+          <a:bodyPr wrap="square" anchor="t" lIns="0" rIns="0" tIns="0" bIns="0">
+            <a:noAutofit/>
+          </a:bodyPr>
+          <a:lstStyle/>
+          <a:p>
+            <a:pPr algn="l">
+              <a:lnSpc>
+                <a:spcPct val="100000"/>
+              </a:lnSpc>
+            </a:pPr>
+            <a:r>
+              <a:rPr sz="1200" b="0" i="0">
+                <a:solidFill>
+                  <a:srgbClr val="8B98A5"/>
+                </a:solidFill>
+                <a:latin typeface="Calibri"/>
+              </a:rPr>
+              <a:t>Real open / export / structural-ERC validation</a:t>
+            </a:r>
+          </a:p>
+        </p:txBody>
+      </p:sp>
+      <p:sp>
+        <p:nvSpPr>
+          <p:cNvPr id="24" name="Rounded Rectangle 23"/>
+          <p:cNvSpPr/>
+          <p:nvPr/>
+        </p:nvSpPr>
+        <p:spPr>
+          <a:xfrm>
+            <a:off x="6400800" y="4946904"/>
+            <a:ext cx="5212080" cy="841248"/>
+          </a:xfrm>
+          <a:prstGeom prst="roundRect">
+            <a:avLst>
+              <a:gd name="adj" fmla="val 8000"/>
+            </a:avLst>
+          </a:prstGeom>
+          <a:solidFill>
+            <a:srgbClr val="1A212B"/>
+          </a:solidFill>
+          <a:ln w="12700">
+            <a:solidFill>
+              <a:srgbClr val="2D3A48"/>
+            </a:solidFill>
+          </a:ln>
+          <a:effectLst/>
+        </p:spPr>
+        <p:style>
+          <a:lnRef idx="1">
+            <a:schemeClr val="accent1"/>
+          </a:lnRef>
+          <a:fillRef idx="3">
+            <a:schemeClr val="accent1"/>
+          </a:fillRef>
+          <a:effectRef idx="2">
+            <a:schemeClr val="accent1"/>
+          </a:effectRef>
+          <a:fontRef idx="minor">
+            <a:schemeClr val="lt1"/>
+          </a:fontRef>
+        </p:style>
+        <p:txBody>
+          <a:bodyPr rtlCol="0" anchor="ctr"/>
+          <a:lstStyle/>
+          <a:p>
+            <a:pPr algn="ctr"/>
+          </a:p>
+        </p:txBody>
+      </p:sp>
+      <p:sp>
+        <p:nvSpPr>
+          <p:cNvPr id="25" name="TextBox 24"/>
+          <p:cNvSpPr txBox="1"/>
+          <p:nvPr/>
+        </p:nvSpPr>
+        <p:spPr>
+          <a:xfrm>
+            <a:off x="6675120" y="5065776"/>
+            <a:ext cx="4663440" cy="365760"/>
+          </a:xfrm>
+          <a:prstGeom prst="rect">
+            <a:avLst/>
+          </a:prstGeom>
+          <a:noFill/>
+        </p:spPr>
+        <p:txBody>
+          <a:bodyPr wrap="square" anchor="t" lIns="0" rIns="0" tIns="0" bIns="0">
+            <a:noAutofit/>
+          </a:bodyPr>
+          <a:lstStyle/>
+          <a:p>
+            <a:pPr algn="l">
+              <a:lnSpc>
+                <a:spcPct val="100000"/>
+              </a:lnSpc>
+            </a:pPr>
+            <a:r>
+              <a:rPr sz="1500" b="1" i="0">
+                <a:solidFill>
+                  <a:srgbClr val="E6EDF3"/>
+                </a:solidFill>
+                <a:latin typeface="Calibri"/>
+              </a:rPr>
+              <a:t>WeasyPrint · Docker</a:t>
+            </a:r>
+          </a:p>
+        </p:txBody>
+      </p:sp>
+      <p:sp>
+        <p:nvSpPr>
+          <p:cNvPr id="26" name="TextBox 25"/>
+          <p:cNvSpPr txBox="1"/>
+          <p:nvPr/>
+        </p:nvSpPr>
+        <p:spPr>
+          <a:xfrm>
+            <a:off x="6675120" y="5404104"/>
+            <a:ext cx="4663440" cy="329184"/>
+          </a:xfrm>
+          <a:prstGeom prst="rect">
+            <a:avLst/>
+          </a:prstGeom>
+          <a:noFill/>
+        </p:spPr>
+        <p:txBody>
+          <a:bodyPr wrap="square" anchor="t" lIns="0" rIns="0" tIns="0" bIns="0">
+            <a:noAutofit/>
+          </a:bodyPr>
+          <a:lstStyle/>
+          <a:p>
+            <a:pPr algn="l">
+              <a:lnSpc>
+                <a:spcPct val="100000"/>
+              </a:lnSpc>
+            </a:pPr>
+            <a:r>
+              <a:rPr sz="1200" b="0" i="0">
+                <a:solidFill>
+                  <a:srgbClr val="8B98A5"/>
+                </a:solidFill>
+                <a:latin typeface="Calibri"/>
+              </a:rPr>
+              <a:t>PDF report; one-image deploy</a:t>
+            </a:r>
+          </a:p>
+        </p:txBody>
+      </p:sp>
+      <p:sp>
+        <p:nvSpPr>
+          <p:cNvPr id="27" name="TextBox 26"/>
+          <p:cNvSpPr txBox="1"/>
+          <p:nvPr/>
+        </p:nvSpPr>
+        <p:spPr>
+          <a:xfrm>
+            <a:off x="640080" y="6437376"/>
+            <a:ext cx="4572000" cy="274320"/>
+          </a:xfrm>
+          <a:prstGeom prst="rect">
+            <a:avLst/>
+          </a:prstGeom>
+          <a:noFill/>
+        </p:spPr>
+        <p:txBody>
+          <a:bodyPr wrap="square" anchor="t" lIns="0" rIns="0" tIns="0" bIns="0">
+            <a:noAutofit/>
+          </a:bodyPr>
+          <a:lstStyle/>
+          <a:p>
+            <a:pPr algn="l">
+              <a:lnSpc>
+                <a:spcPct val="100000"/>
+              </a:lnSpc>
+            </a:pPr>
+            <a:r>
+              <a:rPr sz="1000" b="0" i="0">
+                <a:solidFill>
+                  <a:srgbClr val="8B98A5"/>
+                </a:solidFill>
+                <a:latin typeface="Calibri"/>
+              </a:rPr>
+              <a:t>AI Circuit Architect</a:t>
+            </a:r>
+          </a:p>
+        </p:txBody>
+      </p:sp>
+      <p:sp>
+        <p:nvSpPr>
+          <p:cNvPr id="28" name="TextBox 27"/>
+          <p:cNvSpPr txBox="1"/>
+          <p:nvPr/>
+        </p:nvSpPr>
+        <p:spPr>
+          <a:xfrm>
+            <a:off x="10607040" y="6437376"/>
+            <a:ext cx="1097280" cy="274320"/>
+          </a:xfrm>
+          <a:prstGeom prst="rect">
+            <a:avLst/>
+          </a:prstGeom>
+          <a:noFill/>
+        </p:spPr>
+        <p:txBody>
+          <a:bodyPr wrap="square" anchor="t" lIns="0" rIns="0" tIns="0" bIns="0">
+            <a:noAutofit/>
+          </a:bodyPr>
+          <a:lstStyle/>
+          <a:p>
+            <a:pPr algn="r">
+              <a:lnSpc>
+                <a:spcPct val="100000"/>
+              </a:lnSpc>
+            </a:pPr>
+            <a:r>
+              <a:rPr sz="1000" b="0" i="0">
+                <a:solidFill>
+                  <a:srgbClr val="8B98A5"/>
+                </a:solidFill>
+                <a:latin typeface="Calibri"/>
+              </a:rPr>
+              <a:t>8 / 9</a:t>
+            </a:r>
+          </a:p>
+        </p:txBody>
+      </p:sp>
+    </p:spTree>
+  </p:cSld>
+  <p:clrMapOvr>
+    <a:masterClrMapping/>
+  </p:clrMapOvr>
+</p:sld>
+</file>
+
+<file path=ppt/slides/slide9.xml><?xml version="1.0" encoding="utf-8"?>
+<p:sld xmlns:a="http://schemas.openxmlformats.org/drawingml/2006/main" xmlns:p="http://schemas.openxmlformats.org/presentationml/2006/main" xmlns:r="http://schemas.openxmlformats.org/officeDocument/2006/relationships">
+  <p:cSld>
+    <p:spTree>
+      <p:nvGrpSpPr>
+        <p:cNvPr id="1" name=""/>
+        <p:cNvGrpSpPr/>
+        <p:nvPr/>
+      </p:nvGrpSpPr>
+      <p:grpSpPr/>
+      <p:sp>
+        <p:nvSpPr>
+          <p:cNvPr id="2" name="Rectangle 1"/>
+          <p:cNvSpPr/>
+          <p:nvPr/>
+        </p:nvSpPr>
+        <p:spPr>
+          <a:xfrm>
+            <a:off x="0" y="0"/>
+            <a:ext cx="12191695" cy="6858000"/>
+          </a:xfrm>
+          <a:prstGeom prst="rect">
+            <a:avLst/>
+          </a:prstGeom>
+          <a:solidFill>
+            <a:srgbClr val="0F1419"/>
+          </a:solidFill>
+          <a:ln>
+            <a:noFill/>
+          </a:ln>
+          <a:effectLst/>
+        </p:spPr>
+        <p:style>
+          <a:lnRef idx="1">
+            <a:schemeClr val="accent1"/>
+          </a:lnRef>
+          <a:fillRef idx="3">
+            <a:schemeClr val="accent1"/>
+          </a:fillRef>
+          <a:effectRef idx="2">
+            <a:schemeClr val="accent1"/>
+          </a:effectRef>
+          <a:fontRef idx="minor">
+            <a:schemeClr val="lt1"/>
+          </a:fontRef>
+        </p:style>
+        <p:txBody>
+          <a:bodyPr rtlCol="0" anchor="ctr"/>
+          <a:lstStyle/>
+          <a:p>
+            <a:pPr algn="ctr"/>
+          </a:p>
+        </p:txBody>
+      </p:sp>
+      <p:sp>
+        <p:nvSpPr>
+          <p:cNvPr id="3" name="TextBox 2"/>
+          <p:cNvSpPr txBox="1"/>
+          <p:nvPr/>
+        </p:nvSpPr>
+        <p:spPr>
+          <a:xfrm>
+            <a:off x="640080" y="502920"/>
+            <a:ext cx="10881360" cy="914400"/>
+          </a:xfrm>
+          <a:prstGeom prst="rect">
+            <a:avLst/>
+          </a:prstGeom>
+          <a:noFill/>
+        </p:spPr>
+        <p:txBody>
+          <a:bodyPr wrap="square" anchor="t" lIns="0" rIns="0" tIns="0" bIns="0">
+            <a:noAutofit/>
+          </a:bodyPr>
+          <a:lstStyle/>
+          <a:p>
+            <a:pPr algn="l">
+              <a:lnSpc>
+                <a:spcPct val="100000"/>
+              </a:lnSpc>
+            </a:pPr>
+            <a:r>
+              <a:rPr sz="3400" b="1" i="0">
+                <a:solidFill>
+                  <a:srgbClr val="E6EDF3"/>
+                </a:solidFill>
+                <a:latin typeface="Calibri"/>
+              </a:rPr>
+              <a:t>Three jury criteria, one society of agents</a:t>
+            </a:r>
+          </a:p>
+        </p:txBody>
+      </p:sp>
+      <p:sp>
+        <p:nvSpPr>
+          <p:cNvPr id="4" name="Oval 3"/>
+          <p:cNvSpPr/>
+          <p:nvPr/>
+        </p:nvSpPr>
+        <p:spPr>
+          <a:xfrm>
+            <a:off x="731520" y="1783080"/>
+            <a:ext cx="457200" cy="457200"/>
+          </a:xfrm>
+          <a:prstGeom prst="ellipse">
+            <a:avLst/>
+          </a:prstGeom>
+          <a:solidFill>
+            <a:srgbClr val="3FB950"/>
+          </a:solidFill>
+          <a:ln>
+            <a:noFill/>
+          </a:ln>
+          <a:effectLst/>
+        </p:spPr>
+        <p:style>
+          <a:lnRef idx="1">
+            <a:schemeClr val="accent1"/>
+          </a:lnRef>
+          <a:fillRef idx="3">
+            <a:schemeClr val="accent1"/>
+          </a:fillRef>
+          <a:effectRef idx="2">
+            <a:schemeClr val="accent1"/>
+          </a:effectRef>
+          <a:fontRef idx="minor">
+            <a:schemeClr val="lt1"/>
+          </a:fontRef>
+        </p:style>
+        <p:txBody>
+          <a:bodyPr rtlCol="0" anchor="ctr" wrap="none" lIns="0" rIns="0" tIns="0" bIns="0"/>
+          <a:lstStyle/>
+          <a:p>
+            <a:pPr algn="ctr"/>
+            <a:r>
+              <a:rPr sz="1800" b="1">
+                <a:solidFill>
+                  <a:srgbClr val="0F1419"/>
+                </a:solidFill>
+                <a:latin typeface="Calibri"/>
+              </a:rPr>
+              <a:t>✓</a:t>
+            </a:r>
+          </a:p>
+        </p:txBody>
+      </p:sp>
+      <p:sp>
+        <p:nvSpPr>
+          <p:cNvPr id="5" name="TextBox 4"/>
+          <p:cNvSpPr txBox="1"/>
+          <p:nvPr/>
+        </p:nvSpPr>
+        <p:spPr>
+          <a:xfrm>
+            <a:off x="1371600" y="1737360"/>
+            <a:ext cx="6035040" cy="457200"/>
+          </a:xfrm>
+          <a:prstGeom prst="rect">
+            <a:avLst/>
+          </a:prstGeom>
+          <a:noFill/>
+        </p:spPr>
+        <p:txBody>
+          <a:bodyPr wrap="square" anchor="t" lIns="0" rIns="0" tIns="0" bIns="0">
+            <a:noAutofit/>
+          </a:bodyPr>
+          <a:lstStyle/>
+          <a:p>
+            <a:pPr algn="l">
+              <a:lnSpc>
+                <a:spcPct val="100000"/>
+              </a:lnSpc>
+            </a:pPr>
+            <a:r>
+              <a:rPr sz="2000" b="1" i="0">
+                <a:solidFill>
+                  <a:srgbClr val="E6EDF3"/>
+                </a:solidFill>
+                <a:latin typeface="Calibri"/>
+              </a:rPr>
+              <a:t>Decomposition &amp; roles</a:t>
+            </a:r>
+          </a:p>
+        </p:txBody>
+      </p:sp>
+      <p:sp>
+        <p:nvSpPr>
+          <p:cNvPr id="6" name="TextBox 5"/>
+          <p:cNvSpPr txBox="1"/>
+          <p:nvPr/>
+        </p:nvSpPr>
+        <p:spPr>
+          <a:xfrm>
+            <a:off x="1371600" y="2167128"/>
+            <a:ext cx="6035040" cy="457200"/>
+          </a:xfrm>
+          <a:prstGeom prst="rect">
+            <a:avLst/>
+          </a:prstGeom>
+          <a:noFill/>
+        </p:spPr>
+        <p:txBody>
+          <a:bodyPr wrap="square" anchor="t" lIns="0" rIns="0" tIns="0" bIns="0">
+            <a:noAutofit/>
+          </a:bodyPr>
+          <a:lstStyle/>
+          <a:p>
+            <a:pPr algn="l">
+              <a:lnSpc>
+                <a:spcPct val="100000"/>
+              </a:lnSpc>
+            </a:pPr>
+            <a:r>
+              <a:rPr sz="1400" b="0" i="0">
+                <a:solidFill>
+                  <a:srgbClr val="8B98A5"/>
+                </a:solidFill>
+                <a:latin typeface="Calibri"/>
+              </a:rPr>
+              <a:t>Six specialist agents, each with a job and a model tier.</a:t>
+            </a:r>
+          </a:p>
+        </p:txBody>
+      </p:sp>
+      <p:sp>
+        <p:nvSpPr>
+          <p:cNvPr id="7" name="Oval 6"/>
+          <p:cNvSpPr/>
+          <p:nvPr/>
+        </p:nvSpPr>
+        <p:spPr>
+          <a:xfrm>
+            <a:off x="731520" y="2971800"/>
+            <a:ext cx="457200" cy="457200"/>
+          </a:xfrm>
+          <a:prstGeom prst="ellipse">
+            <a:avLst/>
+          </a:prstGeom>
+          <a:solidFill>
+            <a:srgbClr val="3FB950"/>
+          </a:solidFill>
+          <a:ln>
+            <a:noFill/>
+          </a:ln>
+          <a:effectLst/>
+        </p:spPr>
+        <p:style>
+          <a:lnRef idx="1">
+            <a:schemeClr val="accent1"/>
+          </a:lnRef>
+          <a:fillRef idx="3">
+            <a:schemeClr val="accent1"/>
+          </a:fillRef>
+          <a:effectRef idx="2">
+            <a:schemeClr val="accent1"/>
+          </a:effectRef>
+          <a:fontRef idx="minor">
+            <a:schemeClr val="lt1"/>
+          </a:fontRef>
+        </p:style>
+        <p:txBody>
+          <a:bodyPr rtlCol="0" anchor="ctr" wrap="none" lIns="0" rIns="0" tIns="0" bIns="0"/>
+          <a:lstStyle/>
+          <a:p>
+            <a:pPr algn="ctr"/>
+            <a:r>
+              <a:rPr sz="1800" b="1">
+                <a:solidFill>
+                  <a:srgbClr val="0F1419"/>
+                </a:solidFill>
+                <a:latin typeface="Calibri"/>
+              </a:rPr>
+              <a:t>✓</a:t>
+            </a:r>
+          </a:p>
+        </p:txBody>
+      </p:sp>
+      <p:sp>
+        <p:nvSpPr>
+          <p:cNvPr id="8" name="TextBox 7"/>
+          <p:cNvSpPr txBox="1"/>
+          <p:nvPr/>
+        </p:nvSpPr>
+        <p:spPr>
+          <a:xfrm>
+            <a:off x="1371600" y="2926080"/>
+            <a:ext cx="6035040" cy="457200"/>
+          </a:xfrm>
+          <a:prstGeom prst="rect">
+            <a:avLst/>
+          </a:prstGeom>
+          <a:noFill/>
+        </p:spPr>
+        <p:txBody>
+          <a:bodyPr wrap="square" anchor="t" lIns="0" rIns="0" tIns="0" bIns="0">
+            <a:noAutofit/>
+          </a:bodyPr>
+          <a:lstStyle/>
+          <a:p>
+            <a:pPr algn="l">
+              <a:lnSpc>
+                <a:spcPct val="100000"/>
+              </a:lnSpc>
+            </a:pPr>
+            <a:r>
+              <a:rPr sz="2000" b="1" i="0">
+                <a:solidFill>
+                  <a:srgbClr val="E6EDF3"/>
+                </a:solidFill>
+                <a:latin typeface="Calibri"/>
+              </a:rPr>
+              <a:t>Conflict resolution</a:t>
+            </a:r>
+          </a:p>
+        </p:txBody>
+      </p:sp>
+      <p:sp>
+        <p:nvSpPr>
+          <p:cNvPr id="9" name="TextBox 8"/>
+          <p:cNvSpPr txBox="1"/>
+          <p:nvPr/>
+        </p:nvSpPr>
+        <p:spPr>
+          <a:xfrm>
+            <a:off x="1371600" y="3355848"/>
+            <a:ext cx="6035040" cy="457200"/>
+          </a:xfrm>
+          <a:prstGeom prst="rect">
+            <a:avLst/>
+          </a:prstGeom>
+          <a:noFill/>
+        </p:spPr>
+        <p:txBody>
+          <a:bodyPr wrap="square" anchor="t" lIns="0" rIns="0" tIns="0" bIns="0">
+            <a:noAutofit/>
+          </a:bodyPr>
+          <a:lstStyle/>
+          <a:p>
+            <a:pPr algn="l">
+              <a:lnSpc>
+                <a:spcPct val="100000"/>
+              </a:lnSpc>
+            </a:pPr>
+            <a:r>
+              <a:rPr sz="1400" b="0" i="0">
+                <a:solidFill>
+                  <a:srgbClr val="8B98A5"/>
+                </a:solidFill>
+                <a:latin typeface="Calibri"/>
+              </a:rPr>
+              <a:t>A real Critic → Architect rework loop, resolved in rounds.</a:t>
+            </a:r>
+          </a:p>
+        </p:txBody>
+      </p:sp>
+      <p:sp>
+        <p:nvSpPr>
+          <p:cNvPr id="10" name="Oval 9"/>
+          <p:cNvSpPr/>
+          <p:nvPr/>
+        </p:nvSpPr>
+        <p:spPr>
+          <a:xfrm>
+            <a:off x="731520" y="4160520"/>
+            <a:ext cx="457200" cy="457200"/>
+          </a:xfrm>
+          <a:prstGeom prst="ellipse">
+            <a:avLst/>
+          </a:prstGeom>
+          <a:solidFill>
+            <a:srgbClr val="3FB950"/>
+          </a:solidFill>
+          <a:ln>
+            <a:noFill/>
+          </a:ln>
+          <a:effectLst/>
+        </p:spPr>
+        <p:style>
+          <a:lnRef idx="1">
+            <a:schemeClr val="accent1"/>
+          </a:lnRef>
+          <a:fillRef idx="3">
+            <a:schemeClr val="accent1"/>
+          </a:fillRef>
+          <a:effectRef idx="2">
+            <a:schemeClr val="accent1"/>
+          </a:effectRef>
+          <a:fontRef idx="minor">
+            <a:schemeClr val="lt1"/>
+          </a:fontRef>
+        </p:style>
+        <p:txBody>
+          <a:bodyPr rtlCol="0" anchor="ctr" wrap="none" lIns="0" rIns="0" tIns="0" bIns="0"/>
+          <a:lstStyle/>
+          <a:p>
+            <a:pPr algn="ctr"/>
+            <a:r>
+              <a:rPr sz="1800" b="1">
+                <a:solidFill>
+                  <a:srgbClr val="0F1419"/>
+                </a:solidFill>
+                <a:latin typeface="Calibri"/>
+              </a:rPr>
+              <a:t>✓</a:t>
+            </a:r>
+          </a:p>
+        </p:txBody>
+      </p:sp>
+      <p:sp>
+        <p:nvSpPr>
+          <p:cNvPr id="11" name="TextBox 10"/>
+          <p:cNvSpPr txBox="1"/>
+          <p:nvPr/>
+        </p:nvSpPr>
+        <p:spPr>
+          <a:xfrm>
+            <a:off x="1371600" y="4114800"/>
+            <a:ext cx="6035040" cy="457200"/>
+          </a:xfrm>
+          <a:prstGeom prst="rect">
+            <a:avLst/>
+          </a:prstGeom>
+          <a:noFill/>
+        </p:spPr>
+        <p:txBody>
+          <a:bodyPr wrap="square" anchor="t" lIns="0" rIns="0" tIns="0" bIns="0">
+            <a:noAutofit/>
+          </a:bodyPr>
+          <a:lstStyle/>
+          <a:p>
+            <a:pPr algn="l">
+              <a:lnSpc>
+                <a:spcPct val="100000"/>
+              </a:lnSpc>
+            </a:pPr>
+            <a:r>
+              <a:rPr sz="2000" b="1" i="0">
+                <a:solidFill>
+                  <a:srgbClr val="E6EDF3"/>
+                </a:solidFill>
+                <a:latin typeface="Calibri"/>
+              </a:rPr>
+              <a:t>Measured efficiency</a:t>
+            </a:r>
+          </a:p>
+        </p:txBody>
+      </p:sp>
+      <p:sp>
+        <p:nvSpPr>
+          <p:cNvPr id="12" name="TextBox 11"/>
+          <p:cNvSpPr txBox="1"/>
+          <p:nvPr/>
+        </p:nvSpPr>
+        <p:spPr>
+          <a:xfrm>
+            <a:off x="1371600" y="4544568"/>
+            <a:ext cx="6035040" cy="457200"/>
+          </a:xfrm>
+          <a:prstGeom prst="rect">
+            <a:avLst/>
+          </a:prstGeom>
+          <a:noFill/>
+        </p:spPr>
+        <p:txBody>
+          <a:bodyPr wrap="square" anchor="t" lIns="0" rIns="0" tIns="0" bIns="0">
+            <a:noAutofit/>
+          </a:bodyPr>
+          <a:lstStyle/>
+          <a:p>
+            <a:pPr algn="l">
+              <a:lnSpc>
+                <a:spcPct val="100000"/>
+              </a:lnSpc>
+            </a:pPr>
+            <a:r>
+              <a:rPr sz="1400" b="0" i="0">
+                <a:solidFill>
+                  <a:srgbClr val="8B98A5"/>
+                </a:solidFill>
+                <a:latin typeface="Calibri"/>
+              </a:rPr>
+              <a:t>+3.2 coverage points over a single agent (live, 5 designs).</a:t>
+            </a:r>
+          </a:p>
+        </p:txBody>
+      </p:sp>
+      <p:sp>
+        <p:nvSpPr>
+          <p:cNvPr id="13" name="Rounded Rectangle 12"/>
+          <p:cNvSpPr/>
+          <p:nvPr/>
+        </p:nvSpPr>
+        <p:spPr>
+          <a:xfrm>
+            <a:off x="7955279" y="1783080"/>
+            <a:ext cx="3611880" cy="3291840"/>
+          </a:xfrm>
+          <a:prstGeom prst="roundRect">
+            <a:avLst>
+              <a:gd name="adj" fmla="val 8000"/>
+            </a:avLst>
+          </a:prstGeom>
+          <a:solidFill>
+            <a:srgbClr val="1A212B"/>
+          </a:solidFill>
+          <a:ln w="12700">
+            <a:solidFill>
+              <a:srgbClr val="2D3A48"/>
+            </a:solidFill>
+          </a:ln>
+          <a:effectLst/>
+        </p:spPr>
+        <p:style>
+          <a:lnRef idx="1">
+            <a:schemeClr val="accent1"/>
+          </a:lnRef>
+          <a:fillRef idx="3">
+            <a:schemeClr val="accent1"/>
+          </a:fillRef>
+          <a:effectRef idx="2">
+            <a:schemeClr val="accent1"/>
+          </a:effectRef>
+          <a:fontRef idx="minor">
+            <a:schemeClr val="lt1"/>
+          </a:fontRef>
+        </p:style>
+        <p:txBody>
+          <a:bodyPr rtlCol="0" anchor="ctr"/>
+          <a:lstStyle/>
+          <a:p>
+            <a:pPr algn="ctr"/>
+          </a:p>
+        </p:txBody>
+      </p:sp>
+      <p:sp>
+        <p:nvSpPr>
+          <p:cNvPr id="14" name="TextBox 13"/>
+          <p:cNvSpPr txBox="1"/>
+          <p:nvPr/>
+        </p:nvSpPr>
+        <p:spPr>
+          <a:xfrm>
+            <a:off x="7955279" y="2240280"/>
+            <a:ext cx="3611880" cy="1280160"/>
+          </a:xfrm>
+          <a:prstGeom prst="rect">
+            <a:avLst/>
+          </a:prstGeom>
+          <a:noFill/>
+        </p:spPr>
+        <p:txBody>
+          <a:bodyPr wrap="square" anchor="t" lIns="0" rIns="0" tIns="0" bIns="0">
+            <a:noAutofit/>
+          </a:bodyPr>
+          <a:lstStyle/>
+          <a:p>
+            <a:pPr algn="ctr">
+              <a:lnSpc>
+                <a:spcPct val="100000"/>
+              </a:lnSpc>
+            </a:pPr>
+            <a:r>
+              <a:rPr sz="8400" b="1" i="0">
+                <a:solidFill>
+                  <a:srgbClr val="4F9CF9"/>
+                </a:solidFill>
+                <a:latin typeface="Calibri"/>
+              </a:rPr>
+              <a:t>+3.2</a:t>
+            </a:r>
+          </a:p>
+        </p:txBody>
+      </p:sp>
+      <p:sp>
+        <p:nvSpPr>
+          <p:cNvPr id="15" name="TextBox 14"/>
+          <p:cNvSpPr txBox="1"/>
+          <p:nvPr/>
+        </p:nvSpPr>
+        <p:spPr>
+          <a:xfrm>
+            <a:off x="8138160" y="3611880"/>
+            <a:ext cx="3246120" cy="1097280"/>
+          </a:xfrm>
+          <a:prstGeom prst="rect">
+            <a:avLst/>
+          </a:prstGeom>
+          <a:noFill/>
+        </p:spPr>
+        <p:txBody>
+          <a:bodyPr wrap="square" anchor="t" lIns="0" rIns="0" tIns="0" bIns="0">
+            <a:noAutofit/>
+          </a:bodyPr>
+          <a:lstStyle/>
+          <a:p>
+            <a:pPr algn="ctr">
+              <a:lnSpc>
+                <a:spcPct val="112000"/>
+              </a:lnSpc>
+            </a:pPr>
+            <a:r>
+              <a:rPr sz="1400" b="0" i="0">
+                <a:solidFill>
+                  <a:srgbClr val="8B98A5"/>
+                </a:solidFill>
+                <a:latin typeface="Calibri"/>
+              </a:rPr>
+              <a:t>more engineering concerns surfaced — the case for a society of agents over a single model.</a:t>
+            </a:r>
+          </a:p>
+        </p:txBody>
+      </p:sp>
+      <p:sp>
+        <p:nvSpPr>
+          <p:cNvPr id="16" name="TextBox 15"/>
+          <p:cNvSpPr txBox="1"/>
+          <p:nvPr/>
+        </p:nvSpPr>
+        <p:spPr>
+          <a:xfrm>
+            <a:off x="731520" y="5760720"/>
+            <a:ext cx="10698480" cy="457200"/>
+          </a:xfrm>
+          <a:prstGeom prst="rect">
+            <a:avLst/>
+          </a:prstGeom>
+          <a:noFill/>
+        </p:spPr>
+        <p:txBody>
+          <a:bodyPr wrap="square" anchor="t" lIns="0" rIns="0" tIns="0" bIns="0">
+            <a:noAutofit/>
+          </a:bodyPr>
+          <a:lstStyle/>
+          <a:p>
+            <a:pPr algn="l">
+              <a:lnSpc>
+                <a:spcPct val="100000"/>
+              </a:lnSpc>
+            </a:pPr>
+            <a:r>
+              <a:rPr sz="1500" b="0" i="1">
+                <a:solidFill>
+                  <a:srgbClr val="4F9CF9"/>
+                </a:solidFill>
+                <a:latin typeface="Calibri"/>
+              </a:rPr>
+              <a:t>From a plain-English idea to a structured KiCad start — reviewed by a society of agents.</a:t>
+            </a:r>
+          </a:p>
+        </p:txBody>
+      </p:sp>
+      <p:sp>
+        <p:nvSpPr>
+          <p:cNvPr id="17" name="TextBox 16"/>
+          <p:cNvSpPr txBox="1"/>
+          <p:nvPr/>
+        </p:nvSpPr>
+        <p:spPr>
+          <a:xfrm>
+            <a:off x="640080" y="6437376"/>
+            <a:ext cx="4572000" cy="274320"/>
+          </a:xfrm>
+          <a:prstGeom prst="rect">
+            <a:avLst/>
+          </a:prstGeom>
+          <a:noFill/>
+        </p:spPr>
+        <p:txBody>
+          <a:bodyPr wrap="square" anchor="t" lIns="0" rIns="0" tIns="0" bIns="0">
+            <a:noAutofit/>
+          </a:bodyPr>
+          <a:lstStyle/>
+          <a:p>
+            <a:pPr algn="l">
+              <a:lnSpc>
+                <a:spcPct val="100000"/>
+              </a:lnSpc>
+            </a:pPr>
+            <a:r>
+              <a:rPr sz="1000" b="0" i="0">
+                <a:solidFill>
+                  <a:srgbClr val="8B98A5"/>
+                </a:solidFill>
+                <a:latin typeface="Calibri"/>
+              </a:rPr>
+              <a:t>AI Circuit Architect</a:t>
+            </a:r>
+          </a:p>
+        </p:txBody>
+      </p:sp>
+      <p:sp>
+        <p:nvSpPr>
+          <p:cNvPr id="18" name="TextBox 17"/>
+          <p:cNvSpPr txBox="1"/>
+          <p:nvPr/>
+        </p:nvSpPr>
+        <p:spPr>
+          <a:xfrm>
+            <a:off x="10607040" y="6437376"/>
+            <a:ext cx="1097280" cy="274320"/>
+          </a:xfrm>
+          <a:prstGeom prst="rect">
+            <a:avLst/>
+          </a:prstGeom>
+          <a:noFill/>
+        </p:spPr>
+        <p:txBody>
+          <a:bodyPr wrap="square" anchor="t" lIns="0" rIns="0" tIns="0" bIns="0">
+            <a:noAutofit/>
+          </a:bodyPr>
+          <a:lstStyle/>
+          <a:p>
+            <a:pPr algn="r">
+              <a:lnSpc>
+                <a:spcPct val="100000"/>
+              </a:lnSpc>
+            </a:pPr>
+            <a:r>
+              <a:rPr sz="1000" b="0" i="0">
+                <a:solidFill>
+                  <a:srgbClr val="8B98A5"/>
+                </a:solidFill>
+                <a:latin typeface="Calibri"/>
+              </a:rPr>
+              <a:t>9 / 9</a:t>
             </a:r>
           </a:p>
         </p:txBody>
